--- a/Nexus_Overview.pptx
+++ b/Nexus_Overview.pptx
@@ -19,6 +19,8 @@
     <p:sldId id="267" r:id="rId18"/>
     <p:sldId id="268" r:id="rId19"/>
     <p:sldId id="269" r:id="rId20"/>
+    <p:sldId id="270" r:id="rId21"/>
+    <p:sldId id="271" r:id="rId22"/>
   </p:sldIdLst>
   <p:sldSz cx="12191695" cy="6858000" type="screen4x3"/>
   <p:notesSz cx="6858000" cy="9144000"/>
@@ -3097,7 +3099,7 @@
     <p:bg>
       <p:bgPr>
         <a:solidFill>
-          <a:srgbClr val="1E1E2E"/>
+          <a:srgbClr val="0B0B1A"/>
         </a:solidFill>
         <a:effectLst/>
       </p:bgPr>
@@ -3111,16 +3113,16 @@
       <p:grpSpPr/>
       <p:sp>
         <p:nvSpPr>
-          <p:cNvPr id="2" name="Rectangle 1"/>
+          <p:cNvPr id="2" name="Oval 1"/>
           <p:cNvSpPr/>
           <p:nvPr/>
         </p:nvSpPr>
         <p:spPr>
           <a:xfrm>
-            <a:off x="0" y="2560320"/>
-            <a:ext cx="12191695" cy="73152"/>
-          </a:xfrm>
-          <a:prstGeom prst="rect">
+            <a:off x="8686800" y="-1371600"/>
+            <a:ext cx="4572000" cy="4572000"/>
+          </a:xfrm>
+          <a:prstGeom prst="ellipse">
             <a:avLst/>
           </a:prstGeom>
           <a:solidFill>
@@ -3154,14 +3156,100 @@
       </p:sp>
       <p:sp>
         <p:nvSpPr>
-          <p:cNvPr id="3" name="TextBox 2"/>
+          <p:cNvPr id="3" name="Oval 2"/>
+          <p:cNvSpPr/>
+          <p:nvPr/>
+        </p:nvSpPr>
+        <p:spPr>
+          <a:xfrm>
+            <a:off x="9601200" y="3657600"/>
+            <a:ext cx="2286000" cy="2286000"/>
+          </a:xfrm>
+          <a:prstGeom prst="ellipse">
+            <a:avLst/>
+          </a:prstGeom>
+          <a:solidFill>
+            <a:srgbClr val="00D4AA"/>
+          </a:solidFill>
+          <a:ln>
+            <a:noFill/>
+          </a:ln>
+        </p:spPr>
+        <p:style>
+          <a:lnRef idx="1">
+            <a:schemeClr val="accent1"/>
+          </a:lnRef>
+          <a:fillRef idx="3">
+            <a:schemeClr val="accent1"/>
+          </a:fillRef>
+          <a:effectRef idx="2">
+            <a:schemeClr val="accent1"/>
+          </a:effectRef>
+          <a:fontRef idx="minor">
+            <a:schemeClr val="lt1"/>
+          </a:fontRef>
+        </p:style>
+        <p:txBody>
+          <a:bodyPr rtlCol="0" anchor="ctr"/>
+          <a:lstStyle/>
+          <a:p>
+            <a:pPr algn="ctr"/>
+          </a:p>
+        </p:txBody>
+      </p:sp>
+      <p:sp>
+        <p:nvSpPr>
+          <p:cNvPr id="4" name="Oval 3"/>
+          <p:cNvSpPr/>
+          <p:nvPr/>
+        </p:nvSpPr>
+        <p:spPr>
+          <a:xfrm>
+            <a:off x="-914400" y="4572000"/>
+            <a:ext cx="2743200" cy="2743200"/>
+          </a:xfrm>
+          <a:prstGeom prst="ellipse">
+            <a:avLst/>
+          </a:prstGeom>
+          <a:solidFill>
+            <a:srgbClr val="6C63FF"/>
+          </a:solidFill>
+          <a:ln>
+            <a:noFill/>
+          </a:ln>
+        </p:spPr>
+        <p:style>
+          <a:lnRef idx="1">
+            <a:schemeClr val="accent1"/>
+          </a:lnRef>
+          <a:fillRef idx="3">
+            <a:schemeClr val="accent1"/>
+          </a:fillRef>
+          <a:effectRef idx="2">
+            <a:schemeClr val="accent1"/>
+          </a:effectRef>
+          <a:fontRef idx="minor">
+            <a:schemeClr val="lt1"/>
+          </a:fontRef>
+        </p:style>
+        <p:txBody>
+          <a:bodyPr rtlCol="0" anchor="ctr"/>
+          <a:lstStyle/>
+          <a:p>
+            <a:pPr algn="ctr"/>
+          </a:p>
+        </p:txBody>
+      </p:sp>
+      <p:sp>
+        <p:nvSpPr>
+          <p:cNvPr id="5" name="TextBox 4"/>
           <p:cNvSpPr txBox="1"/>
           <p:nvPr/>
         </p:nvSpPr>
         <p:spPr>
           <a:xfrm>
-            <a:off x="914400" y="1097280"/>
-            <a:ext cx="10058400" cy="1371600"/>
+            <a:off x="914400" y="1371600"/>
+            <a:ext cx="7315200" cy="1097280"/>
           </a:xfrm>
           <a:prstGeom prst="rect">
             <a:avLst/>
@@ -3174,8 +3262,8 @@
           </a:bodyPr>
           <a:lstStyle/>
           <a:p>
-            <a:pPr algn="ctr">
-              <a:defRPr sz="7200" b="1">
+            <a:pPr algn="l">
+              <a:defRPr sz="8000" b="1">
                 <a:solidFill>
                   <a:srgbClr val="FFFFFF"/>
                 </a:solidFill>
@@ -3190,14 +3278,57 @@
       </p:sp>
       <p:sp>
         <p:nvSpPr>
-          <p:cNvPr id="4" name="TextBox 3"/>
+          <p:cNvPr id="6" name="Rectangle 5"/>
+          <p:cNvSpPr/>
+          <p:nvPr/>
+        </p:nvSpPr>
+        <p:spPr>
+          <a:xfrm>
+            <a:off x="914400" y="2560320"/>
+            <a:ext cx="1828800" cy="63500"/>
+          </a:xfrm>
+          <a:prstGeom prst="rect">
+            <a:avLst/>
+          </a:prstGeom>
+          <a:solidFill>
+            <a:srgbClr val="00D4AA"/>
+          </a:solidFill>
+          <a:ln>
+            <a:noFill/>
+          </a:ln>
+        </p:spPr>
+        <p:style>
+          <a:lnRef idx="1">
+            <a:schemeClr val="accent1"/>
+          </a:lnRef>
+          <a:fillRef idx="3">
+            <a:schemeClr val="accent1"/>
+          </a:fillRef>
+          <a:effectRef idx="2">
+            <a:schemeClr val="accent1"/>
+          </a:effectRef>
+          <a:fontRef idx="minor">
+            <a:schemeClr val="lt1"/>
+          </a:fontRef>
+        </p:style>
+        <p:txBody>
+          <a:bodyPr rtlCol="0" anchor="ctr"/>
+          <a:lstStyle/>
+          <a:p>
+            <a:pPr algn="ctr"/>
+          </a:p>
+        </p:txBody>
+      </p:sp>
+      <p:sp>
+        <p:nvSpPr>
+          <p:cNvPr id="7" name="TextBox 6"/>
           <p:cNvSpPr txBox="1"/>
           <p:nvPr/>
         </p:nvSpPr>
         <p:spPr>
           <a:xfrm>
             <a:off x="914400" y="2926080"/>
-            <a:ext cx="10058400" cy="914400"/>
+            <a:ext cx="7315200" cy="548640"/>
           </a:xfrm>
           <a:prstGeom prst="rect">
             <a:avLst/>
@@ -3210,8 +3341,8 @@
           </a:bodyPr>
           <a:lstStyle/>
           <a:p>
-            <a:pPr algn="ctr">
-              <a:defRPr sz="2800" b="0">
+            <a:pPr algn="l">
+              <a:defRPr sz="2400" b="0">
                 <a:solidFill>
                   <a:srgbClr val="6C63FF"/>
                 </a:solidFill>
@@ -3226,14 +3357,14 @@
       </p:sp>
       <p:sp>
         <p:nvSpPr>
-          <p:cNvPr id="5" name="TextBox 4"/>
+          <p:cNvPr id="8" name="TextBox 7"/>
           <p:cNvSpPr txBox="1"/>
           <p:nvPr/>
         </p:nvSpPr>
         <p:spPr>
           <a:xfrm>
-            <a:off x="1828800" y="4114800"/>
-            <a:ext cx="8229600" cy="731520"/>
+            <a:off x="914400" y="3840480"/>
+            <a:ext cx="7315200" cy="457200"/>
           </a:xfrm>
           <a:prstGeom prst="rect">
             <a:avLst/>
@@ -3246,30 +3377,30 @@
           </a:bodyPr>
           <a:lstStyle/>
           <a:p>
-            <a:pPr algn="ctr">
-              <a:defRPr sz="2000" b="0">
-                <a:solidFill>
-                  <a:srgbClr val="CCCCDD"/>
-                </a:solidFill>
-                <a:latin typeface="Calibri"/>
-              </a:defRPr>
-            </a:pPr>
-            <a:r>
-              <a:t>Chat · Copilot · Voice — One Orchestrator</a:t>
-            </a:r>
-          </a:p>
-        </p:txBody>
-      </p:sp>
-      <p:sp>
-        <p:nvSpPr>
-          <p:cNvPr id="6" name="TextBox 5"/>
+            <a:pPr algn="l">
+              <a:defRPr sz="1600" b="0">
+                <a:solidFill>
+                  <a:srgbClr val="B0B0C8"/>
+                </a:solidFill>
+                <a:latin typeface="Calibri"/>
+              </a:defRPr>
+            </a:pPr>
+            <a:r>
+              <a:t>Chat  ·  Copilot  ·  Voice  —  One Orchestrator</a:t>
+            </a:r>
+          </a:p>
+        </p:txBody>
+      </p:sp>
+      <p:sp>
+        <p:nvSpPr>
+          <p:cNvPr id="9" name="TextBox 8"/>
           <p:cNvSpPr txBox="1"/>
           <p:nvPr/>
         </p:nvSpPr>
         <p:spPr>
           <a:xfrm>
-            <a:off x="2743200" y="5669280"/>
-            <a:ext cx="6400800" cy="457200"/>
+            <a:off x="914400" y="5029200"/>
+            <a:ext cx="7315200" cy="365760"/>
           </a:xfrm>
           <a:prstGeom prst="rect">
             <a:avLst/>
@@ -3282,16 +3413,52 @@
           </a:bodyPr>
           <a:lstStyle/>
           <a:p>
-            <a:pPr algn="ctr">
-              <a:defRPr sz="1400" b="0">
-                <a:solidFill>
-                  <a:srgbClr val="CCCCDD"/>
+            <a:pPr algn="l">
+              <a:defRPr sz="1200" b="0">
+                <a:solidFill>
+                  <a:srgbClr val="6B6B8A"/>
                 </a:solidFill>
                 <a:latin typeface="Calibri"/>
               </a:defRPr>
             </a:pPr>
             <a:r>
               <a:t>github.com/ShubhamRSY/voice-agents</a:t>
+            </a:r>
+          </a:p>
+        </p:txBody>
+      </p:sp>
+      <p:sp>
+        <p:nvSpPr>
+          <p:cNvPr id="10" name="TextBox 9"/>
+          <p:cNvSpPr txBox="1"/>
+          <p:nvPr/>
+        </p:nvSpPr>
+        <p:spPr>
+          <a:xfrm>
+            <a:off x="10972800" y="6400800"/>
+            <a:ext cx="914400" cy="274320"/>
+          </a:xfrm>
+          <a:prstGeom prst="rect">
+            <a:avLst/>
+          </a:prstGeom>
+          <a:noFill/>
+        </p:spPr>
+        <p:txBody>
+          <a:bodyPr wrap="square">
+            <a:spAutoFit/>
+          </a:bodyPr>
+          <a:lstStyle/>
+          <a:p>
+            <a:pPr algn="r">
+              <a:defRPr sz="1000" b="0">
+                <a:solidFill>
+                  <a:srgbClr val="6B6B8A"/>
+                </a:solidFill>
+                <a:latin typeface="Calibri"/>
+              </a:defRPr>
+            </a:pPr>
+            <a:r>
+              <a:t>01 / 16</a:t>
             </a:r>
           </a:p>
         </p:txBody>
@@ -3310,7 +3477,7 @@
     <p:bg>
       <p:bgPr>
         <a:solidFill>
-          <a:srgbClr val="1E1E2E"/>
+          <a:srgbClr val="0B0B1A"/>
         </a:solidFill>
         <a:effectLst/>
       </p:bgPr>
@@ -3324,20 +3491,56 @@
       <p:grpSpPr/>
       <p:sp>
         <p:nvSpPr>
-          <p:cNvPr id="2" name="Rectangle 1"/>
+          <p:cNvPr id="2" name="TextBox 1"/>
+          <p:cNvSpPr txBox="1"/>
+          <p:nvPr/>
+        </p:nvSpPr>
+        <p:spPr>
+          <a:xfrm>
+            <a:off x="731520" y="274320"/>
+            <a:ext cx="5486400" cy="365760"/>
+          </a:xfrm>
+          <a:prstGeom prst="rect">
+            <a:avLst/>
+          </a:prstGeom>
+          <a:noFill/>
+        </p:spPr>
+        <p:txBody>
+          <a:bodyPr wrap="square">
+            <a:spAutoFit/>
+          </a:bodyPr>
+          <a:lstStyle/>
+          <a:p>
+            <a:pPr algn="l">
+              <a:defRPr sz="1200" b="1">
+                <a:solidFill>
+                  <a:srgbClr val="00D4AA"/>
+                </a:solidFill>
+                <a:latin typeface="Calibri"/>
+              </a:defRPr>
+            </a:pPr>
+            <a:r>
+              <a:t>FRONTEND</a:t>
+            </a:r>
+          </a:p>
+        </p:txBody>
+      </p:sp>
+      <p:sp>
+        <p:nvSpPr>
+          <p:cNvPr id="3" name="Rectangle 2"/>
           <p:cNvSpPr/>
           <p:nvPr/>
         </p:nvSpPr>
         <p:spPr>
           <a:xfrm>
-            <a:off x="731520" y="548640"/>
-            <a:ext cx="3657600" cy="50800"/>
+            <a:off x="731520" y="640080"/>
+            <a:ext cx="1097280" cy="50800"/>
           </a:xfrm>
           <a:prstGeom prst="rect">
             <a:avLst/>
           </a:prstGeom>
           <a:solidFill>
-            <a:srgbClr val="6C63FF"/>
+            <a:srgbClr val="00D4AA"/>
           </a:solidFill>
           <a:ln>
             <a:noFill/>
@@ -3367,14 +3570,14 @@
       </p:sp>
       <p:sp>
         <p:nvSpPr>
-          <p:cNvPr id="3" name="TextBox 2"/>
+          <p:cNvPr id="4" name="TextBox 3"/>
           <p:cNvSpPr txBox="1"/>
           <p:nvPr/>
         </p:nvSpPr>
         <p:spPr>
           <a:xfrm>
-            <a:off x="731520" y="731520"/>
-            <a:ext cx="9144000" cy="731520"/>
+            <a:off x="731520" y="1005840"/>
+            <a:ext cx="10058400" cy="914400"/>
           </a:xfrm>
           <a:prstGeom prst="rect">
             <a:avLst/>
@@ -3388,7 +3591,7 @@
           <a:lstStyle/>
           <a:p>
             <a:pPr algn="l">
-              <a:defRPr sz="3600" b="1">
+              <a:defRPr sz="4000" b="1">
                 <a:solidFill>
                   <a:srgbClr val="FFFFFF"/>
                 </a:solidFill>
@@ -3403,13 +3606,56 @@
       </p:sp>
       <p:sp>
         <p:nvSpPr>
-          <p:cNvPr id="4" name="TextBox 3"/>
+          <p:cNvPr id="5" name="Oval 4"/>
+          <p:cNvSpPr/>
+          <p:nvPr/>
+        </p:nvSpPr>
+        <p:spPr>
+          <a:xfrm>
+            <a:off x="10515600" y="4114800"/>
+            <a:ext cx="1828800" cy="1828800"/>
+          </a:xfrm>
+          <a:prstGeom prst="ellipse">
+            <a:avLst/>
+          </a:prstGeom>
+          <a:solidFill>
+            <a:srgbClr val="00D4AA"/>
+          </a:solidFill>
+          <a:ln>
+            <a:noFill/>
+          </a:ln>
+        </p:spPr>
+        <p:style>
+          <a:lnRef idx="1">
+            <a:schemeClr val="accent1"/>
+          </a:lnRef>
+          <a:fillRef idx="3">
+            <a:schemeClr val="accent1"/>
+          </a:fillRef>
+          <a:effectRef idx="2">
+            <a:schemeClr val="accent1"/>
+          </a:effectRef>
+          <a:fontRef idx="minor">
+            <a:schemeClr val="lt1"/>
+          </a:fontRef>
+        </p:style>
+        <p:txBody>
+          <a:bodyPr rtlCol="0" anchor="ctr"/>
+          <a:lstStyle/>
+          <a:p>
+            <a:pPr algn="ctr"/>
+          </a:p>
+        </p:txBody>
+      </p:sp>
+      <p:sp>
+        <p:nvSpPr>
+          <p:cNvPr id="6" name="TextBox 5"/>
           <p:cNvSpPr txBox="1"/>
           <p:nvPr/>
         </p:nvSpPr>
         <p:spPr>
           <a:xfrm>
-            <a:off x="731520" y="1828800"/>
+            <a:off x="731520" y="2011680"/>
             <a:ext cx="10058400" cy="4114800"/>
           </a:xfrm>
           <a:prstGeom prst="rect">
@@ -3425,27 +3671,27 @@
           <a:p>
             <a:pPr>
               <a:spcAft>
-                <a:spcPts val="800"/>
+                <a:spcPts val="600"/>
               </a:spcAft>
-              <a:defRPr sz="1800">
-                <a:solidFill>
-                  <a:srgbClr val="CCCCDD"/>
-                </a:solidFill>
-                <a:latin typeface="Calibri"/>
-              </a:defRPr>
-            </a:pPr>
-            <a:r>
-              <a:t>Dark mode with premium animations and micro-interactions</a:t>
+              <a:defRPr sz="1600">
+                <a:solidFill>
+                  <a:srgbClr val="B0B0C8"/>
+                </a:solidFill>
+                <a:latin typeface="Calibri"/>
+              </a:defRPr>
+            </a:pPr>
+            <a:r>
+              <a:t>Dark mode with premium animations &amp; micro-interactions</a:t>
             </a:r>
           </a:p>
           <a:p>
             <a:pPr>
               <a:spcAft>
-                <a:spcPts val="800"/>
+                <a:spcPts val="600"/>
               </a:spcAft>
-              <a:defRPr sz="1800">
-                <a:solidFill>
-                  <a:srgbClr val="CCCCDD"/>
+              <a:defRPr sz="1600">
+                <a:solidFill>
+                  <a:srgbClr val="B0B0C8"/>
                 </a:solidFill>
                 <a:latin typeface="Calibri"/>
               </a:defRPr>
@@ -3457,75 +3703,75 @@
           <a:p>
             <a:pPr>
               <a:spcAft>
-                <a:spcPts val="800"/>
+                <a:spcPts val="600"/>
               </a:spcAft>
-              <a:defRPr sz="1800">
-                <a:solidFill>
-                  <a:srgbClr val="CCCCDD"/>
-                </a:solidFill>
-                <a:latin typeface="Calibri"/>
-              </a:defRPr>
-            </a:pPr>
-            <a:r>
-              <a:t>Per-mode message filtering with sync toggle (🔗 / ⊘)</a:t>
+              <a:defRPr sz="1600">
+                <a:solidFill>
+                  <a:srgbClr val="B0B0C8"/>
+                </a:solidFill>
+                <a:latin typeface="Calibri"/>
+              </a:defRPr>
+            </a:pPr>
+            <a:r>
+              <a:t>Per-mode message filtering + sync toggle (🔗 / ⊘)</a:t>
             </a:r>
           </a:p>
           <a:p>
             <a:pPr>
               <a:spcAft>
-                <a:spcPts val="800"/>
+                <a:spcPts val="600"/>
               </a:spcAft>
-              <a:defRPr sz="1800">
-                <a:solidFill>
-                  <a:srgbClr val="CCCCDD"/>
-                </a:solidFill>
-                <a:latin typeface="Calibri"/>
-              </a:defRPr>
-            </a:pPr>
-            <a:r>
-              <a:t>Session sidebar: create, rename, switch, clear sessions</a:t>
+              <a:defRPr sz="1600">
+                <a:solidFill>
+                  <a:srgbClr val="B0B0C8"/>
+                </a:solidFill>
+                <a:latin typeface="Calibri"/>
+              </a:defRPr>
+            </a:pPr>
+            <a:r>
+              <a:t>Session sidebar — create, rename, switch, clear</a:t>
             </a:r>
           </a:p>
           <a:p>
             <a:pPr>
               <a:spcAft>
-                <a:spcPts val="800"/>
+                <a:spcPts val="600"/>
               </a:spcAft>
-              <a:defRPr sz="1800">
-                <a:solidFill>
-                  <a:srgbClr val="CCCCDD"/>
-                </a:solidFill>
-                <a:latin typeface="Calibri"/>
-              </a:defRPr>
-            </a:pPr>
-            <a:r>
-              <a:t>SSE streaming — word-by-word AI response display</a:t>
+              <a:defRPr sz="1600">
+                <a:solidFill>
+                  <a:srgbClr val="B0B0C8"/>
+                </a:solidFill>
+                <a:latin typeface="Calibri"/>
+              </a:defRPr>
+            </a:pPr>
+            <a:r>
+              <a:t>SSE streaming — word-by-word token display</a:t>
             </a:r>
           </a:p>
           <a:p>
             <a:pPr>
               <a:spcAft>
-                <a:spcPts val="800"/>
+                <a:spcPts val="600"/>
               </a:spcAft>
-              <a:defRPr sz="1800">
-                <a:solidFill>
-                  <a:srgbClr val="CCCCDD"/>
-                </a:solidFill>
-                <a:latin typeface="Calibri"/>
-              </a:defRPr>
-            </a:pPr>
-            <a:r>
-              <a:t>Typing indicator and streaming cursor</a:t>
+              <a:defRPr sz="1600">
+                <a:solidFill>
+                  <a:srgbClr val="B0B0C8"/>
+                </a:solidFill>
+                <a:latin typeface="Calibri"/>
+              </a:defRPr>
+            </a:pPr>
+            <a:r>
+              <a:t>Typing indicator, streaming cursor, entrance animations</a:t>
             </a:r>
           </a:p>
           <a:p>
             <a:pPr>
               <a:spcAft>
-                <a:spcPts val="800"/>
+                <a:spcPts val="600"/>
               </a:spcAft>
-              <a:defRPr sz="1800">
-                <a:solidFill>
-                  <a:srgbClr val="CCCCDD"/>
+              <a:defRPr sz="1600">
+                <a:solidFill>
+                  <a:srgbClr val="B0B0C8"/>
                 </a:solidFill>
                 <a:latin typeface="Calibri"/>
               </a:defRPr>
@@ -3537,17 +3783,53 @@
           <a:p>
             <a:pPr>
               <a:spcAft>
-                <a:spcPts val="800"/>
+                <a:spcPts val="600"/>
               </a:spcAft>
-              <a:defRPr sz="1800">
-                <a:solidFill>
-                  <a:srgbClr val="CCCCDD"/>
-                </a:solidFill>
-                <a:latin typeface="Calibri"/>
-              </a:defRPr>
-            </a:pPr>
-            <a:r>
-              <a:t>Clean, responsive layout with scrollable message history</a:t>
+              <a:defRPr sz="1600">
+                <a:solidFill>
+                  <a:srgbClr val="B0B0C8"/>
+                </a:solidFill>
+                <a:latin typeface="Calibri"/>
+              </a:defRPr>
+            </a:pPr>
+            <a:r>
+              <a:t>Scrollable history, button glow effects, thin scrollbars</a:t>
+            </a:r>
+          </a:p>
+        </p:txBody>
+      </p:sp>
+      <p:sp>
+        <p:nvSpPr>
+          <p:cNvPr id="7" name="TextBox 6"/>
+          <p:cNvSpPr txBox="1"/>
+          <p:nvPr/>
+        </p:nvSpPr>
+        <p:spPr>
+          <a:xfrm>
+            <a:off x="10972800" y="6400800"/>
+            <a:ext cx="914400" cy="274320"/>
+          </a:xfrm>
+          <a:prstGeom prst="rect">
+            <a:avLst/>
+          </a:prstGeom>
+          <a:noFill/>
+        </p:spPr>
+        <p:txBody>
+          <a:bodyPr wrap="square">
+            <a:spAutoFit/>
+          </a:bodyPr>
+          <a:lstStyle/>
+          <a:p>
+            <a:pPr algn="r">
+              <a:defRPr sz="1000" b="0">
+                <a:solidFill>
+                  <a:srgbClr val="6B6B8A"/>
+                </a:solidFill>
+                <a:latin typeface="Calibri"/>
+              </a:defRPr>
+            </a:pPr>
+            <a:r>
+              <a:t>10 / 16</a:t>
             </a:r>
           </a:p>
         </p:txBody>
@@ -3566,7 +3848,7 @@
     <p:bg>
       <p:bgPr>
         <a:solidFill>
-          <a:srgbClr val="1E1E2E"/>
+          <a:srgbClr val="0B0B1A"/>
         </a:solidFill>
         <a:effectLst/>
       </p:bgPr>
@@ -3580,20 +3862,56 @@
       <p:grpSpPr/>
       <p:sp>
         <p:nvSpPr>
-          <p:cNvPr id="2" name="Rectangle 1"/>
+          <p:cNvPr id="2" name="TextBox 1"/>
+          <p:cNvSpPr txBox="1"/>
+          <p:nvPr/>
+        </p:nvSpPr>
+        <p:spPr>
+          <a:xfrm>
+            <a:off x="731520" y="274320"/>
+            <a:ext cx="5486400" cy="365760"/>
+          </a:xfrm>
+          <a:prstGeom prst="rect">
+            <a:avLst/>
+          </a:prstGeom>
+          <a:noFill/>
+        </p:spPr>
+        <p:txBody>
+          <a:bodyPr wrap="square">
+            <a:spAutoFit/>
+          </a:bodyPr>
+          <a:lstStyle/>
+          <a:p>
+            <a:pPr algn="l">
+              <a:defRPr sz="1200" b="1">
+                <a:solidFill>
+                  <a:srgbClr val="00D4AA"/>
+                </a:solidFill>
+                <a:latin typeface="Calibri"/>
+              </a:defRPr>
+            </a:pPr>
+            <a:r>
+              <a:t>INTEGRATION</a:t>
+            </a:r>
+          </a:p>
+        </p:txBody>
+      </p:sp>
+      <p:sp>
+        <p:nvSpPr>
+          <p:cNvPr id="3" name="Rectangle 2"/>
           <p:cNvSpPr/>
           <p:nvPr/>
         </p:nvSpPr>
         <p:spPr>
           <a:xfrm>
-            <a:off x="731520" y="548640"/>
-            <a:ext cx="3657600" cy="50800"/>
+            <a:off x="731520" y="640080"/>
+            <a:ext cx="1097280" cy="50800"/>
           </a:xfrm>
           <a:prstGeom prst="rect">
             <a:avLst/>
           </a:prstGeom>
           <a:solidFill>
-            <a:srgbClr val="6C63FF"/>
+            <a:srgbClr val="00D4AA"/>
           </a:solidFill>
           <a:ln>
             <a:noFill/>
@@ -3623,14 +3941,14 @@
       </p:sp>
       <p:sp>
         <p:nvSpPr>
-          <p:cNvPr id="3" name="TextBox 2"/>
+          <p:cNvPr id="4" name="TextBox 3"/>
           <p:cNvSpPr txBox="1"/>
           <p:nvPr/>
         </p:nvSpPr>
         <p:spPr>
           <a:xfrm>
-            <a:off x="731520" y="731520"/>
-            <a:ext cx="9144000" cy="731520"/>
+            <a:off x="731520" y="1005840"/>
+            <a:ext cx="10058400" cy="914400"/>
           </a:xfrm>
           <a:prstGeom prst="rect">
             <a:avLst/>
@@ -3644,7 +3962,7 @@
           <a:lstStyle/>
           <a:p>
             <a:pPr algn="l">
-              <a:defRPr sz="3600" b="1">
+              <a:defRPr sz="4000" b="1">
                 <a:solidFill>
                   <a:srgbClr val="FFFFFF"/>
                 </a:solidFill>
@@ -3659,13 +3977,56 @@
       </p:sp>
       <p:sp>
         <p:nvSpPr>
-          <p:cNvPr id="4" name="TextBox 3"/>
+          <p:cNvPr id="5" name="Oval 4"/>
+          <p:cNvSpPr/>
+          <p:nvPr/>
+        </p:nvSpPr>
+        <p:spPr>
+          <a:xfrm>
+            <a:off x="-274320" y="457200"/>
+            <a:ext cx="1645920" cy="1645920"/>
+          </a:xfrm>
+          <a:prstGeom prst="ellipse">
+            <a:avLst/>
+          </a:prstGeom>
+          <a:solidFill>
+            <a:srgbClr val="FF6B6B"/>
+          </a:solidFill>
+          <a:ln>
+            <a:noFill/>
+          </a:ln>
+        </p:spPr>
+        <p:style>
+          <a:lnRef idx="1">
+            <a:schemeClr val="accent1"/>
+          </a:lnRef>
+          <a:fillRef idx="3">
+            <a:schemeClr val="accent1"/>
+          </a:fillRef>
+          <a:effectRef idx="2">
+            <a:schemeClr val="accent1"/>
+          </a:effectRef>
+          <a:fontRef idx="minor">
+            <a:schemeClr val="lt1"/>
+          </a:fontRef>
+        </p:style>
+        <p:txBody>
+          <a:bodyPr rtlCol="0" anchor="ctr"/>
+          <a:lstStyle/>
+          <a:p>
+            <a:pPr algn="ctr"/>
+          </a:p>
+        </p:txBody>
+      </p:sp>
+      <p:sp>
+        <p:nvSpPr>
+          <p:cNvPr id="6" name="TextBox 5"/>
           <p:cNvSpPr txBox="1"/>
           <p:nvPr/>
         </p:nvSpPr>
         <p:spPr>
           <a:xfrm>
-            <a:off x="731520" y="1828800"/>
+            <a:off x="731520" y="2011680"/>
             <a:ext cx="10058400" cy="3657600"/>
           </a:xfrm>
           <a:prstGeom prst="rect">
@@ -3683,9 +4044,9 @@
               <a:spcAft>
                 <a:spcPts val="800"/>
               </a:spcAft>
-              <a:defRPr sz="1800">
-                <a:solidFill>
-                  <a:srgbClr val="CCCCDD"/>
+              <a:defRPr sz="1600">
+                <a:solidFill>
+                  <a:srgbClr val="B0B0C8"/>
                 </a:solidFill>
                 <a:latin typeface="Calibri"/>
               </a:defRPr>
@@ -3699,15 +4060,15 @@
               <a:spcAft>
                 <a:spcPts val="800"/>
               </a:spcAft>
-              <a:defRPr sz="1800">
-                <a:solidFill>
-                  <a:srgbClr val="CCCCDD"/>
-                </a:solidFill>
-                <a:latin typeface="Calibri"/>
-              </a:defRPr>
-            </a:pPr>
-            <a:r>
-              <a:t>Events: session.created, message.completed, feedback.submitted</a:t>
+              <a:defRPr sz="1600">
+                <a:solidFill>
+                  <a:srgbClr val="B0B0C8"/>
+                </a:solidFill>
+                <a:latin typeface="Calibri"/>
+              </a:defRPr>
+            </a:pPr>
+            <a:r>
+              <a:t>Events: session.created · message.completed · feedback.submitted</a:t>
             </a:r>
           </a:p>
           <a:p>
@@ -3715,15 +4076,15 @@
               <a:spcAft>
                 <a:spcPts val="800"/>
               </a:spcAft>
-              <a:defRPr sz="1800">
-                <a:solidFill>
-                  <a:srgbClr val="CCCCDD"/>
-                </a:solidFill>
-                <a:latin typeface="Calibri"/>
-              </a:defRPr>
-            </a:pPr>
-            <a:r>
-              <a:t>Async dispatch via httpx — non-blocking</a:t>
+              <a:defRPr sz="1600">
+                <a:solidFill>
+                  <a:srgbClr val="B0B0C8"/>
+                </a:solidFill>
+                <a:latin typeface="Calibri"/>
+              </a:defRPr>
+            </a:pPr>
+            <a:r>
+              <a:t>Async HTTP dispatch via httpx — non-blocking</a:t>
             </a:r>
           </a:p>
           <a:p>
@@ -3731,15 +4092,15 @@
               <a:spcAft>
                 <a:spcPts val="800"/>
               </a:spcAft>
-              <a:defRPr sz="1800">
-                <a:solidFill>
-                  <a:srgbClr val="CCCCDD"/>
-                </a:solidFill>
-                <a:latin typeface="Calibri"/>
-              </a:defRPr>
-            </a:pPr>
-            <a:r>
-              <a:t>Event history endpoint for debugging</a:t>
+              <a:defRPr sz="1600">
+                <a:solidFill>
+                  <a:srgbClr val="B0B0C8"/>
+                </a:solidFill>
+                <a:latin typeface="Calibri"/>
+              </a:defRPr>
+            </a:pPr>
+            <a:r>
+              <a:t>Event history endpoint for debugging &amp; replay</a:t>
             </a:r>
           </a:p>
           <a:p>
@@ -3747,15 +4108,83 @@
               <a:spcAft>
                 <a:spcPts val="800"/>
               </a:spcAft>
-              <a:defRPr sz="1800">
-                <a:solidFill>
-                  <a:srgbClr val="CCCCDD"/>
-                </a:solidFill>
-                <a:latin typeface="Calibri"/>
-              </a:defRPr>
-            </a:pPr>
-            <a:r>
-              <a:t>Connect to CRMs (Salesforce, Zendesk, ServiceNow), Slack, and more</a:t>
+              <a:defRPr sz="1600">
+                <a:solidFill>
+                  <a:srgbClr val="B0B0C8"/>
+                </a:solidFill>
+                <a:latin typeface="Calibri"/>
+              </a:defRPr>
+            </a:pPr>
+            <a:r>
+              <a:t>Connect to CRMs: Salesforce, Zendesk, ServiceNow</a:t>
+            </a:r>
+          </a:p>
+          <a:p>
+            <a:pPr>
+              <a:spcAft>
+                <a:spcPts val="800"/>
+              </a:spcAft>
+              <a:defRPr sz="1600">
+                <a:solidFill>
+                  <a:srgbClr val="B0B0C8"/>
+                </a:solidFill>
+                <a:latin typeface="Calibri"/>
+              </a:defRPr>
+            </a:pPr>
+            <a:r>
+              <a:t>Notifications: Slack, email, and more</a:t>
+            </a:r>
+          </a:p>
+          <a:p>
+            <a:pPr>
+              <a:spcAft>
+                <a:spcPts val="800"/>
+              </a:spcAft>
+              <a:defRPr sz="1600">
+                <a:solidFill>
+                  <a:srgbClr val="B0B0C8"/>
+                </a:solidFill>
+                <a:latin typeface="Calibri"/>
+              </a:defRPr>
+            </a:pPr>
+            <a:r>
+              <a:t>Template workflows included for n8n &amp; Zapier</a:t>
+            </a:r>
+          </a:p>
+        </p:txBody>
+      </p:sp>
+      <p:sp>
+        <p:nvSpPr>
+          <p:cNvPr id="7" name="TextBox 6"/>
+          <p:cNvSpPr txBox="1"/>
+          <p:nvPr/>
+        </p:nvSpPr>
+        <p:spPr>
+          <a:xfrm>
+            <a:off x="10972800" y="6400800"/>
+            <a:ext cx="914400" cy="274320"/>
+          </a:xfrm>
+          <a:prstGeom prst="rect">
+            <a:avLst/>
+          </a:prstGeom>
+          <a:noFill/>
+        </p:spPr>
+        <p:txBody>
+          <a:bodyPr wrap="square">
+            <a:spAutoFit/>
+          </a:bodyPr>
+          <a:lstStyle/>
+          <a:p>
+            <a:pPr algn="r">
+              <a:defRPr sz="1000" b="0">
+                <a:solidFill>
+                  <a:srgbClr val="6B6B8A"/>
+                </a:solidFill>
+                <a:latin typeface="Calibri"/>
+              </a:defRPr>
+            </a:pPr>
+            <a:r>
+              <a:t>11 / 16</a:t>
             </a:r>
           </a:p>
         </p:txBody>
@@ -3774,7 +4203,7 @@
     <p:bg>
       <p:bgPr>
         <a:solidFill>
-          <a:srgbClr val="1E1E2E"/>
+          <a:srgbClr val="0B0B1A"/>
         </a:solidFill>
         <a:effectLst/>
       </p:bgPr>
@@ -3788,20 +4217,56 @@
       <p:grpSpPr/>
       <p:sp>
         <p:nvSpPr>
-          <p:cNvPr id="2" name="Rectangle 1"/>
+          <p:cNvPr id="2" name="TextBox 1"/>
+          <p:cNvSpPr txBox="1"/>
+          <p:nvPr/>
+        </p:nvSpPr>
+        <p:spPr>
+          <a:xfrm>
+            <a:off x="731520" y="274320"/>
+            <a:ext cx="5486400" cy="365760"/>
+          </a:xfrm>
+          <a:prstGeom prst="rect">
+            <a:avLst/>
+          </a:prstGeom>
+          <a:noFill/>
+        </p:spPr>
+        <p:txBody>
+          <a:bodyPr wrap="square">
+            <a:spAutoFit/>
+          </a:bodyPr>
+          <a:lstStyle/>
+          <a:p>
+            <a:pPr algn="l">
+              <a:defRPr sz="1200" b="1">
+                <a:solidFill>
+                  <a:srgbClr val="00D4AA"/>
+                </a:solidFill>
+                <a:latin typeface="Calibri"/>
+              </a:defRPr>
+            </a:pPr>
+            <a:r>
+              <a:t>CONFIGURATION</a:t>
+            </a:r>
+          </a:p>
+        </p:txBody>
+      </p:sp>
+      <p:sp>
+        <p:nvSpPr>
+          <p:cNvPr id="3" name="Rectangle 2"/>
           <p:cNvSpPr/>
           <p:nvPr/>
         </p:nvSpPr>
         <p:spPr>
           <a:xfrm>
-            <a:off x="731520" y="548640"/>
-            <a:ext cx="3657600" cy="50800"/>
+            <a:off x="731520" y="640080"/>
+            <a:ext cx="1097280" cy="50800"/>
           </a:xfrm>
           <a:prstGeom prst="rect">
             <a:avLst/>
           </a:prstGeom>
           <a:solidFill>
-            <a:srgbClr val="6C63FF"/>
+            <a:srgbClr val="00D4AA"/>
           </a:solidFill>
           <a:ln>
             <a:noFill/>
@@ -3831,14 +4296,14 @@
       </p:sp>
       <p:sp>
         <p:nvSpPr>
-          <p:cNvPr id="3" name="TextBox 2"/>
+          <p:cNvPr id="4" name="TextBox 3"/>
           <p:cNvSpPr txBox="1"/>
           <p:nvPr/>
         </p:nvSpPr>
         <p:spPr>
           <a:xfrm>
-            <a:off x="731520" y="731520"/>
-            <a:ext cx="9144000" cy="731520"/>
+            <a:off x="731520" y="1005840"/>
+            <a:ext cx="10058400" cy="914400"/>
           </a:xfrm>
           <a:prstGeom prst="rect">
             <a:avLst/>
@@ -3852,7 +4317,7 @@
           <a:lstStyle/>
           <a:p>
             <a:pPr algn="l">
-              <a:defRPr sz="3600" b="1">
+              <a:defRPr sz="4000" b="1">
                 <a:solidFill>
                   <a:srgbClr val="FFFFFF"/>
                 </a:solidFill>
@@ -3860,21 +4325,21 @@
               </a:defRPr>
             </a:pPr>
             <a:r>
-              <a:t>Deployment</a:t>
-            </a:r>
-          </a:p>
-        </p:txBody>
-      </p:sp>
-      <p:sp>
-        <p:nvSpPr>
-          <p:cNvPr id="4" name="TextBox 3"/>
+              <a:t>Agent Definitions</a:t>
+            </a:r>
+          </a:p>
+        </p:txBody>
+      </p:sp>
+      <p:sp>
+        <p:nvSpPr>
+          <p:cNvPr id="5" name="TextBox 4"/>
           <p:cNvSpPr txBox="1"/>
           <p:nvPr/>
         </p:nvSpPr>
         <p:spPr>
           <a:xfrm>
             <a:off x="731520" y="1828800"/>
-            <a:ext cx="10058400" cy="3657600"/>
+            <a:ext cx="10058400" cy="457200"/>
           </a:xfrm>
           <a:prstGeom prst="rect">
             <a:avLst/>
@@ -3887,83 +4352,344 @@
           </a:bodyPr>
           <a:lstStyle/>
           <a:p>
+            <a:pPr algn="l">
+              <a:defRPr sz="1600" b="0">
+                <a:solidFill>
+                  <a:srgbClr val="B0B0C8"/>
+                </a:solidFill>
+                <a:latin typeface="Calibri"/>
+              </a:defRPr>
+            </a:pPr>
+            <a:r>
+              <a:t>Agents are defined in YAML — no code changes needed:</a:t>
+            </a:r>
+          </a:p>
+        </p:txBody>
+      </p:sp>
+      <p:sp>
+        <p:nvSpPr>
+          <p:cNvPr id="6" name="Rounded Rectangle 5"/>
+          <p:cNvSpPr/>
+          <p:nvPr/>
+        </p:nvSpPr>
+        <p:spPr>
+          <a:xfrm>
+            <a:off x="731520" y="2377440"/>
+            <a:ext cx="10058400" cy="2926080"/>
+          </a:xfrm>
+          <a:prstGeom prst="roundRect">
+            <a:avLst>
+              <a:gd name="adj" fmla="val 5000"/>
+            </a:avLst>
+          </a:prstGeom>
+          <a:solidFill>
+            <a:srgbClr val="151525"/>
+          </a:solidFill>
+          <a:ln>
+            <a:noFill/>
+          </a:ln>
+        </p:spPr>
+        <p:style>
+          <a:lnRef idx="1">
+            <a:schemeClr val="accent1"/>
+          </a:lnRef>
+          <a:fillRef idx="3">
+            <a:schemeClr val="accent1"/>
+          </a:fillRef>
+          <a:effectRef idx="2">
+            <a:schemeClr val="accent1"/>
+          </a:effectRef>
+          <a:fontRef idx="minor">
+            <a:schemeClr val="lt1"/>
+          </a:fontRef>
+        </p:style>
+        <p:txBody>
+          <a:bodyPr rtlCol="0" anchor="ctr"/>
+          <a:lstStyle/>
+          <a:p>
+            <a:pPr algn="ctr"/>
+          </a:p>
+        </p:txBody>
+      </p:sp>
+      <p:sp>
+        <p:nvSpPr>
+          <p:cNvPr id="7" name="TextBox 6"/>
+          <p:cNvSpPr txBox="1"/>
+          <p:nvPr/>
+        </p:nvSpPr>
+        <p:spPr>
+          <a:xfrm>
+            <a:off x="1005840" y="2651760"/>
+            <a:ext cx="9601200" cy="2560320"/>
+          </a:xfrm>
+          <a:prstGeom prst="rect">
+            <a:avLst/>
+          </a:prstGeom>
+          <a:noFill/>
+        </p:spPr>
+        <p:txBody>
+          <a:bodyPr wrap="square">
+            <a:spAutoFit/>
+          </a:bodyPr>
+          <a:lstStyle/>
+          <a:p>
             <a:pPr>
               <a:spcAft>
-                <a:spcPts val="800"/>
+                <a:spcPts val="100"/>
               </a:spcAft>
-              <a:defRPr sz="1800">
-                <a:solidFill>
-                  <a:srgbClr val="CCCCDD"/>
-                </a:solidFill>
-                <a:latin typeface="Calibri"/>
-              </a:defRPr>
-            </a:pPr>
-            <a:r>
-              <a:t>Docker: docker compose -f deploy/docker/docker-compose.yml up</a:t>
+              <a:defRPr sz="1300">
+                <a:solidFill>
+                  <a:srgbClr val="A0CC88"/>
+                </a:solidFill>
+                <a:latin typeface="Calibri"/>
+              </a:defRPr>
+            </a:pPr>
+            <a:r>
+              <a:t># config/agents/support.yaml</a:t>
             </a:r>
           </a:p>
           <a:p>
             <a:pPr>
               <a:spcAft>
-                <a:spcPts val="800"/>
+                <a:spcPts val="100"/>
               </a:spcAft>
-              <a:defRPr sz="1800">
-                <a:solidFill>
-                  <a:srgbClr val="CCCCDD"/>
-                </a:solidFill>
-                <a:latin typeface="Calibri"/>
-              </a:defRPr>
-            </a:pPr>
-            <a:r>
-              <a:t>Bare metal: uvicorn src.main:app --host 0.0.0.0 --port 8001</a:t>
+              <a:defRPr sz="1300">
+                <a:solidFill>
+                  <a:srgbClr val="A0CC88"/>
+                </a:solidFill>
+                <a:latin typeface="Calibri"/>
+              </a:defRPr>
+            </a:pPr>
+            <a:r>
+              <a:t>name: acme_support</a:t>
             </a:r>
           </a:p>
           <a:p>
             <a:pPr>
               <a:spcAft>
-                <a:spcPts val="800"/>
+                <a:spcPts val="100"/>
               </a:spcAft>
-              <a:defRPr sz="1800">
-                <a:solidFill>
-                  <a:srgbClr val="CCCCDD"/>
-                </a:solidFill>
-                <a:latin typeface="Calibri"/>
-              </a:defRPr>
-            </a:pPr>
-            <a:r>
-              <a:t>CI/CD: GitHub Actions — lint, test, e2e, build, deploy</a:t>
+              <a:defRPr sz="1300">
+                <a:solidFill>
+                  <a:srgbClr val="A0CC88"/>
+                </a:solidFill>
+                <a:latin typeface="Calibri"/>
+              </a:defRPr>
+            </a:pPr>
+            <a:r>
+              <a:t>display_name: ACME Support Agent</a:t>
             </a:r>
           </a:p>
           <a:p>
             <a:pPr>
               <a:spcAft>
-                <a:spcPts val="800"/>
+                <a:spcPts val="100"/>
               </a:spcAft>
-              <a:defRPr sz="1800">
-                <a:solidFill>
-                  <a:srgbClr val="CCCCDD"/>
-                </a:solidFill>
-                <a:latin typeface="Calibri"/>
-              </a:defRPr>
-            </a:pPr>
-            <a:r>
-              <a:t>Configuration-driven agents via YAML (config/agents/)</a:t>
+              <a:defRPr sz="1300">
+                <a:solidFill>
+                  <a:srgbClr val="A0CC88"/>
+                </a:solidFill>
+                <a:latin typeface="Calibri"/>
+              </a:defRPr>
+            </a:pPr>
+            <a:r>
+              <a:t>model: gpt-4o-mini</a:t>
             </a:r>
           </a:p>
           <a:p>
             <a:pPr>
               <a:spcAft>
-                <a:spcPts val="800"/>
+                <a:spcPts val="100"/>
               </a:spcAft>
-              <a:defRPr sz="1800">
-                <a:solidFill>
-                  <a:srgbClr val="CCCCDD"/>
-                </a:solidFill>
-                <a:latin typeface="Calibri"/>
-              </a:defRPr>
-            </a:pPr>
-            <a:r>
-              <a:t>Environment-based settings via .env (config/environment/)</a:t>
+              <a:defRPr sz="1300">
+                <a:solidFill>
+                  <a:srgbClr val="A0CC88"/>
+                </a:solidFill>
+                <a:latin typeface="Calibri"/>
+              </a:defRPr>
+            </a:pPr>
+            <a:r>
+              <a:t>temperature: 0.7</a:t>
+            </a:r>
+          </a:p>
+          <a:p>
+            <a:pPr>
+              <a:spcAft>
+                <a:spcPts val="100"/>
+              </a:spcAft>
+              <a:defRPr sz="1300">
+                <a:solidFill>
+                  <a:srgbClr val="A0CC88"/>
+                </a:solidFill>
+                <a:latin typeface="Calibri"/>
+              </a:defRPr>
+            </a:pPr>
+            <a:r>
+              <a:t>system_prompt: |</a:t>
+            </a:r>
+          </a:p>
+          <a:p>
+            <a:pPr>
+              <a:spcAft>
+                <a:spcPts val="100"/>
+              </a:spcAft>
+              <a:defRPr sz="1300">
+                <a:solidFill>
+                  <a:srgbClr val="A0CC88"/>
+                </a:solidFill>
+                <a:latin typeface="Calibri"/>
+              </a:defRPr>
+            </a:pPr>
+            <a:r>
+              <a:t>  You are a helpful support agent for ACME Corp.</a:t>
+            </a:r>
+          </a:p>
+          <a:p>
+            <a:pPr>
+              <a:spcAft>
+                <a:spcPts val="100"/>
+              </a:spcAft>
+              <a:defRPr sz="1300">
+                <a:solidFill>
+                  <a:srgbClr val="A0CC88"/>
+                </a:solidFill>
+                <a:latin typeface="Calibri"/>
+              </a:defRPr>
+            </a:pPr>
+            <a:r>
+              <a:t>  Answer questions based on the knowledge base.</a:t>
+            </a:r>
+          </a:p>
+          <a:p>
+            <a:pPr>
+              <a:spcAft>
+                <a:spcPts val="100"/>
+              </a:spcAft>
+              <a:defRPr sz="1300">
+                <a:solidFill>
+                  <a:srgbClr val="A0CC88"/>
+                </a:solidFill>
+                <a:latin typeface="Calibri"/>
+              </a:defRPr>
+            </a:pPr>
+            <a:r>
+              <a:t>knowledge_base:</a:t>
+            </a:r>
+          </a:p>
+          <a:p>
+            <a:pPr>
+              <a:spcAft>
+                <a:spcPts val="100"/>
+              </a:spcAft>
+              <a:defRPr sz="1300">
+                <a:solidFill>
+                  <a:srgbClr val="A0CC88"/>
+                </a:solidFill>
+                <a:latin typeface="Calibri"/>
+              </a:defRPr>
+            </a:pPr>
+            <a:r>
+              <a:t>  source: docs/knowledge_base/acme_support.md</a:t>
+            </a:r>
+          </a:p>
+          <a:p>
+            <a:pPr>
+              <a:spcAft>
+                <a:spcPts val="100"/>
+              </a:spcAft>
+              <a:defRPr sz="1300">
+                <a:solidFill>
+                  <a:srgbClr val="A0CC88"/>
+                </a:solidFill>
+                <a:latin typeface="Calibri"/>
+              </a:defRPr>
+            </a:pPr>
+            <a:r>
+              <a:t>rag:</a:t>
+            </a:r>
+          </a:p>
+          <a:p>
+            <a:pPr>
+              <a:spcAft>
+                <a:spcPts val="100"/>
+              </a:spcAft>
+              <a:defRPr sz="1300">
+                <a:solidFill>
+                  <a:srgbClr val="A0CC88"/>
+                </a:solidFill>
+                <a:latin typeface="Calibri"/>
+              </a:defRPr>
+            </a:pPr>
+            <a:r>
+              <a:t>  enabled: true</a:t>
+            </a:r>
+          </a:p>
+          <a:p>
+            <a:pPr>
+              <a:spcAft>
+                <a:spcPts val="100"/>
+              </a:spcAft>
+              <a:defRPr sz="1300">
+                <a:solidFill>
+                  <a:srgbClr val="A0CC88"/>
+                </a:solidFill>
+                <a:latin typeface="Calibri"/>
+              </a:defRPr>
+            </a:pPr>
+            <a:r>
+              <a:t>  chunk_size: 512</a:t>
+            </a:r>
+          </a:p>
+          <a:p>
+            <a:pPr>
+              <a:spcAft>
+                <a:spcPts val="100"/>
+              </a:spcAft>
+              <a:defRPr sz="1300">
+                <a:solidFill>
+                  <a:srgbClr val="A0CC88"/>
+                </a:solidFill>
+                <a:latin typeface="Calibri"/>
+              </a:defRPr>
+            </a:pPr>
+            <a:r>
+              <a:t>  top_k: 3</a:t>
+            </a:r>
+          </a:p>
+        </p:txBody>
+      </p:sp>
+      <p:sp>
+        <p:nvSpPr>
+          <p:cNvPr id="8" name="TextBox 7"/>
+          <p:cNvSpPr txBox="1"/>
+          <p:nvPr/>
+        </p:nvSpPr>
+        <p:spPr>
+          <a:xfrm>
+            <a:off x="10972800" y="6400800"/>
+            <a:ext cx="914400" cy="274320"/>
+          </a:xfrm>
+          <a:prstGeom prst="rect">
+            <a:avLst/>
+          </a:prstGeom>
+          <a:noFill/>
+        </p:spPr>
+        <p:txBody>
+          <a:bodyPr wrap="square">
+            <a:spAutoFit/>
+          </a:bodyPr>
+          <a:lstStyle/>
+          <a:p>
+            <a:pPr algn="r">
+              <a:defRPr sz="1000" b="0">
+                <a:solidFill>
+                  <a:srgbClr val="6B6B8A"/>
+                </a:solidFill>
+                <a:latin typeface="Calibri"/>
+              </a:defRPr>
+            </a:pPr>
+            <a:r>
+              <a:t>12 / 16</a:t>
             </a:r>
           </a:p>
         </p:txBody>
@@ -3982,7 +4708,7 @@
     <p:bg>
       <p:bgPr>
         <a:solidFill>
-          <a:srgbClr val="1E1E2E"/>
+          <a:srgbClr val="0B0B1A"/>
         </a:solidFill>
         <a:effectLst/>
       </p:bgPr>
@@ -3996,16 +4722,131 @@
       <p:grpSpPr/>
       <p:sp>
         <p:nvSpPr>
-          <p:cNvPr id="2" name="Rectangle 1"/>
+          <p:cNvPr id="2" name="TextBox 1"/>
+          <p:cNvSpPr txBox="1"/>
+          <p:nvPr/>
+        </p:nvSpPr>
+        <p:spPr>
+          <a:xfrm>
+            <a:off x="731520" y="274320"/>
+            <a:ext cx="5486400" cy="365760"/>
+          </a:xfrm>
+          <a:prstGeom prst="rect">
+            <a:avLst/>
+          </a:prstGeom>
+          <a:noFill/>
+        </p:spPr>
+        <p:txBody>
+          <a:bodyPr wrap="square">
+            <a:spAutoFit/>
+          </a:bodyPr>
+          <a:lstStyle/>
+          <a:p>
+            <a:pPr algn="l">
+              <a:defRPr sz="1200" b="1">
+                <a:solidFill>
+                  <a:srgbClr val="00D4AA"/>
+                </a:solidFill>
+                <a:latin typeface="Calibri"/>
+              </a:defRPr>
+            </a:pPr>
+            <a:r>
+              <a:t>OPERATIONS</a:t>
+            </a:r>
+          </a:p>
+        </p:txBody>
+      </p:sp>
+      <p:sp>
+        <p:nvSpPr>
+          <p:cNvPr id="3" name="Rectangle 2"/>
           <p:cNvSpPr/>
           <p:nvPr/>
         </p:nvSpPr>
         <p:spPr>
           <a:xfrm>
-            <a:off x="731520" y="548640"/>
-            <a:ext cx="3657600" cy="50800"/>
-          </a:xfrm>
-          <a:prstGeom prst="rect">
+            <a:off x="731520" y="640080"/>
+            <a:ext cx="1097280" cy="50800"/>
+          </a:xfrm>
+          <a:prstGeom prst="rect">
+            <a:avLst/>
+          </a:prstGeom>
+          <a:solidFill>
+            <a:srgbClr val="00D4AA"/>
+          </a:solidFill>
+          <a:ln>
+            <a:noFill/>
+          </a:ln>
+        </p:spPr>
+        <p:style>
+          <a:lnRef idx="1">
+            <a:schemeClr val="accent1"/>
+          </a:lnRef>
+          <a:fillRef idx="3">
+            <a:schemeClr val="accent1"/>
+          </a:fillRef>
+          <a:effectRef idx="2">
+            <a:schemeClr val="accent1"/>
+          </a:effectRef>
+          <a:fontRef idx="minor">
+            <a:schemeClr val="lt1"/>
+          </a:fontRef>
+        </p:style>
+        <p:txBody>
+          <a:bodyPr rtlCol="0" anchor="ctr"/>
+          <a:lstStyle/>
+          <a:p>
+            <a:pPr algn="ctr"/>
+          </a:p>
+        </p:txBody>
+      </p:sp>
+      <p:sp>
+        <p:nvSpPr>
+          <p:cNvPr id="4" name="TextBox 3"/>
+          <p:cNvSpPr txBox="1"/>
+          <p:nvPr/>
+        </p:nvSpPr>
+        <p:spPr>
+          <a:xfrm>
+            <a:off x="731520" y="1005840"/>
+            <a:ext cx="10058400" cy="914400"/>
+          </a:xfrm>
+          <a:prstGeom prst="rect">
+            <a:avLst/>
+          </a:prstGeom>
+          <a:noFill/>
+        </p:spPr>
+        <p:txBody>
+          <a:bodyPr wrap="square">
+            <a:spAutoFit/>
+          </a:bodyPr>
+          <a:lstStyle/>
+          <a:p>
+            <a:pPr algn="l">
+              <a:defRPr sz="4000" b="1">
+                <a:solidFill>
+                  <a:srgbClr val="FFFFFF"/>
+                </a:solidFill>
+                <a:latin typeface="Calibri"/>
+              </a:defRPr>
+            </a:pPr>
+            <a:r>
+              <a:t>Deployment Options</a:t>
+            </a:r>
+          </a:p>
+        </p:txBody>
+      </p:sp>
+      <p:sp>
+        <p:nvSpPr>
+          <p:cNvPr id="5" name="Oval 4"/>
+          <p:cNvSpPr/>
+          <p:nvPr/>
+        </p:nvSpPr>
+        <p:spPr>
+          <a:xfrm>
+            <a:off x="9601200" y="4572000"/>
+            <a:ext cx="1828800" cy="1828800"/>
+          </a:xfrm>
+          <a:prstGeom prst="ellipse">
             <a:avLst/>
           </a:prstGeom>
           <a:solidFill>
@@ -4039,14 +4880,69 @@
       </p:sp>
       <p:sp>
         <p:nvSpPr>
-          <p:cNvPr id="3" name="TextBox 2"/>
+          <p:cNvPr id="6" name="Rounded Rectangle 5"/>
+          <p:cNvSpPr/>
+          <p:nvPr/>
+        </p:nvSpPr>
+        <p:spPr>
+          <a:xfrm>
+            <a:off x="731520" y="2103120"/>
+            <a:ext cx="1463040" cy="320040"/>
+          </a:xfrm>
+          <a:prstGeom prst="roundRect">
+            <a:avLst>
+              <a:gd name="adj" fmla="val 4000"/>
+            </a:avLst>
+          </a:prstGeom>
+          <a:solidFill>
+            <a:srgbClr val="6C63FF"/>
+          </a:solidFill>
+          <a:ln>
+            <a:noFill/>
+          </a:ln>
+        </p:spPr>
+        <p:style>
+          <a:lnRef idx="1">
+            <a:schemeClr val="accent1"/>
+          </a:lnRef>
+          <a:fillRef idx="3">
+            <a:schemeClr val="accent1"/>
+          </a:fillRef>
+          <a:effectRef idx="2">
+            <a:schemeClr val="accent1"/>
+          </a:effectRef>
+          <a:fontRef idx="minor">
+            <a:schemeClr val="lt1"/>
+          </a:fontRef>
+        </p:style>
+        <p:txBody>
+          <a:bodyPr rtlCol="0" anchor="ctr"/>
+          <a:lstStyle/>
+          <a:p>
+            <a:pPr algn="ctr">
+              <a:defRPr sz="1200" b="1">
+                <a:solidFill>
+                  <a:srgbClr val="FFFFFF"/>
+                </a:solidFill>
+                <a:latin typeface="Calibri"/>
+              </a:defRPr>
+            </a:pPr>
+            <a:r>
+              <a:t>Docker</a:t>
+            </a:r>
+          </a:p>
+        </p:txBody>
+      </p:sp>
+      <p:sp>
+        <p:nvSpPr>
+          <p:cNvPr id="7" name="TextBox 6"/>
           <p:cNvSpPr txBox="1"/>
           <p:nvPr/>
         </p:nvSpPr>
         <p:spPr>
           <a:xfrm>
-            <a:off x="731520" y="731520"/>
-            <a:ext cx="9144000" cy="731520"/>
+            <a:off x="2468880" y="2103120"/>
+            <a:ext cx="8229600" cy="320040"/>
           </a:xfrm>
           <a:prstGeom prst="rect">
             <a:avLst/>
@@ -4060,7 +4956,62 @@
           <a:lstStyle/>
           <a:p>
             <a:pPr algn="l">
-              <a:defRPr sz="3600" b="1">
+              <a:defRPr sz="1400" b="0">
+                <a:solidFill>
+                  <a:srgbClr val="00D4AA"/>
+                </a:solidFill>
+                <a:latin typeface="Consolas"/>
+              </a:defRPr>
+            </a:pPr>
+            <a:r>
+              <a:t>docker compose -f deploy/docker/docker-compose.yml up</a:t>
+            </a:r>
+          </a:p>
+        </p:txBody>
+      </p:sp>
+      <p:sp>
+        <p:nvSpPr>
+          <p:cNvPr id="8" name="Rounded Rectangle 7"/>
+          <p:cNvSpPr/>
+          <p:nvPr/>
+        </p:nvSpPr>
+        <p:spPr>
+          <a:xfrm>
+            <a:off x="731520" y="3291839"/>
+            <a:ext cx="1463040" cy="320040"/>
+          </a:xfrm>
+          <a:prstGeom prst="roundRect">
+            <a:avLst>
+              <a:gd name="adj" fmla="val 4000"/>
+            </a:avLst>
+          </a:prstGeom>
+          <a:solidFill>
+            <a:srgbClr val="6C63FF"/>
+          </a:solidFill>
+          <a:ln>
+            <a:noFill/>
+          </a:ln>
+        </p:spPr>
+        <p:style>
+          <a:lnRef idx="1">
+            <a:schemeClr val="accent1"/>
+          </a:lnRef>
+          <a:fillRef idx="3">
+            <a:schemeClr val="accent1"/>
+          </a:fillRef>
+          <a:effectRef idx="2">
+            <a:schemeClr val="accent1"/>
+          </a:effectRef>
+          <a:fontRef idx="minor">
+            <a:schemeClr val="lt1"/>
+          </a:fontRef>
+        </p:style>
+        <p:txBody>
+          <a:bodyPr rtlCol="0" anchor="ctr"/>
+          <a:lstStyle/>
+          <a:p>
+            <a:pPr algn="ctr">
+              <a:defRPr sz="1200" b="1">
                 <a:solidFill>
                   <a:srgbClr val="FFFFFF"/>
                 </a:solidFill>
@@ -4068,21 +5019,21 @@
               </a:defRPr>
             </a:pPr>
             <a:r>
-              <a:t>Testing &amp; Quality</a:t>
-            </a:r>
-          </a:p>
-        </p:txBody>
-      </p:sp>
-      <p:sp>
-        <p:nvSpPr>
-          <p:cNvPr id="4" name="TextBox 3"/>
+              <a:t>Bare Metal</a:t>
+            </a:r>
+          </a:p>
+        </p:txBody>
+      </p:sp>
+      <p:sp>
+        <p:nvSpPr>
+          <p:cNvPr id="9" name="TextBox 8"/>
           <p:cNvSpPr txBox="1"/>
           <p:nvPr/>
         </p:nvSpPr>
         <p:spPr>
           <a:xfrm>
-            <a:off x="731520" y="1828800"/>
-            <a:ext cx="10058400" cy="3657600"/>
+            <a:off x="2468880" y="3291839"/>
+            <a:ext cx="8229600" cy="320040"/>
           </a:xfrm>
           <a:prstGeom prst="rect">
             <a:avLst/>
@@ -4095,83 +5046,143 @@
           </a:bodyPr>
           <a:lstStyle/>
           <a:p>
-            <a:pPr>
-              <a:spcAft>
-                <a:spcPts val="800"/>
-              </a:spcAft>
-              <a:defRPr sz="1800">
-                <a:solidFill>
-                  <a:srgbClr val="CCCCDD"/>
-                </a:solidFill>
-                <a:latin typeface="Calibri"/>
-              </a:defRPr>
-            </a:pPr>
-            <a:r>
-              <a:t>158+ unit tests covering all routers, services, and providers</a:t>
-            </a:r>
-          </a:p>
-          <a:p>
-            <a:pPr>
-              <a:spcAft>
-                <a:spcPts val="800"/>
-              </a:spcAft>
-              <a:defRPr sz="1800">
-                <a:solidFill>
-                  <a:srgbClr val="CCCCDD"/>
-                </a:solidFill>
-                <a:latin typeface="Calibri"/>
-              </a:defRPr>
-            </a:pPr>
-            <a:r>
-              <a:t>33 comprehensive E2E tests simulating real user flows</a:t>
-            </a:r>
-          </a:p>
-          <a:p>
-            <a:pPr>
-              <a:spcAft>
-                <a:spcPts val="800"/>
-              </a:spcAft>
-              <a:defRPr sz="1800">
-                <a:solidFill>
-                  <a:srgbClr val="CCCCDD"/>
-                </a:solidFill>
-                <a:latin typeface="Calibri"/>
-              </a:defRPr>
-            </a:pPr>
-            <a:r>
-              <a:t>Mock LLM provider enables testing without API keys</a:t>
-            </a:r>
-          </a:p>
-          <a:p>
-            <a:pPr>
-              <a:spcAft>
-                <a:spcPts val="800"/>
-              </a:spcAft>
-              <a:defRPr sz="1800">
-                <a:solidFill>
-                  <a:srgbClr val="CCCCDD"/>
-                </a:solidFill>
-                <a:latin typeface="Calibri"/>
-              </a:defRPr>
-            </a:pPr>
-            <a:r>
-              <a:t>Ruff linter + mypy type checking in CI</a:t>
-            </a:r>
-          </a:p>
-          <a:p>
-            <a:pPr>
-              <a:spcAft>
-                <a:spcPts val="800"/>
-              </a:spcAft>
-              <a:defRPr sz="1800">
-                <a:solidFill>
-                  <a:srgbClr val="CCCCDD"/>
-                </a:solidFill>
-                <a:latin typeface="Calibri"/>
-              </a:defRPr>
-            </a:pPr>
-            <a:r>
-              <a:t>Coverage reports output to reports/coverage/</a:t>
+            <a:pPr algn="l">
+              <a:defRPr sz="1400" b="0">
+                <a:solidFill>
+                  <a:srgbClr val="00D4AA"/>
+                </a:solidFill>
+                <a:latin typeface="Consolas"/>
+              </a:defRPr>
+            </a:pPr>
+            <a:r>
+              <a:t>uvicorn src.main:app --host 0.0.0.0 --port 8001</a:t>
+            </a:r>
+          </a:p>
+        </p:txBody>
+      </p:sp>
+      <p:sp>
+        <p:nvSpPr>
+          <p:cNvPr id="10" name="Rounded Rectangle 9"/>
+          <p:cNvSpPr/>
+          <p:nvPr/>
+        </p:nvSpPr>
+        <p:spPr>
+          <a:xfrm>
+            <a:off x="731520" y="4480560"/>
+            <a:ext cx="1463040" cy="320040"/>
+          </a:xfrm>
+          <a:prstGeom prst="roundRect">
+            <a:avLst>
+              <a:gd name="adj" fmla="val 4000"/>
+            </a:avLst>
+          </a:prstGeom>
+          <a:solidFill>
+            <a:srgbClr val="6C63FF"/>
+          </a:solidFill>
+          <a:ln>
+            <a:noFill/>
+          </a:ln>
+        </p:spPr>
+        <p:style>
+          <a:lnRef idx="1">
+            <a:schemeClr val="accent1"/>
+          </a:lnRef>
+          <a:fillRef idx="3">
+            <a:schemeClr val="accent1"/>
+          </a:fillRef>
+          <a:effectRef idx="2">
+            <a:schemeClr val="accent1"/>
+          </a:effectRef>
+          <a:fontRef idx="minor">
+            <a:schemeClr val="lt1"/>
+          </a:fontRef>
+        </p:style>
+        <p:txBody>
+          <a:bodyPr rtlCol="0" anchor="ctr"/>
+          <a:lstStyle/>
+          <a:p>
+            <a:pPr algn="ctr">
+              <a:defRPr sz="1200" b="1">
+                <a:solidFill>
+                  <a:srgbClr val="FFFFFF"/>
+                </a:solidFill>
+                <a:latin typeface="Calibri"/>
+              </a:defRPr>
+            </a:pPr>
+            <a:r>
+              <a:t>CI/CD</a:t>
+            </a:r>
+          </a:p>
+        </p:txBody>
+      </p:sp>
+      <p:sp>
+        <p:nvSpPr>
+          <p:cNvPr id="11" name="TextBox 10"/>
+          <p:cNvSpPr txBox="1"/>
+          <p:nvPr/>
+        </p:nvSpPr>
+        <p:spPr>
+          <a:xfrm>
+            <a:off x="2468880" y="4480560"/>
+            <a:ext cx="8229600" cy="320040"/>
+          </a:xfrm>
+          <a:prstGeom prst="rect">
+            <a:avLst/>
+          </a:prstGeom>
+          <a:noFill/>
+        </p:spPr>
+        <p:txBody>
+          <a:bodyPr wrap="square">
+            <a:spAutoFit/>
+          </a:bodyPr>
+          <a:lstStyle/>
+          <a:p>
+            <a:pPr algn="l">
+              <a:defRPr sz="1400" b="0">
+                <a:solidFill>
+                  <a:srgbClr val="00D4AA"/>
+                </a:solidFill>
+                <a:latin typeface="Consolas"/>
+              </a:defRPr>
+            </a:pPr>
+            <a:r>
+              <a:t>GitHub Actions — lint, test, e2e, build, deploy</a:t>
+            </a:r>
+          </a:p>
+        </p:txBody>
+      </p:sp>
+      <p:sp>
+        <p:nvSpPr>
+          <p:cNvPr id="12" name="TextBox 11"/>
+          <p:cNvSpPr txBox="1"/>
+          <p:nvPr/>
+        </p:nvSpPr>
+        <p:spPr>
+          <a:xfrm>
+            <a:off x="10972800" y="6400800"/>
+            <a:ext cx="914400" cy="274320"/>
+          </a:xfrm>
+          <a:prstGeom prst="rect">
+            <a:avLst/>
+          </a:prstGeom>
+          <a:noFill/>
+        </p:spPr>
+        <p:txBody>
+          <a:bodyPr wrap="square">
+            <a:spAutoFit/>
+          </a:bodyPr>
+          <a:lstStyle/>
+          <a:p>
+            <a:pPr algn="r">
+              <a:defRPr sz="1000" b="0">
+                <a:solidFill>
+                  <a:srgbClr val="6B6B8A"/>
+                </a:solidFill>
+                <a:latin typeface="Calibri"/>
+              </a:defRPr>
+            </a:pPr>
+            <a:r>
+              <a:t>13 / 16</a:t>
             </a:r>
           </a:p>
         </p:txBody>
@@ -4190,7 +5201,7 @@
     <p:bg>
       <p:bgPr>
         <a:solidFill>
-          <a:srgbClr val="1E1E2E"/>
+          <a:srgbClr val="0B0B1A"/>
         </a:solidFill>
         <a:effectLst/>
       </p:bgPr>
@@ -4204,17 +5215,296 @@
       <p:grpSpPr/>
       <p:sp>
         <p:nvSpPr>
-          <p:cNvPr id="2" name="Rectangle 1"/>
+          <p:cNvPr id="2" name="TextBox 1"/>
+          <p:cNvSpPr txBox="1"/>
+          <p:nvPr/>
+        </p:nvSpPr>
+        <p:spPr>
+          <a:xfrm>
+            <a:off x="731520" y="274320"/>
+            <a:ext cx="5486400" cy="365760"/>
+          </a:xfrm>
+          <a:prstGeom prst="rect">
+            <a:avLst/>
+          </a:prstGeom>
+          <a:noFill/>
+        </p:spPr>
+        <p:txBody>
+          <a:bodyPr wrap="square">
+            <a:spAutoFit/>
+          </a:bodyPr>
+          <a:lstStyle/>
+          <a:p>
+            <a:pPr algn="l">
+              <a:defRPr sz="1200" b="1">
+                <a:solidFill>
+                  <a:srgbClr val="00D4AA"/>
+                </a:solidFill>
+                <a:latin typeface="Calibri"/>
+              </a:defRPr>
+            </a:pPr>
+            <a:r>
+              <a:t>QUALITY</a:t>
+            </a:r>
+          </a:p>
+        </p:txBody>
+      </p:sp>
+      <p:sp>
+        <p:nvSpPr>
+          <p:cNvPr id="3" name="Rectangle 2"/>
           <p:cNvSpPr/>
           <p:nvPr/>
         </p:nvSpPr>
         <p:spPr>
           <a:xfrm>
-            <a:off x="0" y="2926080"/>
-            <a:ext cx="12191695" cy="73152"/>
-          </a:xfrm>
-          <a:prstGeom prst="rect">
-            <a:avLst/>
+            <a:off x="731520" y="640080"/>
+            <a:ext cx="1097280" cy="50800"/>
+          </a:xfrm>
+          <a:prstGeom prst="rect">
+            <a:avLst/>
+          </a:prstGeom>
+          <a:solidFill>
+            <a:srgbClr val="00D4AA"/>
+          </a:solidFill>
+          <a:ln>
+            <a:noFill/>
+          </a:ln>
+        </p:spPr>
+        <p:style>
+          <a:lnRef idx="1">
+            <a:schemeClr val="accent1"/>
+          </a:lnRef>
+          <a:fillRef idx="3">
+            <a:schemeClr val="accent1"/>
+          </a:fillRef>
+          <a:effectRef idx="2">
+            <a:schemeClr val="accent1"/>
+          </a:effectRef>
+          <a:fontRef idx="minor">
+            <a:schemeClr val="lt1"/>
+          </a:fontRef>
+        </p:style>
+        <p:txBody>
+          <a:bodyPr rtlCol="0" anchor="ctr"/>
+          <a:lstStyle/>
+          <a:p>
+            <a:pPr algn="ctr"/>
+          </a:p>
+        </p:txBody>
+      </p:sp>
+      <p:sp>
+        <p:nvSpPr>
+          <p:cNvPr id="4" name="TextBox 3"/>
+          <p:cNvSpPr txBox="1"/>
+          <p:nvPr/>
+        </p:nvSpPr>
+        <p:spPr>
+          <a:xfrm>
+            <a:off x="731520" y="1005840"/>
+            <a:ext cx="10058400" cy="914400"/>
+          </a:xfrm>
+          <a:prstGeom prst="rect">
+            <a:avLst/>
+          </a:prstGeom>
+          <a:noFill/>
+        </p:spPr>
+        <p:txBody>
+          <a:bodyPr wrap="square">
+            <a:spAutoFit/>
+          </a:bodyPr>
+          <a:lstStyle/>
+          <a:p>
+            <a:pPr algn="l">
+              <a:defRPr sz="4000" b="1">
+                <a:solidFill>
+                  <a:srgbClr val="FFFFFF"/>
+                </a:solidFill>
+                <a:latin typeface="Calibri"/>
+              </a:defRPr>
+            </a:pPr>
+            <a:r>
+              <a:t>Testing &amp; CI/CD</a:t>
+            </a:r>
+          </a:p>
+        </p:txBody>
+      </p:sp>
+      <p:sp>
+        <p:nvSpPr>
+          <p:cNvPr id="5" name="Oval 4"/>
+          <p:cNvSpPr/>
+          <p:nvPr/>
+        </p:nvSpPr>
+        <p:spPr>
+          <a:xfrm>
+            <a:off x="-274320" y="5029200"/>
+            <a:ext cx="1828800" cy="1828800"/>
+          </a:xfrm>
+          <a:prstGeom prst="ellipse">
+            <a:avLst/>
+          </a:prstGeom>
+          <a:solidFill>
+            <a:srgbClr val="00D4AA"/>
+          </a:solidFill>
+          <a:ln>
+            <a:noFill/>
+          </a:ln>
+        </p:spPr>
+        <p:style>
+          <a:lnRef idx="1">
+            <a:schemeClr val="accent1"/>
+          </a:lnRef>
+          <a:fillRef idx="3">
+            <a:schemeClr val="accent1"/>
+          </a:fillRef>
+          <a:effectRef idx="2">
+            <a:schemeClr val="accent1"/>
+          </a:effectRef>
+          <a:fontRef idx="minor">
+            <a:schemeClr val="lt1"/>
+          </a:fontRef>
+        </p:style>
+        <p:txBody>
+          <a:bodyPr rtlCol="0" anchor="ctr"/>
+          <a:lstStyle/>
+          <a:p>
+            <a:pPr algn="ctr"/>
+          </a:p>
+        </p:txBody>
+      </p:sp>
+      <p:sp>
+        <p:nvSpPr>
+          <p:cNvPr id="6" name="TextBox 5"/>
+          <p:cNvSpPr txBox="1"/>
+          <p:nvPr/>
+        </p:nvSpPr>
+        <p:spPr>
+          <a:xfrm>
+            <a:off x="731520" y="2011680"/>
+            <a:ext cx="10058400" cy="3657600"/>
+          </a:xfrm>
+          <a:prstGeom prst="rect">
+            <a:avLst/>
+          </a:prstGeom>
+          <a:noFill/>
+        </p:spPr>
+        <p:txBody>
+          <a:bodyPr wrap="square">
+            <a:spAutoFit/>
+          </a:bodyPr>
+          <a:lstStyle/>
+          <a:p>
+            <a:pPr>
+              <a:spcAft>
+                <a:spcPts val="800"/>
+              </a:spcAft>
+              <a:defRPr sz="1600">
+                <a:solidFill>
+                  <a:srgbClr val="B0B0C8"/>
+                </a:solidFill>
+                <a:latin typeface="Calibri"/>
+              </a:defRPr>
+            </a:pPr>
+            <a:r>
+              <a:t>158+ unit tests — routers, services, providers, vault</a:t>
+            </a:r>
+          </a:p>
+          <a:p>
+            <a:pPr>
+              <a:spcAft>
+                <a:spcPts val="800"/>
+              </a:spcAft>
+              <a:defRPr sz="1600">
+                <a:solidFill>
+                  <a:srgbClr val="B0B0C8"/>
+                </a:solidFill>
+                <a:latin typeface="Calibri"/>
+              </a:defRPr>
+            </a:pPr>
+            <a:r>
+              <a:t>33 comprehensive E2E tests — real user flow simulation</a:t>
+            </a:r>
+          </a:p>
+          <a:p>
+            <a:pPr>
+              <a:spcAft>
+                <a:spcPts val="800"/>
+              </a:spcAft>
+              <a:defRPr sz="1600">
+                <a:solidFill>
+                  <a:srgbClr val="B0B0C8"/>
+                </a:solidFill>
+                <a:latin typeface="Calibri"/>
+              </a:defRPr>
+            </a:pPr>
+            <a:r>
+              <a:t>Mock LLM provider — full coverage without API keys</a:t>
+            </a:r>
+          </a:p>
+          <a:p>
+            <a:pPr>
+              <a:spcAft>
+                <a:spcPts val="800"/>
+              </a:spcAft>
+              <a:defRPr sz="1600">
+                <a:solidFill>
+                  <a:srgbClr val="B0B0C8"/>
+                </a:solidFill>
+                <a:latin typeface="Calibri"/>
+              </a:defRPr>
+            </a:pPr>
+            <a:r>
+              <a:t>Ruff linter + mypy type checking in CI pipeline</a:t>
+            </a:r>
+          </a:p>
+          <a:p>
+            <a:pPr>
+              <a:spcAft>
+                <a:spcPts val="800"/>
+              </a:spcAft>
+              <a:defRPr sz="1600">
+                <a:solidFill>
+                  <a:srgbClr val="B0B0C8"/>
+                </a:solidFill>
+                <a:latin typeface="Calibri"/>
+              </a:defRPr>
+            </a:pPr>
+            <a:r>
+              <a:t>Coverage reports → reports/coverage/</a:t>
+            </a:r>
+          </a:p>
+          <a:p>
+            <a:pPr>
+              <a:spcAft>
+                <a:spcPts val="800"/>
+              </a:spcAft>
+              <a:defRPr sz="1600">
+                <a:solidFill>
+                  <a:srgbClr val="B0B0C8"/>
+                </a:solidFill>
+                <a:latin typeface="Calibri"/>
+              </a:defRPr>
+            </a:pPr>
+            <a:r>
+              <a:t>GitHub Actions: lint → test → e2e → docker build → deploy</a:t>
+            </a:r>
+          </a:p>
+        </p:txBody>
+      </p:sp>
+      <p:sp>
+        <p:nvSpPr>
+          <p:cNvPr id="7" name="Rounded Rectangle 6"/>
+          <p:cNvSpPr/>
+          <p:nvPr/>
+        </p:nvSpPr>
+        <p:spPr>
+          <a:xfrm>
+            <a:off x="731520" y="5029200"/>
+            <a:ext cx="2194560" cy="320040"/>
+          </a:xfrm>
+          <a:prstGeom prst="roundRect">
+            <a:avLst>
+              <a:gd name="adj" fmla="val 5000"/>
+            </a:avLst>
           </a:prstGeom>
           <a:solidFill>
             <a:srgbClr val="6C63FF"/>
@@ -4238,23 +5528,143 @@
           </a:fontRef>
         </p:style>
         <p:txBody>
-          <a:bodyPr rtlCol="0" anchor="ctr"/>
-          <a:lstStyle/>
-          <a:p>
-            <a:pPr algn="ctr"/>
-          </a:p>
-        </p:txBody>
-      </p:sp>
-      <p:sp>
-        <p:nvSpPr>
-          <p:cNvPr id="3" name="TextBox 2"/>
+          <a:bodyPr rtlCol="0" anchor="ctr" wrap="none"/>
+          <a:lstStyle/>
+          <a:p>
+            <a:pPr algn="ctr">
+              <a:defRPr sz="1000" b="1">
+                <a:solidFill>
+                  <a:srgbClr val="FFFFFF"/>
+                </a:solidFill>
+                <a:latin typeface="Calibri"/>
+              </a:defRPr>
+            </a:pPr>
+            <a:r>
+              <a:t>pytest</a:t>
+            </a:r>
+          </a:p>
+        </p:txBody>
+      </p:sp>
+      <p:sp>
+        <p:nvSpPr>
+          <p:cNvPr id="8" name="Rounded Rectangle 7"/>
+          <p:cNvSpPr/>
+          <p:nvPr/>
+        </p:nvSpPr>
+        <p:spPr>
+          <a:xfrm>
+            <a:off x="3200400" y="5029200"/>
+            <a:ext cx="2194560" cy="320040"/>
+          </a:xfrm>
+          <a:prstGeom prst="roundRect">
+            <a:avLst>
+              <a:gd name="adj" fmla="val 5000"/>
+            </a:avLst>
+          </a:prstGeom>
+          <a:solidFill>
+            <a:srgbClr val="00D4AA"/>
+          </a:solidFill>
+          <a:ln>
+            <a:noFill/>
+          </a:ln>
+        </p:spPr>
+        <p:style>
+          <a:lnRef idx="1">
+            <a:schemeClr val="accent1"/>
+          </a:lnRef>
+          <a:fillRef idx="3">
+            <a:schemeClr val="accent1"/>
+          </a:fillRef>
+          <a:effectRef idx="2">
+            <a:schemeClr val="accent1"/>
+          </a:effectRef>
+          <a:fontRef idx="minor">
+            <a:schemeClr val="lt1"/>
+          </a:fontRef>
+        </p:style>
+        <p:txBody>
+          <a:bodyPr rtlCol="0" anchor="ctr" wrap="none"/>
+          <a:lstStyle/>
+          <a:p>
+            <a:pPr algn="ctr">
+              <a:defRPr sz="1000" b="1">
+                <a:solidFill>
+                  <a:srgbClr val="FFFFFF"/>
+                </a:solidFill>
+                <a:latin typeface="Calibri"/>
+              </a:defRPr>
+            </a:pPr>
+            <a:r>
+              <a:t>ruff</a:t>
+            </a:r>
+          </a:p>
+        </p:txBody>
+      </p:sp>
+      <p:sp>
+        <p:nvSpPr>
+          <p:cNvPr id="9" name="Rounded Rectangle 8"/>
+          <p:cNvSpPr/>
+          <p:nvPr/>
+        </p:nvSpPr>
+        <p:spPr>
+          <a:xfrm>
+            <a:off x="5669280" y="5029200"/>
+            <a:ext cx="2194560" cy="320040"/>
+          </a:xfrm>
+          <a:prstGeom prst="roundRect">
+            <a:avLst>
+              <a:gd name="adj" fmla="val 5000"/>
+            </a:avLst>
+          </a:prstGeom>
+          <a:solidFill>
+            <a:srgbClr val="FF6B6B"/>
+          </a:solidFill>
+          <a:ln>
+            <a:noFill/>
+          </a:ln>
+        </p:spPr>
+        <p:style>
+          <a:lnRef idx="1">
+            <a:schemeClr val="accent1"/>
+          </a:lnRef>
+          <a:fillRef idx="3">
+            <a:schemeClr val="accent1"/>
+          </a:fillRef>
+          <a:effectRef idx="2">
+            <a:schemeClr val="accent1"/>
+          </a:effectRef>
+          <a:fontRef idx="minor">
+            <a:schemeClr val="lt1"/>
+          </a:fontRef>
+        </p:style>
+        <p:txBody>
+          <a:bodyPr rtlCol="0" anchor="ctr" wrap="none"/>
+          <a:lstStyle/>
+          <a:p>
+            <a:pPr algn="ctr">
+              <a:defRPr sz="1000" b="1">
+                <a:solidFill>
+                  <a:srgbClr val="FFFFFF"/>
+                </a:solidFill>
+                <a:latin typeface="Calibri"/>
+              </a:defRPr>
+            </a:pPr>
+            <a:r>
+              <a:t>mypy</a:t>
+            </a:r>
+          </a:p>
+        </p:txBody>
+      </p:sp>
+      <p:sp>
+        <p:nvSpPr>
+          <p:cNvPr id="10" name="TextBox 9"/>
           <p:cNvSpPr txBox="1"/>
           <p:nvPr/>
         </p:nvSpPr>
         <p:spPr>
           <a:xfrm>
-            <a:off x="914400" y="1371600"/>
-            <a:ext cx="10058400" cy="1371600"/>
+            <a:off x="10972800" y="6400800"/>
+            <a:ext cx="914400" cy="274320"/>
           </a:xfrm>
           <a:prstGeom prst="rect">
             <a:avLst/>
@@ -4267,30 +5677,56 @@
           </a:bodyPr>
           <a:lstStyle/>
           <a:p>
-            <a:pPr algn="ctr">
-              <a:defRPr sz="6000" b="1">
-                <a:solidFill>
-                  <a:srgbClr val="FFFFFF"/>
-                </a:solidFill>
-                <a:latin typeface="Calibri"/>
-              </a:defRPr>
-            </a:pPr>
-            <a:r>
-              <a:t>Thank You</a:t>
-            </a:r>
-          </a:p>
-        </p:txBody>
-      </p:sp>
-      <p:sp>
-        <p:nvSpPr>
-          <p:cNvPr id="4" name="TextBox 3"/>
+            <a:pPr algn="r">
+              <a:defRPr sz="1000" b="0">
+                <a:solidFill>
+                  <a:srgbClr val="6B6B8A"/>
+                </a:solidFill>
+                <a:latin typeface="Calibri"/>
+              </a:defRPr>
+            </a:pPr>
+            <a:r>
+              <a:t>14 / 16</a:t>
+            </a:r>
+          </a:p>
+        </p:txBody>
+      </p:sp>
+    </p:spTree>
+  </p:cSld>
+  <p:clrMapOvr>
+    <a:masterClrMapping/>
+  </p:clrMapOvr>
+</p:sld>
+</file>
+
+<file path=ppt/slides/slide15.xml><?xml version="1.0" encoding="utf-8"?>
+<p:sld xmlns:a="http://schemas.openxmlformats.org/drawingml/2006/main" xmlns:p="http://schemas.openxmlformats.org/presentationml/2006/main" xmlns:r="http://schemas.openxmlformats.org/officeDocument/2006/relationships">
+  <p:cSld>
+    <p:bg>
+      <p:bgPr>
+        <a:solidFill>
+          <a:srgbClr val="0B0B1A"/>
+        </a:solidFill>
+        <a:effectLst/>
+      </p:bgPr>
+    </p:bg>
+    <p:spTree>
+      <p:nvGrpSpPr>
+        <p:cNvPr id="1" name=""/>
+        <p:cNvGrpSpPr/>
+        <p:nvPr/>
+      </p:nvGrpSpPr>
+      <p:grpSpPr/>
+      <p:sp>
+        <p:nvSpPr>
+          <p:cNvPr id="2" name="TextBox 1"/>
           <p:cNvSpPr txBox="1"/>
           <p:nvPr/>
         </p:nvSpPr>
         <p:spPr>
           <a:xfrm>
-            <a:off x="914400" y="3291840"/>
-            <a:ext cx="10058400" cy="731520"/>
+            <a:off x="731520" y="274320"/>
+            <a:ext cx="5486400" cy="365760"/>
           </a:xfrm>
           <a:prstGeom prst="rect">
             <a:avLst/>
@@ -4303,30 +5739,73 @@
           </a:bodyPr>
           <a:lstStyle/>
           <a:p>
-            <a:pPr algn="ctr">
-              <a:defRPr sz="2200" b="0">
-                <a:solidFill>
-                  <a:srgbClr val="6C63FF"/>
-                </a:solidFill>
-                <a:latin typeface="Calibri"/>
-              </a:defRPr>
-            </a:pPr>
-            <a:r>
-              <a:t>Nexus — Open-Source Omnichannel AI Agent Platform</a:t>
-            </a:r>
-          </a:p>
-        </p:txBody>
-      </p:sp>
-      <p:sp>
-        <p:nvSpPr>
-          <p:cNvPr id="5" name="TextBox 4"/>
+            <a:pPr algn="l">
+              <a:defRPr sz="1200" b="1">
+                <a:solidFill>
+                  <a:srgbClr val="00D4AA"/>
+                </a:solidFill>
+                <a:latin typeface="Calibri"/>
+              </a:defRPr>
+            </a:pPr>
+            <a:r>
+              <a:t>TECHNOLOGY</a:t>
+            </a:r>
+          </a:p>
+        </p:txBody>
+      </p:sp>
+      <p:sp>
+        <p:nvSpPr>
+          <p:cNvPr id="3" name="Rectangle 2"/>
+          <p:cNvSpPr/>
+          <p:nvPr/>
+        </p:nvSpPr>
+        <p:spPr>
+          <a:xfrm>
+            <a:off x="731520" y="640080"/>
+            <a:ext cx="1097280" cy="50800"/>
+          </a:xfrm>
+          <a:prstGeom prst="rect">
+            <a:avLst/>
+          </a:prstGeom>
+          <a:solidFill>
+            <a:srgbClr val="00D4AA"/>
+          </a:solidFill>
+          <a:ln>
+            <a:noFill/>
+          </a:ln>
+        </p:spPr>
+        <p:style>
+          <a:lnRef idx="1">
+            <a:schemeClr val="accent1"/>
+          </a:lnRef>
+          <a:fillRef idx="3">
+            <a:schemeClr val="accent1"/>
+          </a:fillRef>
+          <a:effectRef idx="2">
+            <a:schemeClr val="accent1"/>
+          </a:effectRef>
+          <a:fontRef idx="minor">
+            <a:schemeClr val="lt1"/>
+          </a:fontRef>
+        </p:style>
+        <p:txBody>
+          <a:bodyPr rtlCol="0" anchor="ctr"/>
+          <a:lstStyle/>
+          <a:p>
+            <a:pPr algn="ctr"/>
+          </a:p>
+        </p:txBody>
+      </p:sp>
+      <p:sp>
+        <p:nvSpPr>
+          <p:cNvPr id="4" name="TextBox 3"/>
           <p:cNvSpPr txBox="1"/>
           <p:nvPr/>
         </p:nvSpPr>
         <p:spPr>
           <a:xfrm>
-            <a:off x="914400" y="4206240"/>
-            <a:ext cx="10058400" cy="548640"/>
+            <a:off x="731520" y="1005840"/>
+            <a:ext cx="10058400" cy="914400"/>
           </a:xfrm>
           <a:prstGeom prst="rect">
             <a:avLst/>
@@ -4339,16 +5818,1249 @@
           </a:bodyPr>
           <a:lstStyle/>
           <a:p>
+            <a:pPr algn="l">
+              <a:defRPr sz="4000" b="1">
+                <a:solidFill>
+                  <a:srgbClr val="FFFFFF"/>
+                </a:solidFill>
+                <a:latin typeface="Calibri"/>
+              </a:defRPr>
+            </a:pPr>
+            <a:r>
+              <a:t>Tech Stack</a:t>
+            </a:r>
+          </a:p>
+        </p:txBody>
+      </p:sp>
+      <p:sp>
+        <p:nvSpPr>
+          <p:cNvPr id="5" name="Rounded Rectangle 4"/>
+          <p:cNvSpPr/>
+          <p:nvPr/>
+        </p:nvSpPr>
+        <p:spPr>
+          <a:xfrm>
+            <a:off x="731520" y="2011680"/>
+            <a:ext cx="1645920" cy="411480"/>
+          </a:xfrm>
+          <a:prstGeom prst="roundRect">
+            <a:avLst>
+              <a:gd name="adj" fmla="val 3000"/>
+            </a:avLst>
+          </a:prstGeom>
+          <a:solidFill>
+            <a:srgbClr val="6C63FF"/>
+          </a:solidFill>
+          <a:ln>
+            <a:noFill/>
+          </a:ln>
+        </p:spPr>
+        <p:style>
+          <a:lnRef idx="1">
+            <a:schemeClr val="accent1"/>
+          </a:lnRef>
+          <a:fillRef idx="3">
+            <a:schemeClr val="accent1"/>
+          </a:fillRef>
+          <a:effectRef idx="2">
+            <a:schemeClr val="accent1"/>
+          </a:effectRef>
+          <a:fontRef idx="minor">
+            <a:schemeClr val="lt1"/>
+          </a:fontRef>
+        </p:style>
+        <p:txBody>
+          <a:bodyPr rtlCol="0" anchor="ctr"/>
+          <a:lstStyle/>
+          <a:p>
+            <a:pPr algn="ctr"/>
+          </a:p>
+        </p:txBody>
+      </p:sp>
+      <p:sp>
+        <p:nvSpPr>
+          <p:cNvPr id="6" name="TextBox 5"/>
+          <p:cNvSpPr txBox="1"/>
+          <p:nvPr/>
+        </p:nvSpPr>
+        <p:spPr>
+          <a:xfrm>
+            <a:off x="731520" y="2011680"/>
+            <a:ext cx="1645920" cy="411480"/>
+          </a:xfrm>
+          <a:prstGeom prst="rect">
+            <a:avLst/>
+          </a:prstGeom>
+          <a:noFill/>
+        </p:spPr>
+        <p:txBody>
+          <a:bodyPr wrap="square">
+            <a:spAutoFit/>
+          </a:bodyPr>
+          <a:lstStyle/>
+          <a:p>
             <a:pPr algn="ctr">
-              <a:defRPr sz="1600" b="0">
-                <a:solidFill>
-                  <a:srgbClr val="CCCCDD"/>
+              <a:defRPr sz="1200" b="1">
+                <a:solidFill>
+                  <a:srgbClr val="FFFFFF"/>
+                </a:solidFill>
+                <a:latin typeface="Calibri"/>
+              </a:defRPr>
+            </a:pPr>
+            <a:r>
+              <a:t>Runtime</a:t>
+            </a:r>
+          </a:p>
+        </p:txBody>
+      </p:sp>
+      <p:sp>
+        <p:nvSpPr>
+          <p:cNvPr id="7" name="TextBox 6"/>
+          <p:cNvSpPr txBox="1"/>
+          <p:nvPr/>
+        </p:nvSpPr>
+        <p:spPr>
+          <a:xfrm>
+            <a:off x="2651760" y="2049780"/>
+            <a:ext cx="8229600" cy="365760"/>
+          </a:xfrm>
+          <a:prstGeom prst="rect">
+            <a:avLst/>
+          </a:prstGeom>
+          <a:noFill/>
+        </p:spPr>
+        <p:txBody>
+          <a:bodyPr wrap="square">
+            <a:spAutoFit/>
+          </a:bodyPr>
+          <a:lstStyle/>
+          <a:p>
+            <a:pPr algn="l">
+              <a:defRPr sz="1400" b="0">
+                <a:solidFill>
+                  <a:srgbClr val="B0B0C8"/>
+                </a:solidFill>
+                <a:latin typeface="Calibri"/>
+              </a:defRPr>
+            </a:pPr>
+            <a:r>
+              <a:t>Python 3.11+ · FastAPI · Uvicorn · SSE-Starlette</a:t>
+            </a:r>
+          </a:p>
+        </p:txBody>
+      </p:sp>
+      <p:sp>
+        <p:nvSpPr>
+          <p:cNvPr id="8" name="Rounded Rectangle 7"/>
+          <p:cNvSpPr/>
+          <p:nvPr/>
+        </p:nvSpPr>
+        <p:spPr>
+          <a:xfrm>
+            <a:off x="731520" y="2651760"/>
+            <a:ext cx="1645920" cy="411480"/>
+          </a:xfrm>
+          <a:prstGeom prst="roundRect">
+            <a:avLst>
+              <a:gd name="adj" fmla="val 3000"/>
+            </a:avLst>
+          </a:prstGeom>
+          <a:solidFill>
+            <a:srgbClr val="6C63FF"/>
+          </a:solidFill>
+          <a:ln>
+            <a:noFill/>
+          </a:ln>
+        </p:spPr>
+        <p:style>
+          <a:lnRef idx="1">
+            <a:schemeClr val="accent1"/>
+          </a:lnRef>
+          <a:fillRef idx="3">
+            <a:schemeClr val="accent1"/>
+          </a:fillRef>
+          <a:effectRef idx="2">
+            <a:schemeClr val="accent1"/>
+          </a:effectRef>
+          <a:fontRef idx="minor">
+            <a:schemeClr val="lt1"/>
+          </a:fontRef>
+        </p:style>
+        <p:txBody>
+          <a:bodyPr rtlCol="0" anchor="ctr"/>
+          <a:lstStyle/>
+          <a:p>
+            <a:pPr algn="ctr"/>
+          </a:p>
+        </p:txBody>
+      </p:sp>
+      <p:sp>
+        <p:nvSpPr>
+          <p:cNvPr id="9" name="TextBox 8"/>
+          <p:cNvSpPr txBox="1"/>
+          <p:nvPr/>
+        </p:nvSpPr>
+        <p:spPr>
+          <a:xfrm>
+            <a:off x="731520" y="2651760"/>
+            <a:ext cx="1645920" cy="411480"/>
+          </a:xfrm>
+          <a:prstGeom prst="rect">
+            <a:avLst/>
+          </a:prstGeom>
+          <a:noFill/>
+        </p:spPr>
+        <p:txBody>
+          <a:bodyPr wrap="square">
+            <a:spAutoFit/>
+          </a:bodyPr>
+          <a:lstStyle/>
+          <a:p>
+            <a:pPr algn="ctr">
+              <a:defRPr sz="1200" b="1">
+                <a:solidFill>
+                  <a:srgbClr val="FFFFFF"/>
+                </a:solidFill>
+                <a:latin typeface="Calibri"/>
+              </a:defRPr>
+            </a:pPr>
+            <a:r>
+              <a:t>LLM</a:t>
+            </a:r>
+          </a:p>
+        </p:txBody>
+      </p:sp>
+      <p:sp>
+        <p:nvSpPr>
+          <p:cNvPr id="10" name="TextBox 9"/>
+          <p:cNvSpPr txBox="1"/>
+          <p:nvPr/>
+        </p:nvSpPr>
+        <p:spPr>
+          <a:xfrm>
+            <a:off x="2651760" y="2689860"/>
+            <a:ext cx="8229600" cy="365760"/>
+          </a:xfrm>
+          <a:prstGeom prst="rect">
+            <a:avLst/>
+          </a:prstGeom>
+          <a:noFill/>
+        </p:spPr>
+        <p:txBody>
+          <a:bodyPr wrap="square">
+            <a:spAutoFit/>
+          </a:bodyPr>
+          <a:lstStyle/>
+          <a:p>
+            <a:pPr algn="l">
+              <a:defRPr sz="1400" b="0">
+                <a:solidFill>
+                  <a:srgbClr val="B0B0C8"/>
+                </a:solidFill>
+                <a:latin typeface="Calibri"/>
+              </a:defRPr>
+            </a:pPr>
+            <a:r>
+              <a:t>OpenAI · Anthropic · Google Gemini · Mock Provider</a:t>
+            </a:r>
+          </a:p>
+        </p:txBody>
+      </p:sp>
+      <p:sp>
+        <p:nvSpPr>
+          <p:cNvPr id="11" name="Rounded Rectangle 10"/>
+          <p:cNvSpPr/>
+          <p:nvPr/>
+        </p:nvSpPr>
+        <p:spPr>
+          <a:xfrm>
+            <a:off x="731520" y="3291840"/>
+            <a:ext cx="1645920" cy="411480"/>
+          </a:xfrm>
+          <a:prstGeom prst="roundRect">
+            <a:avLst>
+              <a:gd name="adj" fmla="val 3000"/>
+            </a:avLst>
+          </a:prstGeom>
+          <a:solidFill>
+            <a:srgbClr val="6C63FF"/>
+          </a:solidFill>
+          <a:ln>
+            <a:noFill/>
+          </a:ln>
+        </p:spPr>
+        <p:style>
+          <a:lnRef idx="1">
+            <a:schemeClr val="accent1"/>
+          </a:lnRef>
+          <a:fillRef idx="3">
+            <a:schemeClr val="accent1"/>
+          </a:fillRef>
+          <a:effectRef idx="2">
+            <a:schemeClr val="accent1"/>
+          </a:effectRef>
+          <a:fontRef idx="minor">
+            <a:schemeClr val="lt1"/>
+          </a:fontRef>
+        </p:style>
+        <p:txBody>
+          <a:bodyPr rtlCol="0" anchor="ctr"/>
+          <a:lstStyle/>
+          <a:p>
+            <a:pPr algn="ctr"/>
+          </a:p>
+        </p:txBody>
+      </p:sp>
+      <p:sp>
+        <p:nvSpPr>
+          <p:cNvPr id="12" name="TextBox 11"/>
+          <p:cNvSpPr txBox="1"/>
+          <p:nvPr/>
+        </p:nvSpPr>
+        <p:spPr>
+          <a:xfrm>
+            <a:off x="731520" y="3291840"/>
+            <a:ext cx="1645920" cy="411480"/>
+          </a:xfrm>
+          <a:prstGeom prst="rect">
+            <a:avLst/>
+          </a:prstGeom>
+          <a:noFill/>
+        </p:spPr>
+        <p:txBody>
+          <a:bodyPr wrap="square">
+            <a:spAutoFit/>
+          </a:bodyPr>
+          <a:lstStyle/>
+          <a:p>
+            <a:pPr algn="ctr">
+              <a:defRPr sz="1200" b="1">
+                <a:solidFill>
+                  <a:srgbClr val="FFFFFF"/>
+                </a:solidFill>
+                <a:latin typeface="Calibri"/>
+              </a:defRPr>
+            </a:pPr>
+            <a:r>
+              <a:t>Voice</a:t>
+            </a:r>
+          </a:p>
+        </p:txBody>
+      </p:sp>
+      <p:sp>
+        <p:nvSpPr>
+          <p:cNvPr id="13" name="TextBox 12"/>
+          <p:cNvSpPr txBox="1"/>
+          <p:nvPr/>
+        </p:nvSpPr>
+        <p:spPr>
+          <a:xfrm>
+            <a:off x="2651760" y="3329940"/>
+            <a:ext cx="8229600" cy="365760"/>
+          </a:xfrm>
+          <a:prstGeom prst="rect">
+            <a:avLst/>
+          </a:prstGeom>
+          <a:noFill/>
+        </p:spPr>
+        <p:txBody>
+          <a:bodyPr wrap="square">
+            <a:spAutoFit/>
+          </a:bodyPr>
+          <a:lstStyle/>
+          <a:p>
+            <a:pPr algn="l">
+              <a:defRPr sz="1400" b="0">
+                <a:solidFill>
+                  <a:srgbClr val="B0B0C8"/>
+                </a:solidFill>
+                <a:latin typeface="Calibri"/>
+              </a:defRPr>
+            </a:pPr>
+            <a:r>
+              <a:t>Twilio · Amazon Connect · Deepgram · ElevenLabs</a:t>
+            </a:r>
+          </a:p>
+        </p:txBody>
+      </p:sp>
+      <p:sp>
+        <p:nvSpPr>
+          <p:cNvPr id="14" name="Rounded Rectangle 13"/>
+          <p:cNvSpPr/>
+          <p:nvPr/>
+        </p:nvSpPr>
+        <p:spPr>
+          <a:xfrm>
+            <a:off x="731520" y="3931920"/>
+            <a:ext cx="1645920" cy="411480"/>
+          </a:xfrm>
+          <a:prstGeom prst="roundRect">
+            <a:avLst>
+              <a:gd name="adj" fmla="val 3000"/>
+            </a:avLst>
+          </a:prstGeom>
+          <a:solidFill>
+            <a:srgbClr val="6C63FF"/>
+          </a:solidFill>
+          <a:ln>
+            <a:noFill/>
+          </a:ln>
+        </p:spPr>
+        <p:style>
+          <a:lnRef idx="1">
+            <a:schemeClr val="accent1"/>
+          </a:lnRef>
+          <a:fillRef idx="3">
+            <a:schemeClr val="accent1"/>
+          </a:fillRef>
+          <a:effectRef idx="2">
+            <a:schemeClr val="accent1"/>
+          </a:effectRef>
+          <a:fontRef idx="minor">
+            <a:schemeClr val="lt1"/>
+          </a:fontRef>
+        </p:style>
+        <p:txBody>
+          <a:bodyPr rtlCol="0" anchor="ctr"/>
+          <a:lstStyle/>
+          <a:p>
+            <a:pPr algn="ctr"/>
+          </a:p>
+        </p:txBody>
+      </p:sp>
+      <p:sp>
+        <p:nvSpPr>
+          <p:cNvPr id="15" name="TextBox 14"/>
+          <p:cNvSpPr txBox="1"/>
+          <p:nvPr/>
+        </p:nvSpPr>
+        <p:spPr>
+          <a:xfrm>
+            <a:off x="731520" y="3931920"/>
+            <a:ext cx="1645920" cy="411480"/>
+          </a:xfrm>
+          <a:prstGeom prst="rect">
+            <a:avLst/>
+          </a:prstGeom>
+          <a:noFill/>
+        </p:spPr>
+        <p:txBody>
+          <a:bodyPr wrap="square">
+            <a:spAutoFit/>
+          </a:bodyPr>
+          <a:lstStyle/>
+          <a:p>
+            <a:pPr algn="ctr">
+              <a:defRPr sz="1200" b="1">
+                <a:solidFill>
+                  <a:srgbClr val="FFFFFF"/>
+                </a:solidFill>
+                <a:latin typeface="Calibri"/>
+              </a:defRPr>
+            </a:pPr>
+            <a:r>
+              <a:t>Data</a:t>
+            </a:r>
+          </a:p>
+        </p:txBody>
+      </p:sp>
+      <p:sp>
+        <p:nvSpPr>
+          <p:cNvPr id="16" name="TextBox 15"/>
+          <p:cNvSpPr txBox="1"/>
+          <p:nvPr/>
+        </p:nvSpPr>
+        <p:spPr>
+          <a:xfrm>
+            <a:off x="2651760" y="3970020"/>
+            <a:ext cx="8229600" cy="365760"/>
+          </a:xfrm>
+          <a:prstGeom prst="rect">
+            <a:avLst/>
+          </a:prstGeom>
+          <a:noFill/>
+        </p:spPr>
+        <p:txBody>
+          <a:bodyPr wrap="square">
+            <a:spAutoFit/>
+          </a:bodyPr>
+          <a:lstStyle/>
+          <a:p>
+            <a:pPr algn="l">
+              <a:defRPr sz="1400" b="0">
+                <a:solidFill>
+                  <a:srgbClr val="B0B0C8"/>
+                </a:solidFill>
+                <a:latin typeface="Calibri"/>
+              </a:defRPr>
+            </a:pPr>
+            <a:r>
+              <a:t>RAG (Vector) · PostgreSQL · Redis · Pydantic</a:t>
+            </a:r>
+          </a:p>
+        </p:txBody>
+      </p:sp>
+      <p:sp>
+        <p:nvSpPr>
+          <p:cNvPr id="17" name="Rounded Rectangle 16"/>
+          <p:cNvSpPr/>
+          <p:nvPr/>
+        </p:nvSpPr>
+        <p:spPr>
+          <a:xfrm>
+            <a:off x="731520" y="4572000"/>
+            <a:ext cx="1645920" cy="411480"/>
+          </a:xfrm>
+          <a:prstGeom prst="roundRect">
+            <a:avLst>
+              <a:gd name="adj" fmla="val 3000"/>
+            </a:avLst>
+          </a:prstGeom>
+          <a:solidFill>
+            <a:srgbClr val="6C63FF"/>
+          </a:solidFill>
+          <a:ln>
+            <a:noFill/>
+          </a:ln>
+        </p:spPr>
+        <p:style>
+          <a:lnRef idx="1">
+            <a:schemeClr val="accent1"/>
+          </a:lnRef>
+          <a:fillRef idx="3">
+            <a:schemeClr val="accent1"/>
+          </a:fillRef>
+          <a:effectRef idx="2">
+            <a:schemeClr val="accent1"/>
+          </a:effectRef>
+          <a:fontRef idx="minor">
+            <a:schemeClr val="lt1"/>
+          </a:fontRef>
+        </p:style>
+        <p:txBody>
+          <a:bodyPr rtlCol="0" anchor="ctr"/>
+          <a:lstStyle/>
+          <a:p>
+            <a:pPr algn="ctr"/>
+          </a:p>
+        </p:txBody>
+      </p:sp>
+      <p:sp>
+        <p:nvSpPr>
+          <p:cNvPr id="18" name="TextBox 17"/>
+          <p:cNvSpPr txBox="1"/>
+          <p:nvPr/>
+        </p:nvSpPr>
+        <p:spPr>
+          <a:xfrm>
+            <a:off x="731520" y="4572000"/>
+            <a:ext cx="1645920" cy="411480"/>
+          </a:xfrm>
+          <a:prstGeom prst="rect">
+            <a:avLst/>
+          </a:prstGeom>
+          <a:noFill/>
+        </p:spPr>
+        <p:txBody>
+          <a:bodyPr wrap="square">
+            <a:spAutoFit/>
+          </a:bodyPr>
+          <a:lstStyle/>
+          <a:p>
+            <a:pPr algn="ctr">
+              <a:defRPr sz="1200" b="1">
+                <a:solidFill>
+                  <a:srgbClr val="FFFFFF"/>
+                </a:solidFill>
+                <a:latin typeface="Calibri"/>
+              </a:defRPr>
+            </a:pPr>
+            <a:r>
+              <a:t>Frontend</a:t>
+            </a:r>
+          </a:p>
+        </p:txBody>
+      </p:sp>
+      <p:sp>
+        <p:nvSpPr>
+          <p:cNvPr id="19" name="TextBox 18"/>
+          <p:cNvSpPr txBox="1"/>
+          <p:nvPr/>
+        </p:nvSpPr>
+        <p:spPr>
+          <a:xfrm>
+            <a:off x="2651760" y="4610100"/>
+            <a:ext cx="8229600" cy="365760"/>
+          </a:xfrm>
+          <a:prstGeom prst="rect">
+            <a:avLst/>
+          </a:prstGeom>
+          <a:noFill/>
+        </p:spPr>
+        <p:txBody>
+          <a:bodyPr wrap="square">
+            <a:spAutoFit/>
+          </a:bodyPr>
+          <a:lstStyle/>
+          <a:p>
+            <a:pPr algn="l">
+              <a:defRPr sz="1400" b="0">
+                <a:solidFill>
+                  <a:srgbClr val="B0B0C8"/>
+                </a:solidFill>
+                <a:latin typeface="Calibri"/>
+              </a:defRPr>
+            </a:pPr>
+            <a:r>
+              <a:t>Vanilla JS · CSS · HTML · SSE Streaming</a:t>
+            </a:r>
+          </a:p>
+        </p:txBody>
+      </p:sp>
+      <p:sp>
+        <p:nvSpPr>
+          <p:cNvPr id="20" name="Rounded Rectangle 19"/>
+          <p:cNvSpPr/>
+          <p:nvPr/>
+        </p:nvSpPr>
+        <p:spPr>
+          <a:xfrm>
+            <a:off x="731520" y="5212080"/>
+            <a:ext cx="1645920" cy="411480"/>
+          </a:xfrm>
+          <a:prstGeom prst="roundRect">
+            <a:avLst>
+              <a:gd name="adj" fmla="val 3000"/>
+            </a:avLst>
+          </a:prstGeom>
+          <a:solidFill>
+            <a:srgbClr val="6C63FF"/>
+          </a:solidFill>
+          <a:ln>
+            <a:noFill/>
+          </a:ln>
+        </p:spPr>
+        <p:style>
+          <a:lnRef idx="1">
+            <a:schemeClr val="accent1"/>
+          </a:lnRef>
+          <a:fillRef idx="3">
+            <a:schemeClr val="accent1"/>
+          </a:fillRef>
+          <a:effectRef idx="2">
+            <a:schemeClr val="accent1"/>
+          </a:effectRef>
+          <a:fontRef idx="minor">
+            <a:schemeClr val="lt1"/>
+          </a:fontRef>
+        </p:style>
+        <p:txBody>
+          <a:bodyPr rtlCol="0" anchor="ctr"/>
+          <a:lstStyle/>
+          <a:p>
+            <a:pPr algn="ctr"/>
+          </a:p>
+        </p:txBody>
+      </p:sp>
+      <p:sp>
+        <p:nvSpPr>
+          <p:cNvPr id="21" name="TextBox 20"/>
+          <p:cNvSpPr txBox="1"/>
+          <p:nvPr/>
+        </p:nvSpPr>
+        <p:spPr>
+          <a:xfrm>
+            <a:off x="731520" y="5212080"/>
+            <a:ext cx="1645920" cy="411480"/>
+          </a:xfrm>
+          <a:prstGeom prst="rect">
+            <a:avLst/>
+          </a:prstGeom>
+          <a:noFill/>
+        </p:spPr>
+        <p:txBody>
+          <a:bodyPr wrap="square">
+            <a:spAutoFit/>
+          </a:bodyPr>
+          <a:lstStyle/>
+          <a:p>
+            <a:pPr algn="ctr">
+              <a:defRPr sz="1200" b="1">
+                <a:solidFill>
+                  <a:srgbClr val="FFFFFF"/>
+                </a:solidFill>
+                <a:latin typeface="Calibri"/>
+              </a:defRPr>
+            </a:pPr>
+            <a:r>
+              <a:t>Infra</a:t>
+            </a:r>
+          </a:p>
+        </p:txBody>
+      </p:sp>
+      <p:sp>
+        <p:nvSpPr>
+          <p:cNvPr id="22" name="TextBox 21"/>
+          <p:cNvSpPr txBox="1"/>
+          <p:nvPr/>
+        </p:nvSpPr>
+        <p:spPr>
+          <a:xfrm>
+            <a:off x="2651760" y="5250180"/>
+            <a:ext cx="8229600" cy="365760"/>
+          </a:xfrm>
+          <a:prstGeom prst="rect">
+            <a:avLst/>
+          </a:prstGeom>
+          <a:noFill/>
+        </p:spPr>
+        <p:txBody>
+          <a:bodyPr wrap="square">
+            <a:spAutoFit/>
+          </a:bodyPr>
+          <a:lstStyle/>
+          <a:p>
+            <a:pPr algn="l">
+              <a:defRPr sz="1400" b="0">
+                <a:solidFill>
+                  <a:srgbClr val="B0B0C8"/>
+                </a:solidFill>
+                <a:latin typeface="Calibri"/>
+              </a:defRPr>
+            </a:pPr>
+            <a:r>
+              <a:t>Docker · GitHub Actions · n8n · Zapier</a:t>
+            </a:r>
+          </a:p>
+        </p:txBody>
+      </p:sp>
+      <p:sp>
+        <p:nvSpPr>
+          <p:cNvPr id="23" name="Rounded Rectangle 22"/>
+          <p:cNvSpPr/>
+          <p:nvPr/>
+        </p:nvSpPr>
+        <p:spPr>
+          <a:xfrm>
+            <a:off x="731520" y="5852159"/>
+            <a:ext cx="1645920" cy="411480"/>
+          </a:xfrm>
+          <a:prstGeom prst="roundRect">
+            <a:avLst>
+              <a:gd name="adj" fmla="val 3000"/>
+            </a:avLst>
+          </a:prstGeom>
+          <a:solidFill>
+            <a:srgbClr val="6C63FF"/>
+          </a:solidFill>
+          <a:ln>
+            <a:noFill/>
+          </a:ln>
+        </p:spPr>
+        <p:style>
+          <a:lnRef idx="1">
+            <a:schemeClr val="accent1"/>
+          </a:lnRef>
+          <a:fillRef idx="3">
+            <a:schemeClr val="accent1"/>
+          </a:fillRef>
+          <a:effectRef idx="2">
+            <a:schemeClr val="accent1"/>
+          </a:effectRef>
+          <a:fontRef idx="minor">
+            <a:schemeClr val="lt1"/>
+          </a:fontRef>
+        </p:style>
+        <p:txBody>
+          <a:bodyPr rtlCol="0" anchor="ctr"/>
+          <a:lstStyle/>
+          <a:p>
+            <a:pPr algn="ctr"/>
+          </a:p>
+        </p:txBody>
+      </p:sp>
+      <p:sp>
+        <p:nvSpPr>
+          <p:cNvPr id="24" name="TextBox 23"/>
+          <p:cNvSpPr txBox="1"/>
+          <p:nvPr/>
+        </p:nvSpPr>
+        <p:spPr>
+          <a:xfrm>
+            <a:off x="731520" y="5852159"/>
+            <a:ext cx="1645920" cy="411480"/>
+          </a:xfrm>
+          <a:prstGeom prst="rect">
+            <a:avLst/>
+          </a:prstGeom>
+          <a:noFill/>
+        </p:spPr>
+        <p:txBody>
+          <a:bodyPr wrap="square">
+            <a:spAutoFit/>
+          </a:bodyPr>
+          <a:lstStyle/>
+          <a:p>
+            <a:pPr algn="ctr">
+              <a:defRPr sz="1200" b="1">
+                <a:solidFill>
+                  <a:srgbClr val="FFFFFF"/>
+                </a:solidFill>
+                <a:latin typeface="Calibri"/>
+              </a:defRPr>
+            </a:pPr>
+            <a:r>
+              <a:t>Security</a:t>
+            </a:r>
+          </a:p>
+        </p:txBody>
+      </p:sp>
+      <p:sp>
+        <p:nvSpPr>
+          <p:cNvPr id="25" name="TextBox 24"/>
+          <p:cNvSpPr txBox="1"/>
+          <p:nvPr/>
+        </p:nvSpPr>
+        <p:spPr>
+          <a:xfrm>
+            <a:off x="2651760" y="5890259"/>
+            <a:ext cx="8229600" cy="365760"/>
+          </a:xfrm>
+          <a:prstGeom prst="rect">
+            <a:avLst/>
+          </a:prstGeom>
+          <a:noFill/>
+        </p:spPr>
+        <p:txBody>
+          <a:bodyPr wrap="square">
+            <a:spAutoFit/>
+          </a:bodyPr>
+          <a:lstStyle/>
+          <a:p>
+            <a:pPr algn="l">
+              <a:defRPr sz="1400" b="0">
+                <a:solidFill>
+                  <a:srgbClr val="B0B0C8"/>
+                </a:solidFill>
+                <a:latin typeface="Calibri"/>
+              </a:defRPr>
+            </a:pPr>
+            <a:r>
+              <a:t>AES-256-GCM · JWT · CORS · Pydantic Validation</a:t>
+            </a:r>
+          </a:p>
+        </p:txBody>
+      </p:sp>
+      <p:sp>
+        <p:nvSpPr>
+          <p:cNvPr id="26" name="TextBox 25"/>
+          <p:cNvSpPr txBox="1"/>
+          <p:nvPr/>
+        </p:nvSpPr>
+        <p:spPr>
+          <a:xfrm>
+            <a:off x="10972800" y="6400800"/>
+            <a:ext cx="914400" cy="274320"/>
+          </a:xfrm>
+          <a:prstGeom prst="rect">
+            <a:avLst/>
+          </a:prstGeom>
+          <a:noFill/>
+        </p:spPr>
+        <p:txBody>
+          <a:bodyPr wrap="square">
+            <a:spAutoFit/>
+          </a:bodyPr>
+          <a:lstStyle/>
+          <a:p>
+            <a:pPr algn="r">
+              <a:defRPr sz="1000" b="0">
+                <a:solidFill>
+                  <a:srgbClr val="6B6B8A"/>
+                </a:solidFill>
+                <a:latin typeface="Calibri"/>
+              </a:defRPr>
+            </a:pPr>
+            <a:r>
+              <a:t>15 / 16</a:t>
+            </a:r>
+          </a:p>
+        </p:txBody>
+      </p:sp>
+    </p:spTree>
+  </p:cSld>
+  <p:clrMapOvr>
+    <a:masterClrMapping/>
+  </p:clrMapOvr>
+</p:sld>
+</file>
+
+<file path=ppt/slides/slide16.xml><?xml version="1.0" encoding="utf-8"?>
+<p:sld xmlns:a="http://schemas.openxmlformats.org/drawingml/2006/main" xmlns:p="http://schemas.openxmlformats.org/presentationml/2006/main" xmlns:r="http://schemas.openxmlformats.org/officeDocument/2006/relationships">
+  <p:cSld>
+    <p:bg>
+      <p:bgPr>
+        <a:solidFill>
+          <a:srgbClr val="0B0B1A"/>
+        </a:solidFill>
+        <a:effectLst/>
+      </p:bgPr>
+    </p:bg>
+    <p:spTree>
+      <p:nvGrpSpPr>
+        <p:cNvPr id="1" name=""/>
+        <p:cNvGrpSpPr/>
+        <p:nvPr/>
+      </p:nvGrpSpPr>
+      <p:grpSpPr/>
+      <p:sp>
+        <p:nvSpPr>
+          <p:cNvPr id="2" name="Oval 1"/>
+          <p:cNvSpPr/>
+          <p:nvPr/>
+        </p:nvSpPr>
+        <p:spPr>
+          <a:xfrm>
+            <a:off x="-914400" y="-914400"/>
+            <a:ext cx="2743200" cy="2743200"/>
+          </a:xfrm>
+          <a:prstGeom prst="ellipse">
+            <a:avLst/>
+          </a:prstGeom>
+          <a:solidFill>
+            <a:srgbClr val="6C63FF"/>
+          </a:solidFill>
+          <a:ln>
+            <a:noFill/>
+          </a:ln>
+        </p:spPr>
+        <p:style>
+          <a:lnRef idx="1">
+            <a:schemeClr val="accent1"/>
+          </a:lnRef>
+          <a:fillRef idx="3">
+            <a:schemeClr val="accent1"/>
+          </a:fillRef>
+          <a:effectRef idx="2">
+            <a:schemeClr val="accent1"/>
+          </a:effectRef>
+          <a:fontRef idx="minor">
+            <a:schemeClr val="lt1"/>
+          </a:fontRef>
+        </p:style>
+        <p:txBody>
+          <a:bodyPr rtlCol="0" anchor="ctr"/>
+          <a:lstStyle/>
+          <a:p>
+            <a:pPr algn="ctr"/>
+          </a:p>
+        </p:txBody>
+      </p:sp>
+      <p:sp>
+        <p:nvSpPr>
+          <p:cNvPr id="3" name="Oval 2"/>
+          <p:cNvSpPr/>
+          <p:nvPr/>
+        </p:nvSpPr>
+        <p:spPr>
+          <a:xfrm>
+            <a:off x="10058400" y="5029200"/>
+            <a:ext cx="2286000" cy="2286000"/>
+          </a:xfrm>
+          <a:prstGeom prst="ellipse">
+            <a:avLst/>
+          </a:prstGeom>
+          <a:solidFill>
+            <a:srgbClr val="00D4AA"/>
+          </a:solidFill>
+          <a:ln>
+            <a:noFill/>
+          </a:ln>
+        </p:spPr>
+        <p:style>
+          <a:lnRef idx="1">
+            <a:schemeClr val="accent1"/>
+          </a:lnRef>
+          <a:fillRef idx="3">
+            <a:schemeClr val="accent1"/>
+          </a:fillRef>
+          <a:effectRef idx="2">
+            <a:schemeClr val="accent1"/>
+          </a:effectRef>
+          <a:fontRef idx="minor">
+            <a:schemeClr val="lt1"/>
+          </a:fontRef>
+        </p:style>
+        <p:txBody>
+          <a:bodyPr rtlCol="0" anchor="ctr"/>
+          <a:lstStyle/>
+          <a:p>
+            <a:pPr algn="ctr"/>
+          </a:p>
+        </p:txBody>
+      </p:sp>
+      <p:sp>
+        <p:nvSpPr>
+          <p:cNvPr id="4" name="Oval 3"/>
+          <p:cNvSpPr/>
+          <p:nvPr/>
+        </p:nvSpPr>
+        <p:spPr>
+          <a:xfrm>
+            <a:off x="7315200" y="-457200"/>
+            <a:ext cx="1371600" cy="1371600"/>
+          </a:xfrm>
+          <a:prstGeom prst="ellipse">
+            <a:avLst/>
+          </a:prstGeom>
+          <a:solidFill>
+            <a:srgbClr val="FF6B6B"/>
+          </a:solidFill>
+          <a:ln>
+            <a:noFill/>
+          </a:ln>
+        </p:spPr>
+        <p:style>
+          <a:lnRef idx="1">
+            <a:schemeClr val="accent1"/>
+          </a:lnRef>
+          <a:fillRef idx="3">
+            <a:schemeClr val="accent1"/>
+          </a:fillRef>
+          <a:effectRef idx="2">
+            <a:schemeClr val="accent1"/>
+          </a:effectRef>
+          <a:fontRef idx="minor">
+            <a:schemeClr val="lt1"/>
+          </a:fontRef>
+        </p:style>
+        <p:txBody>
+          <a:bodyPr rtlCol="0" anchor="ctr"/>
+          <a:lstStyle/>
+          <a:p>
+            <a:pPr algn="ctr"/>
+          </a:p>
+        </p:txBody>
+      </p:sp>
+      <p:sp>
+        <p:nvSpPr>
+          <p:cNvPr id="5" name="TextBox 4"/>
+          <p:cNvSpPr txBox="1"/>
+          <p:nvPr/>
+        </p:nvSpPr>
+        <p:spPr>
+          <a:xfrm>
+            <a:off x="914400" y="1828800"/>
+            <a:ext cx="10058400" cy="1097280"/>
+          </a:xfrm>
+          <a:prstGeom prst="rect">
+            <a:avLst/>
+          </a:prstGeom>
+          <a:noFill/>
+        </p:spPr>
+        <p:txBody>
+          <a:bodyPr wrap="square">
+            <a:spAutoFit/>
+          </a:bodyPr>
+          <a:lstStyle/>
+          <a:p>
+            <a:pPr algn="ctr">
+              <a:defRPr sz="7200" b="1">
+                <a:solidFill>
+                  <a:srgbClr val="FFFFFF"/>
+                </a:solidFill>
+                <a:latin typeface="Calibri"/>
+              </a:defRPr>
+            </a:pPr>
+            <a:r>
+              <a:t>Thank You</a:t>
+            </a:r>
+          </a:p>
+        </p:txBody>
+      </p:sp>
+      <p:sp>
+        <p:nvSpPr>
+          <p:cNvPr id="6" name="Rectangle 5"/>
+          <p:cNvSpPr/>
+          <p:nvPr/>
+        </p:nvSpPr>
+        <p:spPr>
+          <a:xfrm>
+            <a:off x="5029200" y="3017520"/>
+            <a:ext cx="2286000" cy="63500"/>
+          </a:xfrm>
+          <a:prstGeom prst="rect">
+            <a:avLst/>
+          </a:prstGeom>
+          <a:solidFill>
+            <a:srgbClr val="00D4AA"/>
+          </a:solidFill>
+          <a:ln>
+            <a:noFill/>
+          </a:ln>
+        </p:spPr>
+        <p:style>
+          <a:lnRef idx="1">
+            <a:schemeClr val="accent1"/>
+          </a:lnRef>
+          <a:fillRef idx="3">
+            <a:schemeClr val="accent1"/>
+          </a:fillRef>
+          <a:effectRef idx="2">
+            <a:schemeClr val="accent1"/>
+          </a:effectRef>
+          <a:fontRef idx="minor">
+            <a:schemeClr val="lt1"/>
+          </a:fontRef>
+        </p:style>
+        <p:txBody>
+          <a:bodyPr rtlCol="0" anchor="ctr"/>
+          <a:lstStyle/>
+          <a:p>
+            <a:pPr algn="ctr"/>
+          </a:p>
+        </p:txBody>
+      </p:sp>
+      <p:sp>
+        <p:nvSpPr>
+          <p:cNvPr id="7" name="TextBox 6"/>
+          <p:cNvSpPr txBox="1"/>
+          <p:nvPr/>
+        </p:nvSpPr>
+        <p:spPr>
+          <a:xfrm>
+            <a:off x="914400" y="3474720"/>
+            <a:ext cx="10058400" cy="548640"/>
+          </a:xfrm>
+          <a:prstGeom prst="rect">
+            <a:avLst/>
+          </a:prstGeom>
+          <a:noFill/>
+        </p:spPr>
+        <p:txBody>
+          <a:bodyPr wrap="square">
+            <a:spAutoFit/>
+          </a:bodyPr>
+          <a:lstStyle/>
+          <a:p>
+            <a:pPr algn="ctr">
+              <a:defRPr sz="2000" b="0">
+                <a:solidFill>
+                  <a:srgbClr val="6C63FF"/>
+                </a:solidFill>
+                <a:latin typeface="Calibri"/>
+              </a:defRPr>
+            </a:pPr>
+            <a:r>
+              <a:t>Nexus — Open-Source Omnichannel AI Agent Platform</a:t>
+            </a:r>
+          </a:p>
+        </p:txBody>
+      </p:sp>
+      <p:sp>
+        <p:nvSpPr>
+          <p:cNvPr id="8" name="TextBox 7"/>
+          <p:cNvSpPr txBox="1"/>
+          <p:nvPr/>
+        </p:nvSpPr>
+        <p:spPr>
+          <a:xfrm>
+            <a:off x="914400" y="4389120"/>
+            <a:ext cx="10058400" cy="457200"/>
+          </a:xfrm>
+          <a:prstGeom prst="rect">
+            <a:avLst/>
+          </a:prstGeom>
+          <a:noFill/>
+        </p:spPr>
+        <p:txBody>
+          <a:bodyPr wrap="square">
+            <a:spAutoFit/>
+          </a:bodyPr>
+          <a:lstStyle/>
+          <a:p>
+            <a:pPr algn="ctr">
+              <a:defRPr sz="1400" b="0">
+                <a:solidFill>
+                  <a:srgbClr val="B0B0C8"/>
                 </a:solidFill>
                 <a:latin typeface="Calibri"/>
               </a:defRPr>
             </a:pPr>
             <a:r>
               <a:t>MIT License  ·  github.com/ShubhamRSY/voice-agents</a:t>
+            </a:r>
+          </a:p>
+        </p:txBody>
+      </p:sp>
+      <p:sp>
+        <p:nvSpPr>
+          <p:cNvPr id="9" name="TextBox 8"/>
+          <p:cNvSpPr txBox="1"/>
+          <p:nvPr/>
+        </p:nvSpPr>
+        <p:spPr>
+          <a:xfrm>
+            <a:off x="914400" y="5029200"/>
+            <a:ext cx="10058400" cy="365760"/>
+          </a:xfrm>
+          <a:prstGeom prst="rect">
+            <a:avLst/>
+          </a:prstGeom>
+          <a:noFill/>
+        </p:spPr>
+        <p:txBody>
+          <a:bodyPr wrap="square">
+            <a:spAutoFit/>
+          </a:bodyPr>
+          <a:lstStyle/>
+          <a:p>
+            <a:pPr algn="ctr">
+              <a:defRPr sz="1200" b="0">
+                <a:solidFill>
+                  <a:srgbClr val="6B6B8A"/>
+                </a:solidFill>
+                <a:latin typeface="Calibri"/>
+              </a:defRPr>
+            </a:pPr>
+            <a:r>
+              <a:t>Chat  ·  Copilot  ·  Voice  —  One Orchestrator</a:t>
+            </a:r>
+          </a:p>
+        </p:txBody>
+      </p:sp>
+      <p:sp>
+        <p:nvSpPr>
+          <p:cNvPr id="10" name="TextBox 9"/>
+          <p:cNvSpPr txBox="1"/>
+          <p:nvPr/>
+        </p:nvSpPr>
+        <p:spPr>
+          <a:xfrm>
+            <a:off x="10972800" y="6400800"/>
+            <a:ext cx="914400" cy="274320"/>
+          </a:xfrm>
+          <a:prstGeom prst="rect">
+            <a:avLst/>
+          </a:prstGeom>
+          <a:noFill/>
+        </p:spPr>
+        <p:txBody>
+          <a:bodyPr wrap="square">
+            <a:spAutoFit/>
+          </a:bodyPr>
+          <a:lstStyle/>
+          <a:p>
+            <a:pPr algn="r">
+              <a:defRPr sz="1000" b="0">
+                <a:solidFill>
+                  <a:srgbClr val="6B6B8A"/>
+                </a:solidFill>
+                <a:latin typeface="Calibri"/>
+              </a:defRPr>
+            </a:pPr>
+            <a:r>
+              <a:t>16 / 16</a:t>
             </a:r>
           </a:p>
         </p:txBody>
@@ -4367,7 +7079,7 @@
     <p:bg>
       <p:bgPr>
         <a:solidFill>
-          <a:srgbClr val="1E1E2E"/>
+          <a:srgbClr val="0B0B1A"/>
         </a:solidFill>
         <a:effectLst/>
       </p:bgPr>
@@ -4381,16 +7093,16 @@
       <p:grpSpPr/>
       <p:sp>
         <p:nvSpPr>
-          <p:cNvPr id="2" name="Rectangle 1"/>
+          <p:cNvPr id="2" name="Oval 1"/>
           <p:cNvSpPr/>
           <p:nvPr/>
         </p:nvSpPr>
         <p:spPr>
           <a:xfrm>
-            <a:off x="731520" y="548640"/>
-            <a:ext cx="3657600" cy="50800"/>
-          </a:xfrm>
-          <a:prstGeom prst="rect">
+            <a:off x="-731520" y="5029200"/>
+            <a:ext cx="2286000" cy="2286000"/>
+          </a:xfrm>
+          <a:prstGeom prst="ellipse">
             <a:avLst/>
           </a:prstGeom>
           <a:solidFill>
@@ -4430,8 +7142,8 @@
         </p:nvSpPr>
         <p:spPr>
           <a:xfrm>
-            <a:off x="731520" y="731520"/>
-            <a:ext cx="9144000" cy="731520"/>
+            <a:off x="731520" y="274320"/>
+            <a:ext cx="5486400" cy="365760"/>
           </a:xfrm>
           <a:prstGeom prst="rect">
             <a:avLst/>
@@ -4445,29 +7157,72 @@
           <a:lstStyle/>
           <a:p>
             <a:pPr algn="l">
-              <a:defRPr sz="3600" b="1">
-                <a:solidFill>
-                  <a:srgbClr val="FFFFFF"/>
-                </a:solidFill>
-                <a:latin typeface="Calibri"/>
-              </a:defRPr>
-            </a:pPr>
-            <a:r>
-              <a:t>What Is Nexus?</a:t>
-            </a:r>
-          </a:p>
-        </p:txBody>
-      </p:sp>
-      <p:sp>
-        <p:nvSpPr>
-          <p:cNvPr id="4" name="TextBox 3"/>
+              <a:defRPr sz="1200" b="1">
+                <a:solidFill>
+                  <a:srgbClr val="00D4AA"/>
+                </a:solidFill>
+                <a:latin typeface="Calibri"/>
+              </a:defRPr>
+            </a:pPr>
+            <a:r>
+              <a:t>OVERVIEW</a:t>
+            </a:r>
+          </a:p>
+        </p:txBody>
+      </p:sp>
+      <p:sp>
+        <p:nvSpPr>
+          <p:cNvPr id="4" name="Rectangle 3"/>
+          <p:cNvSpPr/>
+          <p:nvPr/>
+        </p:nvSpPr>
+        <p:spPr>
+          <a:xfrm>
+            <a:off x="731520" y="640080"/>
+            <a:ext cx="1097280" cy="50800"/>
+          </a:xfrm>
+          <a:prstGeom prst="rect">
+            <a:avLst/>
+          </a:prstGeom>
+          <a:solidFill>
+            <a:srgbClr val="00D4AA"/>
+          </a:solidFill>
+          <a:ln>
+            <a:noFill/>
+          </a:ln>
+        </p:spPr>
+        <p:style>
+          <a:lnRef idx="1">
+            <a:schemeClr val="accent1"/>
+          </a:lnRef>
+          <a:fillRef idx="3">
+            <a:schemeClr val="accent1"/>
+          </a:fillRef>
+          <a:effectRef idx="2">
+            <a:schemeClr val="accent1"/>
+          </a:effectRef>
+          <a:fontRef idx="minor">
+            <a:schemeClr val="lt1"/>
+          </a:fontRef>
+        </p:style>
+        <p:txBody>
+          <a:bodyPr rtlCol="0" anchor="ctr"/>
+          <a:lstStyle/>
+          <a:p>
+            <a:pPr algn="ctr"/>
+          </a:p>
+        </p:txBody>
+      </p:sp>
+      <p:sp>
+        <p:nvSpPr>
+          <p:cNvPr id="5" name="TextBox 4"/>
           <p:cNvSpPr txBox="1"/>
           <p:nvPr/>
         </p:nvSpPr>
         <p:spPr>
           <a:xfrm>
-            <a:off x="731520" y="1828800"/>
-            <a:ext cx="10515600" cy="4114800"/>
+            <a:off x="731520" y="1005840"/>
+            <a:ext cx="10058400" cy="914400"/>
           </a:xfrm>
           <a:prstGeom prst="rect">
             <a:avLst/>
@@ -4481,20 +7236,92 @@
           <a:lstStyle/>
           <a:p>
             <a:pPr algn="l">
-              <a:defRPr sz="1800" b="0">
-                <a:solidFill>
-                  <a:srgbClr val="CCCCDD"/>
-                </a:solidFill>
-                <a:latin typeface="Calibri"/>
-              </a:defRPr>
-            </a:pPr>
-            <a:r>
-              <a:t>Nexus is an open-source, enterprise-grade omnichannel AI agent platform that unifies customer support conversations across chat, copilot assistance, and voice telephony into a single orchestration runtime.</a:t>
+              <a:defRPr sz="4000" b="1">
+                <a:solidFill>
+                  <a:srgbClr val="FFFFFF"/>
+                </a:solidFill>
+                <a:latin typeface="Calibri"/>
+              </a:defRPr>
+            </a:pPr>
+            <a:r>
+              <a:t>What Is Nexus?</a:t>
+            </a:r>
+          </a:p>
+        </p:txBody>
+      </p:sp>
+      <p:sp>
+        <p:nvSpPr>
+          <p:cNvPr id="6" name="TextBox 5"/>
+          <p:cNvSpPr txBox="1"/>
+          <p:nvPr/>
+        </p:nvSpPr>
+        <p:spPr>
+          <a:xfrm>
+            <a:off x="731520" y="2011680"/>
+            <a:ext cx="10515600" cy="3200400"/>
+          </a:xfrm>
+          <a:prstGeom prst="rect">
+            <a:avLst/>
+          </a:prstGeom>
+          <a:noFill/>
+        </p:spPr>
+        <p:txBody>
+          <a:bodyPr wrap="square">
+            <a:spAutoFit/>
+          </a:bodyPr>
+          <a:lstStyle/>
+          <a:p>
+            <a:pPr algn="l">
+              <a:defRPr sz="1600" b="0">
+                <a:solidFill>
+                  <a:srgbClr val="B0B0C8"/>
+                </a:solidFill>
+                <a:latin typeface="Calibri"/>
+              </a:defRPr>
+            </a:pPr>
+            <a:r>
+              <a:t>Customer support teams lose context switching between channels — chat, phone, email, and internal tools each live in separate silos. Nexus solves this with a single AI-powered orchestrator that handles every conversation from one runtime, with one knowledge base, and one feedback loop that improves responses over time.</a:t>
             </a:r>
             <a:br/>
             <a:br/>
             <a:r>
-              <a:t>It solves the problem of fragmented support tools by providing one AI engine that routes conversations, retrieves knowledge via RAG, supports multiple LLM providers, and improves responses through a built-in CSAT feedback loop — all from a single console.</a:t>
+              <a:t>No API key is required to start — the platform ships with a built-in mock LLM so the entire console, voice simulator, and all 158+ unit tests work immediately out of the box.</a:t>
+            </a:r>
+          </a:p>
+        </p:txBody>
+      </p:sp>
+      <p:sp>
+        <p:nvSpPr>
+          <p:cNvPr id="7" name="TextBox 6"/>
+          <p:cNvSpPr txBox="1"/>
+          <p:nvPr/>
+        </p:nvSpPr>
+        <p:spPr>
+          <a:xfrm>
+            <a:off x="10972800" y="6400800"/>
+            <a:ext cx="914400" cy="274320"/>
+          </a:xfrm>
+          <a:prstGeom prst="rect">
+            <a:avLst/>
+          </a:prstGeom>
+          <a:noFill/>
+        </p:spPr>
+        <p:txBody>
+          <a:bodyPr wrap="square">
+            <a:spAutoFit/>
+          </a:bodyPr>
+          <a:lstStyle/>
+          <a:p>
+            <a:pPr algn="r">
+              <a:defRPr sz="1000" b="0">
+                <a:solidFill>
+                  <a:srgbClr val="6B6B8A"/>
+                </a:solidFill>
+                <a:latin typeface="Calibri"/>
+              </a:defRPr>
+            </a:pPr>
+            <a:r>
+              <a:t>02 / 16</a:t>
             </a:r>
           </a:p>
         </p:txBody>
@@ -4513,7 +7340,7 @@
     <p:bg>
       <p:bgPr>
         <a:solidFill>
-          <a:srgbClr val="1E1E2E"/>
+          <a:srgbClr val="0B0B1A"/>
         </a:solidFill>
         <a:effectLst/>
       </p:bgPr>
@@ -4527,14 +7354,174 @@
       <p:grpSpPr/>
       <p:sp>
         <p:nvSpPr>
-          <p:cNvPr id="2" name="Rectangle 1"/>
+          <p:cNvPr id="2" name="TextBox 1"/>
+          <p:cNvSpPr txBox="1"/>
+          <p:nvPr/>
+        </p:nvSpPr>
+        <p:spPr>
+          <a:xfrm>
+            <a:off x="731520" y="274320"/>
+            <a:ext cx="5486400" cy="365760"/>
+          </a:xfrm>
+          <a:prstGeom prst="rect">
+            <a:avLst/>
+          </a:prstGeom>
+          <a:noFill/>
+        </p:spPr>
+        <p:txBody>
+          <a:bodyPr wrap="square">
+            <a:spAutoFit/>
+          </a:bodyPr>
+          <a:lstStyle/>
+          <a:p>
+            <a:pPr algn="l">
+              <a:defRPr sz="1200" b="1">
+                <a:solidFill>
+                  <a:srgbClr val="00D4AA"/>
+                </a:solidFill>
+                <a:latin typeface="Calibri"/>
+              </a:defRPr>
+            </a:pPr>
+            <a:r>
+              <a:t>CHANNELS</a:t>
+            </a:r>
+          </a:p>
+        </p:txBody>
+      </p:sp>
+      <p:sp>
+        <p:nvSpPr>
+          <p:cNvPr id="3" name="Rectangle 2"/>
           <p:cNvSpPr/>
           <p:nvPr/>
         </p:nvSpPr>
         <p:spPr>
           <a:xfrm>
-            <a:off x="731520" y="548640"/>
-            <a:ext cx="3657600" cy="50800"/>
+            <a:off x="731520" y="640080"/>
+            <a:ext cx="1097280" cy="50800"/>
+          </a:xfrm>
+          <a:prstGeom prst="rect">
+            <a:avLst/>
+          </a:prstGeom>
+          <a:solidFill>
+            <a:srgbClr val="00D4AA"/>
+          </a:solidFill>
+          <a:ln>
+            <a:noFill/>
+          </a:ln>
+        </p:spPr>
+        <p:style>
+          <a:lnRef idx="1">
+            <a:schemeClr val="accent1"/>
+          </a:lnRef>
+          <a:fillRef idx="3">
+            <a:schemeClr val="accent1"/>
+          </a:fillRef>
+          <a:effectRef idx="2">
+            <a:schemeClr val="accent1"/>
+          </a:effectRef>
+          <a:fontRef idx="minor">
+            <a:schemeClr val="lt1"/>
+          </a:fontRef>
+        </p:style>
+        <p:txBody>
+          <a:bodyPr rtlCol="0" anchor="ctr"/>
+          <a:lstStyle/>
+          <a:p>
+            <a:pPr algn="ctr"/>
+          </a:p>
+        </p:txBody>
+      </p:sp>
+      <p:sp>
+        <p:nvSpPr>
+          <p:cNvPr id="4" name="TextBox 3"/>
+          <p:cNvSpPr txBox="1"/>
+          <p:nvPr/>
+        </p:nvSpPr>
+        <p:spPr>
+          <a:xfrm>
+            <a:off x="731520" y="1005840"/>
+            <a:ext cx="10058400" cy="914400"/>
+          </a:xfrm>
+          <a:prstGeom prst="rect">
+            <a:avLst/>
+          </a:prstGeom>
+          <a:noFill/>
+        </p:spPr>
+        <p:txBody>
+          <a:bodyPr wrap="square">
+            <a:spAutoFit/>
+          </a:bodyPr>
+          <a:lstStyle/>
+          <a:p>
+            <a:pPr algn="l">
+              <a:defRPr sz="4000" b="1">
+                <a:solidFill>
+                  <a:srgbClr val="FFFFFF"/>
+                </a:solidFill>
+                <a:latin typeface="Calibri"/>
+              </a:defRPr>
+            </a:pPr>
+            <a:r>
+              <a:t>Three Channels, One Engine</a:t>
+            </a:r>
+          </a:p>
+        </p:txBody>
+      </p:sp>
+      <p:sp>
+        <p:nvSpPr>
+          <p:cNvPr id="5" name="Rounded Rectangle 4"/>
+          <p:cNvSpPr/>
+          <p:nvPr/>
+        </p:nvSpPr>
+        <p:spPr>
+          <a:xfrm>
+            <a:off x="731520" y="2011680"/>
+            <a:ext cx="3383280" cy="3840480"/>
+          </a:xfrm>
+          <a:prstGeom prst="roundRect">
+            <a:avLst>
+              <a:gd name="adj" fmla="val 5000"/>
+            </a:avLst>
+          </a:prstGeom>
+          <a:solidFill>
+            <a:srgbClr val="111128"/>
+          </a:solidFill>
+          <a:ln>
+            <a:noFill/>
+          </a:ln>
+        </p:spPr>
+        <p:style>
+          <a:lnRef idx="1">
+            <a:schemeClr val="accent1"/>
+          </a:lnRef>
+          <a:fillRef idx="3">
+            <a:schemeClr val="accent1"/>
+          </a:fillRef>
+          <a:effectRef idx="2">
+            <a:schemeClr val="accent1"/>
+          </a:effectRef>
+          <a:fontRef idx="minor">
+            <a:schemeClr val="lt1"/>
+          </a:fontRef>
+        </p:style>
+        <p:txBody>
+          <a:bodyPr rtlCol="0" anchor="ctr"/>
+          <a:lstStyle/>
+          <a:p>
+            <a:pPr algn="ctr"/>
+          </a:p>
+        </p:txBody>
+      </p:sp>
+      <p:sp>
+        <p:nvSpPr>
+          <p:cNvPr id="6" name="Rectangle 5"/>
+          <p:cNvSpPr/>
+          <p:nvPr/>
+        </p:nvSpPr>
+        <p:spPr>
+          <a:xfrm>
+            <a:off x="731520" y="2011680"/>
+            <a:ext cx="3383280" cy="63500"/>
           </a:xfrm>
           <a:prstGeom prst="rect">
             <a:avLst/>
@@ -4570,14 +7557,14 @@
       </p:sp>
       <p:sp>
         <p:nvSpPr>
-          <p:cNvPr id="3" name="TextBox 2"/>
+          <p:cNvPr id="7" name="TextBox 6"/>
           <p:cNvSpPr txBox="1"/>
           <p:nvPr/>
         </p:nvSpPr>
         <p:spPr>
           <a:xfrm>
-            <a:off x="731520" y="731520"/>
-            <a:ext cx="9144000" cy="731520"/>
+            <a:off x="1005840" y="2377440"/>
+            <a:ext cx="2926080" cy="457200"/>
           </a:xfrm>
           <a:prstGeom prst="rect">
             <a:avLst/>
@@ -4591,35 +7578,81 @@
           <a:lstStyle/>
           <a:p>
             <a:pPr algn="l">
-              <a:defRPr sz="3600" b="1">
-                <a:solidFill>
-                  <a:srgbClr val="FFFFFF"/>
-                </a:solidFill>
-                <a:latin typeface="Calibri"/>
-              </a:defRPr>
-            </a:pPr>
-            <a:r>
-              <a:t>Three Channels, One Engine</a:t>
-            </a:r>
-          </a:p>
-        </p:txBody>
-      </p:sp>
-      <p:sp>
-        <p:nvSpPr>
-          <p:cNvPr id="4" name="Rectangle 3"/>
+              <a:defRPr sz="2200" b="1">
+                <a:solidFill>
+                  <a:srgbClr val="6C63FF"/>
+                </a:solidFill>
+                <a:latin typeface="Calibri"/>
+              </a:defRPr>
+            </a:pPr>
+            <a:r>
+              <a:t>💬  Chat</a:t>
+            </a:r>
+          </a:p>
+        </p:txBody>
+      </p:sp>
+      <p:sp>
+        <p:nvSpPr>
+          <p:cNvPr id="8" name="TextBox 7"/>
+          <p:cNvSpPr txBox="1"/>
+          <p:nvPr/>
+        </p:nvSpPr>
+        <p:spPr>
+          <a:xfrm>
+            <a:off x="1005840" y="3108960"/>
+            <a:ext cx="2926080" cy="2286000"/>
+          </a:xfrm>
+          <a:prstGeom prst="rect">
+            <a:avLst/>
+          </a:prstGeom>
+          <a:noFill/>
+        </p:spPr>
+        <p:txBody>
+          <a:bodyPr wrap="square">
+            <a:spAutoFit/>
+          </a:bodyPr>
+          <a:lstStyle/>
+          <a:p>
+            <a:pPr algn="l">
+              <a:defRPr sz="1400" b="0">
+                <a:solidFill>
+                  <a:srgbClr val="B0B0C8"/>
+                </a:solidFill>
+                <a:latin typeface="Calibri"/>
+              </a:defRPr>
+            </a:pPr>
+            <a:r>
+              <a:t>Live AI conversation with SSE streaming,</a:t>
+            </a:r>
+            <a:br/>
+            <a:r>
+              <a:t>RAG citations, session history, and</a:t>
+            </a:r>
+            <a:br/>
+            <a:r>
+              <a:t>per-mode message filtering.</a:t>
+            </a:r>
+          </a:p>
+        </p:txBody>
+      </p:sp>
+      <p:sp>
+        <p:nvSpPr>
+          <p:cNvPr id="9" name="Rounded Rectangle 8"/>
           <p:cNvSpPr/>
           <p:nvPr/>
         </p:nvSpPr>
         <p:spPr>
           <a:xfrm>
-            <a:off x="731520" y="2011680"/>
-            <a:ext cx="73152" cy="1097280"/>
-          </a:xfrm>
-          <a:prstGeom prst="rect">
-            <a:avLst/>
+            <a:off x="4480559" y="2011680"/>
+            <a:ext cx="3383280" cy="3840480"/>
+          </a:xfrm>
+          <a:prstGeom prst="roundRect">
+            <a:avLst>
+              <a:gd name="adj" fmla="val 5000"/>
+            </a:avLst>
           </a:prstGeom>
           <a:solidFill>
-            <a:srgbClr val="6C63FF"/>
+            <a:srgbClr val="111128"/>
           </a:solidFill>
           <a:ln>
             <a:noFill/>
@@ -4649,96 +7682,20 @@
       </p:sp>
       <p:sp>
         <p:nvSpPr>
-          <p:cNvPr id="5" name="TextBox 4"/>
-          <p:cNvSpPr txBox="1"/>
-          <p:nvPr/>
-        </p:nvSpPr>
-        <p:spPr>
-          <a:xfrm>
-            <a:off x="1097280" y="2011680"/>
-            <a:ext cx="2743200" cy="457200"/>
-          </a:xfrm>
-          <a:prstGeom prst="rect">
-            <a:avLst/>
-          </a:prstGeom>
-          <a:noFill/>
-        </p:spPr>
-        <p:txBody>
-          <a:bodyPr wrap="square">
-            <a:spAutoFit/>
-          </a:bodyPr>
-          <a:lstStyle/>
-          <a:p>
-            <a:pPr algn="l">
-              <a:defRPr sz="2400" b="1">
-                <a:solidFill>
-                  <a:srgbClr val="6C63FF"/>
-                </a:solidFill>
-                <a:latin typeface="Calibri"/>
-              </a:defRPr>
-            </a:pPr>
-            <a:r>
-              <a:t>Chat</a:t>
-            </a:r>
-          </a:p>
-        </p:txBody>
-      </p:sp>
-      <p:sp>
-        <p:nvSpPr>
-          <p:cNvPr id="6" name="TextBox 5"/>
-          <p:cNvSpPr txBox="1"/>
-          <p:nvPr/>
-        </p:nvSpPr>
-        <p:spPr>
-          <a:xfrm>
-            <a:off x="1097280" y="2468880"/>
-            <a:ext cx="9144000" cy="731520"/>
-          </a:xfrm>
-          <a:prstGeom prst="rect">
-            <a:avLst/>
-          </a:prstGeom>
-          <a:noFill/>
-        </p:spPr>
-        <p:txBody>
-          <a:bodyPr wrap="square">
-            <a:spAutoFit/>
-          </a:bodyPr>
-          <a:lstStyle/>
-          <a:p>
-            <a:pPr algn="l">
-              <a:defRPr sz="1600" b="0">
-                <a:solidFill>
-                  <a:srgbClr val="CCCCDD"/>
-                </a:solidFill>
-                <a:latin typeface="Calibri"/>
-              </a:defRPr>
-            </a:pPr>
-            <a:r>
-              <a:t>Live AI conversation with SSE streaming, RAG citations,</a:t>
-            </a:r>
-            <a:br/>
-            <a:r>
-              <a:t>fragmented history, and session management.</a:t>
-            </a:r>
-          </a:p>
-        </p:txBody>
-      </p:sp>
-      <p:sp>
-        <p:nvSpPr>
-          <p:cNvPr id="7" name="Rectangle 6"/>
+          <p:cNvPr id="10" name="Rectangle 9"/>
           <p:cNvSpPr/>
           <p:nvPr/>
         </p:nvSpPr>
         <p:spPr>
           <a:xfrm>
-            <a:off x="731520" y="3566160"/>
-            <a:ext cx="73152" cy="1097280"/>
+            <a:off x="4480559" y="2011680"/>
+            <a:ext cx="3383280" cy="63500"/>
           </a:xfrm>
           <a:prstGeom prst="rect">
             <a:avLst/>
           </a:prstGeom>
           <a:solidFill>
-            <a:srgbClr val="6C63FF"/>
+            <a:srgbClr val="00D4AA"/>
           </a:solidFill>
           <a:ln>
             <a:noFill/>
@@ -4768,14 +7725,14 @@
       </p:sp>
       <p:sp>
         <p:nvSpPr>
-          <p:cNvPr id="8" name="TextBox 7"/>
+          <p:cNvPr id="11" name="TextBox 10"/>
           <p:cNvSpPr txBox="1"/>
           <p:nvPr/>
         </p:nvSpPr>
         <p:spPr>
           <a:xfrm>
-            <a:off x="1097280" y="3566160"/>
-            <a:ext cx="2743200" cy="457200"/>
+            <a:off x="4754879" y="2377440"/>
+            <a:ext cx="2926080" cy="457200"/>
           </a:xfrm>
           <a:prstGeom prst="rect">
             <a:avLst/>
@@ -4789,29 +7746,29 @@
           <a:lstStyle/>
           <a:p>
             <a:pPr algn="l">
-              <a:defRPr sz="2400" b="1">
-                <a:solidFill>
-                  <a:srgbClr val="6C63FF"/>
-                </a:solidFill>
-                <a:latin typeface="Calibri"/>
-              </a:defRPr>
-            </a:pPr>
-            <a:r>
-              <a:t>Copilot</a:t>
-            </a:r>
-          </a:p>
-        </p:txBody>
-      </p:sp>
-      <p:sp>
-        <p:nvSpPr>
-          <p:cNvPr id="9" name="TextBox 8"/>
+              <a:defRPr sz="2200" b="1">
+                <a:solidFill>
+                  <a:srgbClr val="00D4AA"/>
+                </a:solidFill>
+                <a:latin typeface="Calibri"/>
+              </a:defRPr>
+            </a:pPr>
+            <a:r>
+              <a:t>🤝  Copilot</a:t>
+            </a:r>
+          </a:p>
+        </p:txBody>
+      </p:sp>
+      <p:sp>
+        <p:nvSpPr>
+          <p:cNvPr id="12" name="TextBox 11"/>
           <p:cNvSpPr txBox="1"/>
           <p:nvPr/>
         </p:nvSpPr>
         <p:spPr>
           <a:xfrm>
-            <a:off x="1097280" y="4023360"/>
-            <a:ext cx="9144000" cy="731520"/>
+            <a:off x="4754879" y="3108960"/>
+            <a:ext cx="2926080" cy="2286000"/>
           </a:xfrm>
           <a:prstGeom prst="rect">
             <a:avLst/>
@@ -4825,39 +7782,45 @@
           <a:lstStyle/>
           <a:p>
             <a:pPr algn="l">
-              <a:defRPr sz="1600" b="0">
-                <a:solidFill>
-                  <a:srgbClr val="CCCCDD"/>
-                </a:solidFill>
-                <a:latin typeface="Calibri"/>
-              </a:defRPr>
-            </a:pPr>
-            <a:r>
-              <a:t>Agent-assist mode — paste a customer transcript,</a:t>
+              <a:defRPr sz="1400" b="0">
+                <a:solidFill>
+                  <a:srgbClr val="B0B0C8"/>
+                </a:solidFill>
+                <a:latin typeface="Calibri"/>
+              </a:defRPr>
+            </a:pPr>
+            <a:r>
+              <a:t>Agent-assist mode — paste a customer</a:t>
             </a:r>
             <a:br/>
             <a:r>
-              <a:t>get an AI-suggested reply instantly.</a:t>
-            </a:r>
-          </a:p>
-        </p:txBody>
-      </p:sp>
-      <p:sp>
-        <p:nvSpPr>
-          <p:cNvPr id="10" name="Rectangle 9"/>
+              <a:t>transcript, get an AI-generated reply</a:t>
+            </a:r>
+            <a:br/>
+            <a:r>
+              <a:t>instantly.</a:t>
+            </a:r>
+          </a:p>
+        </p:txBody>
+      </p:sp>
+      <p:sp>
+        <p:nvSpPr>
+          <p:cNvPr id="13" name="Rounded Rectangle 12"/>
           <p:cNvSpPr/>
           <p:nvPr/>
         </p:nvSpPr>
         <p:spPr>
           <a:xfrm>
-            <a:off x="731520" y="5120640"/>
-            <a:ext cx="73152" cy="1097280"/>
-          </a:xfrm>
-          <a:prstGeom prst="rect">
-            <a:avLst/>
+            <a:off x="8229600" y="2011680"/>
+            <a:ext cx="3383280" cy="3840480"/>
+          </a:xfrm>
+          <a:prstGeom prst="roundRect">
+            <a:avLst>
+              <a:gd name="adj" fmla="val 5000"/>
+            </a:avLst>
           </a:prstGeom>
           <a:solidFill>
-            <a:srgbClr val="6C63FF"/>
+            <a:srgbClr val="111128"/>
           </a:solidFill>
           <a:ln>
             <a:noFill/>
@@ -4887,14 +7850,57 @@
       </p:sp>
       <p:sp>
         <p:nvSpPr>
-          <p:cNvPr id="11" name="TextBox 10"/>
+          <p:cNvPr id="14" name="Rectangle 13"/>
+          <p:cNvSpPr/>
+          <p:nvPr/>
+        </p:nvSpPr>
+        <p:spPr>
+          <a:xfrm>
+            <a:off x="8229600" y="2011680"/>
+            <a:ext cx="3383280" cy="63500"/>
+          </a:xfrm>
+          <a:prstGeom prst="rect">
+            <a:avLst/>
+          </a:prstGeom>
+          <a:solidFill>
+            <a:srgbClr val="FF6B6B"/>
+          </a:solidFill>
+          <a:ln>
+            <a:noFill/>
+          </a:ln>
+        </p:spPr>
+        <p:style>
+          <a:lnRef idx="1">
+            <a:schemeClr val="accent1"/>
+          </a:lnRef>
+          <a:fillRef idx="3">
+            <a:schemeClr val="accent1"/>
+          </a:fillRef>
+          <a:effectRef idx="2">
+            <a:schemeClr val="accent1"/>
+          </a:effectRef>
+          <a:fontRef idx="minor">
+            <a:schemeClr val="lt1"/>
+          </a:fontRef>
+        </p:style>
+        <p:txBody>
+          <a:bodyPr rtlCol="0" anchor="ctr"/>
+          <a:lstStyle/>
+          <a:p>
+            <a:pPr algn="ctr"/>
+          </a:p>
+        </p:txBody>
+      </p:sp>
+      <p:sp>
+        <p:nvSpPr>
+          <p:cNvPr id="15" name="TextBox 14"/>
           <p:cNvSpPr txBox="1"/>
           <p:nvPr/>
         </p:nvSpPr>
         <p:spPr>
           <a:xfrm>
-            <a:off x="1097280" y="5120640"/>
-            <a:ext cx="2743200" cy="457200"/>
+            <a:off x="8503920" y="2377440"/>
+            <a:ext cx="2926080" cy="457200"/>
           </a:xfrm>
           <a:prstGeom prst="rect">
             <a:avLst/>
@@ -4908,29 +7914,29 @@
           <a:lstStyle/>
           <a:p>
             <a:pPr algn="l">
-              <a:defRPr sz="2400" b="1">
-                <a:solidFill>
-                  <a:srgbClr val="6C63FF"/>
-                </a:solidFill>
-                <a:latin typeface="Calibri"/>
-              </a:defRPr>
-            </a:pPr>
-            <a:r>
-              <a:t>Voice</a:t>
-            </a:r>
-          </a:p>
-        </p:txBody>
-      </p:sp>
-      <p:sp>
-        <p:nvSpPr>
-          <p:cNvPr id="12" name="TextBox 11"/>
+              <a:defRPr sz="2200" b="1">
+                <a:solidFill>
+                  <a:srgbClr val="FF6B6B"/>
+                </a:solidFill>
+                <a:latin typeface="Calibri"/>
+              </a:defRPr>
+            </a:pPr>
+            <a:r>
+              <a:t>📞  Voice</a:t>
+            </a:r>
+          </a:p>
+        </p:txBody>
+      </p:sp>
+      <p:sp>
+        <p:nvSpPr>
+          <p:cNvPr id="16" name="TextBox 15"/>
           <p:cNvSpPr txBox="1"/>
           <p:nvPr/>
         </p:nvSpPr>
         <p:spPr>
           <a:xfrm>
-            <a:off x="1097280" y="5577840"/>
-            <a:ext cx="9144000" cy="731520"/>
+            <a:off x="8503920" y="3108960"/>
+            <a:ext cx="2926080" cy="2286000"/>
           </a:xfrm>
           <a:prstGeom prst="rect">
             <a:avLst/>
@@ -4944,19 +7950,59 @@
           <a:lstStyle/>
           <a:p>
             <a:pPr algn="l">
-              <a:defRPr sz="1600" b="0">
-                <a:solidFill>
-                  <a:srgbClr val="CCCCDD"/>
-                </a:solidFill>
-                <a:latin typeface="Calibri"/>
-              </a:defRPr>
-            </a:pPr>
-            <a:r>
-              <a:t>PSTN telephony via Twilio, Amazon Connect, or any</a:t>
+              <a:defRPr sz="1400" b="0">
+                <a:solidFill>
+                  <a:srgbClr val="B0B0C8"/>
+                </a:solidFill>
+                <a:latin typeface="Calibri"/>
+              </a:defRPr>
+            </a:pPr>
+            <a:r>
+              <a:t>PSTN telephony via Twilio, Amazon</a:t>
             </a:r>
             <a:br/>
             <a:r>
-              <a:t>SIP/CCaaS. Live STT → AI → TTS pipeline.</a:t>
+              <a:t>Connect, or any SIP trunk. Live</a:t>
+            </a:r>
+            <a:br/>
+            <a:r>
+              <a:t>STT → AI → TTS pipeline.</a:t>
+            </a:r>
+          </a:p>
+        </p:txBody>
+      </p:sp>
+      <p:sp>
+        <p:nvSpPr>
+          <p:cNvPr id="17" name="TextBox 16"/>
+          <p:cNvSpPr txBox="1"/>
+          <p:nvPr/>
+        </p:nvSpPr>
+        <p:spPr>
+          <a:xfrm>
+            <a:off x="10972800" y="6400800"/>
+            <a:ext cx="914400" cy="274320"/>
+          </a:xfrm>
+          <a:prstGeom prst="rect">
+            <a:avLst/>
+          </a:prstGeom>
+          <a:noFill/>
+        </p:spPr>
+        <p:txBody>
+          <a:bodyPr wrap="square">
+            <a:spAutoFit/>
+          </a:bodyPr>
+          <a:lstStyle/>
+          <a:p>
+            <a:pPr algn="r">
+              <a:defRPr sz="1000" b="0">
+                <a:solidFill>
+                  <a:srgbClr val="6B6B8A"/>
+                </a:solidFill>
+                <a:latin typeface="Calibri"/>
+              </a:defRPr>
+            </a:pPr>
+            <a:r>
+              <a:t>03 / 16</a:t>
             </a:r>
           </a:p>
         </p:txBody>
@@ -4975,7 +8021,7 @@
     <p:bg>
       <p:bgPr>
         <a:solidFill>
-          <a:srgbClr val="1E1E2E"/>
+          <a:srgbClr val="0B0B1A"/>
         </a:solidFill>
         <a:effectLst/>
       </p:bgPr>
@@ -4989,16 +8035,174 @@
       <p:grpSpPr/>
       <p:sp>
         <p:nvSpPr>
-          <p:cNvPr id="2" name="Rectangle 1"/>
+          <p:cNvPr id="2" name="TextBox 1"/>
+          <p:cNvSpPr txBox="1"/>
+          <p:nvPr/>
+        </p:nvSpPr>
+        <p:spPr>
+          <a:xfrm>
+            <a:off x="731520" y="274320"/>
+            <a:ext cx="5486400" cy="365760"/>
+          </a:xfrm>
+          <a:prstGeom prst="rect">
+            <a:avLst/>
+          </a:prstGeom>
+          <a:noFill/>
+        </p:spPr>
+        <p:txBody>
+          <a:bodyPr wrap="square">
+            <a:spAutoFit/>
+          </a:bodyPr>
+          <a:lstStyle/>
+          <a:p>
+            <a:pPr algn="l">
+              <a:defRPr sz="1200" b="1">
+                <a:solidFill>
+                  <a:srgbClr val="00D4AA"/>
+                </a:solidFill>
+                <a:latin typeface="Calibri"/>
+              </a:defRPr>
+            </a:pPr>
+            <a:r>
+              <a:t>SYSTEM DESIGN</a:t>
+            </a:r>
+          </a:p>
+        </p:txBody>
+      </p:sp>
+      <p:sp>
+        <p:nvSpPr>
+          <p:cNvPr id="3" name="Rectangle 2"/>
           <p:cNvSpPr/>
           <p:nvPr/>
         </p:nvSpPr>
         <p:spPr>
           <a:xfrm>
-            <a:off x="731520" y="548640"/>
-            <a:ext cx="3657600" cy="50800"/>
-          </a:xfrm>
-          <a:prstGeom prst="rect">
+            <a:off x="731520" y="640080"/>
+            <a:ext cx="1097280" cy="50800"/>
+          </a:xfrm>
+          <a:prstGeom prst="rect">
+            <a:avLst/>
+          </a:prstGeom>
+          <a:solidFill>
+            <a:srgbClr val="00D4AA"/>
+          </a:solidFill>
+          <a:ln>
+            <a:noFill/>
+          </a:ln>
+        </p:spPr>
+        <p:style>
+          <a:lnRef idx="1">
+            <a:schemeClr val="accent1"/>
+          </a:lnRef>
+          <a:fillRef idx="3">
+            <a:schemeClr val="accent1"/>
+          </a:fillRef>
+          <a:effectRef idx="2">
+            <a:schemeClr val="accent1"/>
+          </a:effectRef>
+          <a:fontRef idx="minor">
+            <a:schemeClr val="lt1"/>
+          </a:fontRef>
+        </p:style>
+        <p:txBody>
+          <a:bodyPr rtlCol="0" anchor="ctr"/>
+          <a:lstStyle/>
+          <a:p>
+            <a:pPr algn="ctr"/>
+          </a:p>
+        </p:txBody>
+      </p:sp>
+      <p:sp>
+        <p:nvSpPr>
+          <p:cNvPr id="4" name="TextBox 3"/>
+          <p:cNvSpPr txBox="1"/>
+          <p:nvPr/>
+        </p:nvSpPr>
+        <p:spPr>
+          <a:xfrm>
+            <a:off x="731520" y="1005840"/>
+            <a:ext cx="10058400" cy="914400"/>
+          </a:xfrm>
+          <a:prstGeom prst="rect">
+            <a:avLst/>
+          </a:prstGeom>
+          <a:noFill/>
+        </p:spPr>
+        <p:txBody>
+          <a:bodyPr wrap="square">
+            <a:spAutoFit/>
+          </a:bodyPr>
+          <a:lstStyle/>
+          <a:p>
+            <a:pPr algn="l">
+              <a:defRPr sz="4000" b="1">
+                <a:solidFill>
+                  <a:srgbClr val="FFFFFF"/>
+                </a:solidFill>
+                <a:latin typeface="Calibri"/>
+              </a:defRPr>
+            </a:pPr>
+            <a:r>
+              <a:t>Architecture</a:t>
+            </a:r>
+          </a:p>
+        </p:txBody>
+      </p:sp>
+      <p:sp>
+        <p:nvSpPr>
+          <p:cNvPr id="5" name="Oval 4"/>
+          <p:cNvSpPr/>
+          <p:nvPr/>
+        </p:nvSpPr>
+        <p:spPr>
+          <a:xfrm>
+            <a:off x="10058400" y="4572000"/>
+            <a:ext cx="1828800" cy="1828800"/>
+          </a:xfrm>
+          <a:prstGeom prst="ellipse">
+            <a:avLst/>
+          </a:prstGeom>
+          <a:solidFill>
+            <a:srgbClr val="00D4AA"/>
+          </a:solidFill>
+          <a:ln>
+            <a:noFill/>
+          </a:ln>
+        </p:spPr>
+        <p:style>
+          <a:lnRef idx="1">
+            <a:schemeClr val="accent1"/>
+          </a:lnRef>
+          <a:fillRef idx="3">
+            <a:schemeClr val="accent1"/>
+          </a:fillRef>
+          <a:effectRef idx="2">
+            <a:schemeClr val="accent1"/>
+          </a:effectRef>
+          <a:fontRef idx="minor">
+            <a:schemeClr val="lt1"/>
+          </a:fontRef>
+        </p:style>
+        <p:txBody>
+          <a:bodyPr rtlCol="0" anchor="ctr"/>
+          <a:lstStyle/>
+          <a:p>
+            <a:pPr algn="ctr"/>
+          </a:p>
+        </p:txBody>
+      </p:sp>
+      <p:sp>
+        <p:nvSpPr>
+          <p:cNvPr id="6" name="Oval 5"/>
+          <p:cNvSpPr/>
+          <p:nvPr/>
+        </p:nvSpPr>
+        <p:spPr>
+          <a:xfrm>
+            <a:off x="-457200" y="-457200"/>
+            <a:ext cx="1371600" cy="1371600"/>
+          </a:xfrm>
+          <a:prstGeom prst="ellipse">
             <a:avLst/>
           </a:prstGeom>
           <a:solidFill>
@@ -5032,14 +8236,14 @@
       </p:sp>
       <p:sp>
         <p:nvSpPr>
-          <p:cNvPr id="3" name="TextBox 2"/>
+          <p:cNvPr id="7" name="TextBox 6"/>
           <p:cNvSpPr txBox="1"/>
           <p:nvPr/>
         </p:nvSpPr>
         <p:spPr>
           <a:xfrm>
-            <a:off x="731520" y="731520"/>
-            <a:ext cx="9144000" cy="731520"/>
+            <a:off x="731520" y="2011680"/>
+            <a:ext cx="10515600" cy="4114800"/>
           </a:xfrm>
           <a:prstGeom prst="rect">
             <a:avLst/>
@@ -5052,30 +8256,203 @@
           </a:bodyPr>
           <a:lstStyle/>
           <a:p>
-            <a:pPr algn="l">
-              <a:defRPr sz="3600" b="1">
-                <a:solidFill>
-                  <a:srgbClr val="FFFFFF"/>
-                </a:solidFill>
-                <a:latin typeface="Calibri"/>
-              </a:defRPr>
-            </a:pPr>
-            <a:r>
-              <a:t>Architecture</a:t>
-            </a:r>
-          </a:p>
-        </p:txBody>
-      </p:sp>
-      <p:sp>
-        <p:nvSpPr>
-          <p:cNvPr id="4" name="TextBox 3"/>
+            <a:pPr>
+              <a:spcAft>
+                <a:spcPts val="400"/>
+              </a:spcAft>
+              <a:defRPr sz="1500">
+                <a:solidFill>
+                  <a:srgbClr val="B0B0C8"/>
+                </a:solidFill>
+                <a:latin typeface="Calibri"/>
+              </a:defRPr>
+            </a:pPr>
+            <a:r>
+              <a:t>User / Console  ──→  REST API  ──→  Orchestrator</a:t>
+            </a:r>
+          </a:p>
+          <a:p>
+            <a:pPr>
+              <a:spcAft>
+                <a:spcPts val="400"/>
+              </a:spcAft>
+              <a:defRPr sz="1500">
+                <a:solidFill>
+                  <a:srgbClr val="B0B0C8"/>
+                </a:solidFill>
+                <a:latin typeface="Calibri"/>
+              </a:defRPr>
+            </a:pPr>
+          </a:p>
+          <a:p>
+            <a:pPr>
+              <a:spcAft>
+                <a:spcPts val="400"/>
+              </a:spcAft>
+              <a:defRPr sz="1500">
+                <a:solidFill>
+                  <a:srgbClr val="B0B0C8"/>
+                </a:solidFill>
+                <a:latin typeface="Calibri"/>
+              </a:defRPr>
+            </a:pPr>
+            <a:r>
+              <a:t>  │  Session Manager — create, load, persist</a:t>
+            </a:r>
+          </a:p>
+          <a:p>
+            <a:pPr>
+              <a:spcAft>
+                <a:spcPts val="400"/>
+              </a:spcAft>
+              <a:defRPr sz="1500">
+                <a:solidFill>
+                  <a:srgbClr val="B0B0C8"/>
+                </a:solidFill>
+                <a:latin typeface="Calibri"/>
+              </a:defRPr>
+            </a:pPr>
+            <a:r>
+              <a:t>  │  Prompt Builder — system prompt + history + context</a:t>
+            </a:r>
+          </a:p>
+          <a:p>
+            <a:pPr>
+              <a:spcAft>
+                <a:spcPts val="400"/>
+              </a:spcAft>
+              <a:defRPr sz="1500">
+                <a:solidFill>
+                  <a:srgbClr val="B0B0C8"/>
+                </a:solidFill>
+                <a:latin typeface="Calibri"/>
+              </a:defRPr>
+            </a:pPr>
+            <a:r>
+              <a:t>  │  Agent Router — model &amp; agent selection</a:t>
+            </a:r>
+          </a:p>
+          <a:p>
+            <a:pPr>
+              <a:spcAft>
+                <a:spcPts val="400"/>
+              </a:spcAft>
+              <a:defRPr sz="1500">
+                <a:solidFill>
+                  <a:srgbClr val="B0B0C8"/>
+                </a:solidFill>
+                <a:latin typeface="Calibri"/>
+              </a:defRPr>
+            </a:pPr>
+            <a:r>
+              <a:t>  │</a:t>
+            </a:r>
+          </a:p>
+          <a:p>
+            <a:pPr>
+              <a:spcAft>
+                <a:spcPts val="400"/>
+              </a:spcAft>
+              <a:defRPr sz="1500">
+                <a:solidFill>
+                  <a:srgbClr val="B0B0C8"/>
+                </a:solidFill>
+                <a:latin typeface="Calibri"/>
+              </a:defRPr>
+            </a:pPr>
+            <a:r>
+              <a:t>  ├──→  RAG Engine  —  vector retrieval + citations</a:t>
+            </a:r>
+          </a:p>
+          <a:p>
+            <a:pPr>
+              <a:spcAft>
+                <a:spcPts val="400"/>
+              </a:spcAft>
+              <a:defRPr sz="1500">
+                <a:solidFill>
+                  <a:srgbClr val="B0B0C8"/>
+                </a:solidFill>
+                <a:latin typeface="Calibri"/>
+              </a:defRPr>
+            </a:pPr>
+            <a:r>
+              <a:t>  ├──→  LLM Layer  —  OpenAI · Anthropic · Gemini · Mock</a:t>
+            </a:r>
+          </a:p>
+          <a:p>
+            <a:pPr>
+              <a:spcAft>
+                <a:spcPts val="400"/>
+              </a:spcAft>
+              <a:defRPr sz="1500">
+                <a:solidFill>
+                  <a:srgbClr val="B0B0C8"/>
+                </a:solidFill>
+                <a:latin typeface="Calibri"/>
+              </a:defRPr>
+            </a:pPr>
+            <a:r>
+              <a:t>  └──→  SSE Stream  ──→  Console UI</a:t>
+            </a:r>
+          </a:p>
+          <a:p>
+            <a:pPr>
+              <a:spcAft>
+                <a:spcPts val="400"/>
+              </a:spcAft>
+              <a:defRPr sz="1500">
+                <a:solidFill>
+                  <a:srgbClr val="B0B0C8"/>
+                </a:solidFill>
+                <a:latin typeface="Calibri"/>
+              </a:defRPr>
+            </a:pPr>
+          </a:p>
+          <a:p>
+            <a:pPr>
+              <a:spcAft>
+                <a:spcPts val="400"/>
+              </a:spcAft>
+              <a:defRPr sz="1500">
+                <a:solidFill>
+                  <a:srgbClr val="B0B0C8"/>
+                </a:solidFill>
+                <a:latin typeface="Calibri"/>
+              </a:defRPr>
+            </a:pPr>
+            <a:r>
+              <a:t>Services:  Feedback Engine  ·  Vault (AES-256-GCM)  ·  iPaaS Webhooks</a:t>
+            </a:r>
+          </a:p>
+          <a:p>
+            <a:pPr>
+              <a:spcAft>
+                <a:spcPts val="400"/>
+              </a:spcAft>
+              <a:defRPr sz="1500">
+                <a:solidFill>
+                  <a:srgbClr val="B0B0C8"/>
+                </a:solidFill>
+                <a:latin typeface="Calibri"/>
+              </a:defRPr>
+            </a:pPr>
+            <a:r>
+              <a:t>Infra:    Twilio  ·  Redis  ·  PostgreSQL  ·  Docker</a:t>
+            </a:r>
+          </a:p>
+        </p:txBody>
+      </p:sp>
+      <p:sp>
+        <p:nvSpPr>
+          <p:cNvPr id="8" name="TextBox 7"/>
           <p:cNvSpPr txBox="1"/>
           <p:nvPr/>
         </p:nvSpPr>
         <p:spPr>
           <a:xfrm>
-            <a:off x="731520" y="1828800"/>
-            <a:ext cx="10058400" cy="4114800"/>
+            <a:off x="10972800" y="6400800"/>
+            <a:ext cx="914400" cy="274320"/>
           </a:xfrm>
           <a:prstGeom prst="rect">
             <a:avLst/>
@@ -5088,128 +8465,16 @@
           </a:bodyPr>
           <a:lstStyle/>
           <a:p>
-            <a:pPr>
-              <a:spcAft>
-                <a:spcPts val="800"/>
-              </a:spcAft>
-              <a:defRPr sz="1800">
-                <a:solidFill>
-                  <a:srgbClr val="CCCCDD"/>
-                </a:solidFill>
-                <a:latin typeface="Calibri"/>
-              </a:defRPr>
-            </a:pPr>
-            <a:r>
-              <a:t>User → REST API → Orchestrator</a:t>
-            </a:r>
-          </a:p>
-          <a:p>
-            <a:pPr>
-              <a:spcAft>
-                <a:spcPts val="800"/>
-              </a:spcAft>
-              <a:defRPr sz="1800">
-                <a:solidFill>
-                  <a:srgbClr val="CCCCDD"/>
-                </a:solidFill>
-                <a:latin typeface="Calibri"/>
-              </a:defRPr>
-            </a:pPr>
-            <a:r>
-              <a:t>  ├─ Session Manager (create / load / save)</a:t>
-            </a:r>
-          </a:p>
-          <a:p>
-            <a:pPr>
-              <a:spcAft>
-                <a:spcPts val="800"/>
-              </a:spcAft>
-              <a:defRPr sz="1800">
-                <a:solidFill>
-                  <a:srgbClr val="CCCCDD"/>
-                </a:solidFill>
-                <a:latin typeface="Calibri"/>
-              </a:defRPr>
-            </a:pPr>
-            <a:r>
-              <a:t>  ├─ RAG Engine (vector retrieval + citations)</a:t>
-            </a:r>
-          </a:p>
-          <a:p>
-            <a:pPr>
-              <a:spcAft>
-                <a:spcPts val="800"/>
-              </a:spcAft>
-              <a:defRPr sz="1800">
-                <a:solidFill>
-                  <a:srgbClr val="CCCCDD"/>
-                </a:solidFill>
-                <a:latin typeface="Calibri"/>
-              </a:defRPr>
-            </a:pPr>
-            <a:r>
-              <a:t>  ├─ Prompt Builder (system prompt + history + context)</a:t>
-            </a:r>
-          </a:p>
-          <a:p>
-            <a:pPr>
-              <a:spcAft>
-                <a:spcPts val="800"/>
-              </a:spcAft>
-              <a:defRPr sz="1800">
-                <a:solidFill>
-                  <a:srgbClr val="CCCCDD"/>
-                </a:solidFill>
-                <a:latin typeface="Calibri"/>
-              </a:defRPr>
-            </a:pPr>
-            <a:r>
-              <a:t>  ├─ LLM Provider (OpenAI, Anthropic, Gemini, Mock)</a:t>
-            </a:r>
-          </a:p>
-          <a:p>
-            <a:pPr>
-              <a:spcAft>
-                <a:spcPts val="800"/>
-              </a:spcAft>
-              <a:defRPr sz="1800">
-                <a:solidFill>
-                  <a:srgbClr val="CCCCDD"/>
-                </a:solidFill>
-                <a:latin typeface="Calibri"/>
-              </a:defRPr>
-            </a:pPr>
-            <a:r>
-              <a:t>  └─ SSE Streaming Response → Console</a:t>
-            </a:r>
-          </a:p>
-          <a:p>
-            <a:pPr>
-              <a:spcAft>
-                <a:spcPts val="800"/>
-              </a:spcAft>
-              <a:defRPr sz="1800">
-                <a:solidFill>
-                  <a:srgbClr val="CCCCDD"/>
-                </a:solidFill>
-                <a:latin typeface="Calibri"/>
-              </a:defRPr>
-            </a:pPr>
-          </a:p>
-          <a:p>
-            <a:pPr>
-              <a:spcAft>
-                <a:spcPts val="800"/>
-              </a:spcAft>
-              <a:defRPr sz="1800">
-                <a:solidFill>
-                  <a:srgbClr val="CCCCDD"/>
-                </a:solidFill>
-                <a:latin typeface="Calibri"/>
-              </a:defRPr>
-            </a:pPr>
-            <a:r>
-              <a:t>Layered design: Routers → Orchestrator → Services → Providers → Infrastructure</a:t>
+            <a:pPr algn="r">
+              <a:defRPr sz="1000" b="0">
+                <a:solidFill>
+                  <a:srgbClr val="6B6B8A"/>
+                </a:solidFill>
+                <a:latin typeface="Calibri"/>
+              </a:defRPr>
+            </a:pPr>
+            <a:r>
+              <a:t>04 / 16</a:t>
             </a:r>
           </a:p>
         </p:txBody>
@@ -5228,7 +8493,7 @@
     <p:bg>
       <p:bgPr>
         <a:solidFill>
-          <a:srgbClr val="1E1E2E"/>
+          <a:srgbClr val="0B0B1A"/>
         </a:solidFill>
         <a:effectLst/>
       </p:bgPr>
@@ -5242,20 +8507,56 @@
       <p:grpSpPr/>
       <p:sp>
         <p:nvSpPr>
-          <p:cNvPr id="2" name="Rectangle 1"/>
+          <p:cNvPr id="2" name="TextBox 1"/>
+          <p:cNvSpPr txBox="1"/>
+          <p:nvPr/>
+        </p:nvSpPr>
+        <p:spPr>
+          <a:xfrm>
+            <a:off x="731520" y="274320"/>
+            <a:ext cx="5486400" cy="365760"/>
+          </a:xfrm>
+          <a:prstGeom prst="rect">
+            <a:avLst/>
+          </a:prstGeom>
+          <a:noFill/>
+        </p:spPr>
+        <p:txBody>
+          <a:bodyPr wrap="square">
+            <a:spAutoFit/>
+          </a:bodyPr>
+          <a:lstStyle/>
+          <a:p>
+            <a:pPr algn="l">
+              <a:defRPr sz="1200" b="1">
+                <a:solidFill>
+                  <a:srgbClr val="00D4AA"/>
+                </a:solidFill>
+                <a:latin typeface="Calibri"/>
+              </a:defRPr>
+            </a:pPr>
+            <a:r>
+              <a:t>LLM LAYER</a:t>
+            </a:r>
+          </a:p>
+        </p:txBody>
+      </p:sp>
+      <p:sp>
+        <p:nvSpPr>
+          <p:cNvPr id="3" name="Rectangle 2"/>
           <p:cNvSpPr/>
           <p:nvPr/>
         </p:nvSpPr>
         <p:spPr>
           <a:xfrm>
-            <a:off x="731520" y="548640"/>
-            <a:ext cx="3657600" cy="50800"/>
+            <a:off x="731520" y="640080"/>
+            <a:ext cx="1097280" cy="50800"/>
           </a:xfrm>
           <a:prstGeom prst="rect">
             <a:avLst/>
           </a:prstGeom>
           <a:solidFill>
-            <a:srgbClr val="6C63FF"/>
+            <a:srgbClr val="00D4AA"/>
           </a:solidFill>
           <a:ln>
             <a:noFill/>
@@ -5285,14 +8586,14 @@
       </p:sp>
       <p:sp>
         <p:nvSpPr>
-          <p:cNvPr id="3" name="TextBox 2"/>
+          <p:cNvPr id="4" name="TextBox 3"/>
           <p:cNvSpPr txBox="1"/>
           <p:nvPr/>
         </p:nvSpPr>
         <p:spPr>
           <a:xfrm>
-            <a:off x="731520" y="731520"/>
-            <a:ext cx="9144000" cy="731520"/>
+            <a:off x="731520" y="1005840"/>
+            <a:ext cx="10058400" cy="914400"/>
           </a:xfrm>
           <a:prstGeom prst="rect">
             <a:avLst/>
@@ -5306,7 +8607,7 @@
           <a:lstStyle/>
           <a:p>
             <a:pPr algn="l">
-              <a:defRPr sz="3600" b="1">
+              <a:defRPr sz="4000" b="1">
                 <a:solidFill>
                   <a:srgbClr val="FFFFFF"/>
                 </a:solidFill>
@@ -5321,13 +8622,56 @@
       </p:sp>
       <p:sp>
         <p:nvSpPr>
-          <p:cNvPr id="4" name="TextBox 3"/>
+          <p:cNvPr id="5" name="Oval 4"/>
+          <p:cNvSpPr/>
+          <p:nvPr/>
+        </p:nvSpPr>
+        <p:spPr>
+          <a:xfrm>
+            <a:off x="9601200" y="1371600"/>
+            <a:ext cx="1645920" cy="1645920"/>
+          </a:xfrm>
+          <a:prstGeom prst="ellipse">
+            <a:avLst/>
+          </a:prstGeom>
+          <a:solidFill>
+            <a:srgbClr val="FF6B6B"/>
+          </a:solidFill>
+          <a:ln>
+            <a:noFill/>
+          </a:ln>
+        </p:spPr>
+        <p:style>
+          <a:lnRef idx="1">
+            <a:schemeClr val="accent1"/>
+          </a:lnRef>
+          <a:fillRef idx="3">
+            <a:schemeClr val="accent1"/>
+          </a:fillRef>
+          <a:effectRef idx="2">
+            <a:schemeClr val="accent1"/>
+          </a:effectRef>
+          <a:fontRef idx="minor">
+            <a:schemeClr val="lt1"/>
+          </a:fontRef>
+        </p:style>
+        <p:txBody>
+          <a:bodyPr rtlCol="0" anchor="ctr"/>
+          <a:lstStyle/>
+          <a:p>
+            <a:pPr algn="ctr"/>
+          </a:p>
+        </p:txBody>
+      </p:sp>
+      <p:sp>
+        <p:nvSpPr>
+          <p:cNvPr id="6" name="TextBox 5"/>
           <p:cNvSpPr txBox="1"/>
           <p:nvPr/>
         </p:nvSpPr>
         <p:spPr>
           <a:xfrm>
-            <a:off x="731520" y="1828800"/>
+            <a:off x="731520" y="2011680"/>
             <a:ext cx="10058400" cy="3657600"/>
           </a:xfrm>
           <a:prstGeom prst="rect">
@@ -5343,11 +8687,11 @@
           <a:p>
             <a:pPr>
               <a:spcAft>
-                <a:spcPts val="800"/>
+                <a:spcPts val="1000"/>
               </a:spcAft>
-              <a:defRPr sz="1800">
-                <a:solidFill>
-                  <a:srgbClr val="CCCCDD"/>
+              <a:defRPr sz="1700">
+                <a:solidFill>
+                  <a:srgbClr val="B0B0C8"/>
                 </a:solidFill>
                 <a:latin typeface="Calibri"/>
               </a:defRPr>
@@ -5359,81 +8703,117 @@
           <a:p>
             <a:pPr>
               <a:spcAft>
-                <a:spcPts val="800"/>
+                <a:spcPts val="1000"/>
               </a:spcAft>
-              <a:defRPr sz="1800">
-                <a:solidFill>
-                  <a:srgbClr val="CCCCDD"/>
-                </a:solidFill>
-                <a:latin typeface="Calibri"/>
-              </a:defRPr>
-            </a:pPr>
-            <a:r>
-              <a:t>Anthropic Claude 3.5 — via anthropic_provider.py</a:t>
+              <a:defRPr sz="1700">
+                <a:solidFill>
+                  <a:srgbClr val="B0B0C8"/>
+                </a:solidFill>
+                <a:latin typeface="Calibri"/>
+              </a:defRPr>
+            </a:pPr>
+            <a:r>
+              <a:t>Anthropic Claude 3.5 — Sonnet &amp; Haiku</a:t>
             </a:r>
           </a:p>
           <a:p>
             <a:pPr>
               <a:spcAft>
-                <a:spcPts val="800"/>
+                <a:spcPts val="1000"/>
               </a:spcAft>
-              <a:defRPr sz="1800">
-                <a:solidFill>
-                  <a:srgbClr val="CCCCDD"/>
-                </a:solidFill>
-                <a:latin typeface="Calibri"/>
-              </a:defRPr>
-            </a:pPr>
-            <a:r>
-              <a:t>Google Gemini 2.0 Flash — via gemini_provider.py</a:t>
+              <a:defRPr sz="1700">
+                <a:solidFill>
+                  <a:srgbClr val="B0B0C8"/>
+                </a:solidFill>
+                <a:latin typeface="Calibri"/>
+              </a:defRPr>
+            </a:pPr>
+            <a:r>
+              <a:t>Google Gemini 2.0 Flash — via gemini_provider</a:t>
             </a:r>
           </a:p>
           <a:p>
             <a:pPr>
               <a:spcAft>
-                <a:spcPts val="800"/>
+                <a:spcPts val="1000"/>
               </a:spcAft>
-              <a:defRPr sz="1800">
-                <a:solidFill>
-                  <a:srgbClr val="CCCCDD"/>
-                </a:solidFill>
-                <a:latin typeface="Calibri"/>
-              </a:defRPr>
-            </a:pPr>
-            <a:r>
-              <a:t>Mock LLM — built-in fallback (no API key needed for dev)</a:t>
+              <a:defRPr sz="1700">
+                <a:solidFill>
+                  <a:srgbClr val="B0B0C8"/>
+                </a:solidFill>
+                <a:latin typeface="Calibri"/>
+              </a:defRPr>
+            </a:pPr>
+            <a:r>
+              <a:t>Built-in Mock LLM — full dev parity, no API key needed</a:t>
             </a:r>
           </a:p>
           <a:p>
             <a:pPr>
               <a:spcAft>
-                <a:spcPts val="800"/>
+                <a:spcPts val="1000"/>
               </a:spcAft>
-              <a:defRPr sz="1800">
-                <a:solidFill>
-                  <a:srgbClr val="CCCCDD"/>
-                </a:solidFill>
-                <a:latin typeface="Calibri"/>
-              </a:defRPr>
-            </a:pPr>
-            <a:r>
-              <a:t>Per-agent model configuration via YAML agent definitions</a:t>
+              <a:defRPr sz="1700">
+                <a:solidFill>
+                  <a:srgbClr val="B0B0C8"/>
+                </a:solidFill>
+                <a:latin typeface="Calibri"/>
+              </a:defRPr>
+            </a:pPr>
+            <a:r>
+              <a:t>Per-agent model config in YAML — switch at deploy time</a:t>
             </a:r>
           </a:p>
           <a:p>
             <a:pPr>
               <a:spcAft>
-                <a:spcPts val="800"/>
+                <a:spcPts val="1000"/>
               </a:spcAft>
-              <a:defRPr sz="1800">
-                <a:solidFill>
-                  <a:srgbClr val="CCCCDD"/>
-                </a:solidFill>
-                <a:latin typeface="Calibri"/>
-              </a:defRPr>
-            </a:pPr>
-            <a:r>
-              <a:t>Switch models without code changes — config-driven</a:t>
+              <a:defRPr sz="1700">
+                <a:solidFill>
+                  <a:srgbClr val="B0B0C8"/>
+                </a:solidFill>
+                <a:latin typeface="Calibri"/>
+              </a:defRPr>
+            </a:pPr>
+            <a:r>
+              <a:t>Pluggable provider interface — add any LLM in one file</a:t>
+            </a:r>
+          </a:p>
+        </p:txBody>
+      </p:sp>
+      <p:sp>
+        <p:nvSpPr>
+          <p:cNvPr id="7" name="TextBox 6"/>
+          <p:cNvSpPr txBox="1"/>
+          <p:nvPr/>
+        </p:nvSpPr>
+        <p:spPr>
+          <a:xfrm>
+            <a:off x="10972800" y="6400800"/>
+            <a:ext cx="914400" cy="274320"/>
+          </a:xfrm>
+          <a:prstGeom prst="rect">
+            <a:avLst/>
+          </a:prstGeom>
+          <a:noFill/>
+        </p:spPr>
+        <p:txBody>
+          <a:bodyPr wrap="square">
+            <a:spAutoFit/>
+          </a:bodyPr>
+          <a:lstStyle/>
+          <a:p>
+            <a:pPr algn="r">
+              <a:defRPr sz="1000" b="0">
+                <a:solidFill>
+                  <a:srgbClr val="6B6B8A"/>
+                </a:solidFill>
+                <a:latin typeface="Calibri"/>
+              </a:defRPr>
+            </a:pPr>
+            <a:r>
+              <a:t>05 / 16</a:t>
             </a:r>
           </a:p>
         </p:txBody>
@@ -5452,7 +8832,7 @@
     <p:bg>
       <p:bgPr>
         <a:solidFill>
-          <a:srgbClr val="1E1E2E"/>
+          <a:srgbClr val="0B0B1A"/>
         </a:solidFill>
         <a:effectLst/>
       </p:bgPr>
@@ -5466,20 +8846,56 @@
       <p:grpSpPr/>
       <p:sp>
         <p:nvSpPr>
-          <p:cNvPr id="2" name="Rectangle 1"/>
+          <p:cNvPr id="2" name="TextBox 1"/>
+          <p:cNvSpPr txBox="1"/>
+          <p:nvPr/>
+        </p:nvSpPr>
+        <p:spPr>
+          <a:xfrm>
+            <a:off x="731520" y="274320"/>
+            <a:ext cx="5486400" cy="365760"/>
+          </a:xfrm>
+          <a:prstGeom prst="rect">
+            <a:avLst/>
+          </a:prstGeom>
+          <a:noFill/>
+        </p:spPr>
+        <p:txBody>
+          <a:bodyPr wrap="square">
+            <a:spAutoFit/>
+          </a:bodyPr>
+          <a:lstStyle/>
+          <a:p>
+            <a:pPr algn="l">
+              <a:defRPr sz="1200" b="1">
+                <a:solidFill>
+                  <a:srgbClr val="00D4AA"/>
+                </a:solidFill>
+                <a:latin typeface="Calibri"/>
+              </a:defRPr>
+            </a:pPr>
+            <a:r>
+              <a:t>KNOWLEDGE</a:t>
+            </a:r>
+          </a:p>
+        </p:txBody>
+      </p:sp>
+      <p:sp>
+        <p:nvSpPr>
+          <p:cNvPr id="3" name="Rectangle 2"/>
           <p:cNvSpPr/>
           <p:nvPr/>
         </p:nvSpPr>
         <p:spPr>
           <a:xfrm>
-            <a:off x="731520" y="548640"/>
-            <a:ext cx="3657600" cy="50800"/>
+            <a:off x="731520" y="640080"/>
+            <a:ext cx="1097280" cy="50800"/>
           </a:xfrm>
           <a:prstGeom prst="rect">
             <a:avLst/>
           </a:prstGeom>
           <a:solidFill>
-            <a:srgbClr val="6C63FF"/>
+            <a:srgbClr val="00D4AA"/>
           </a:solidFill>
           <a:ln>
             <a:noFill/>
@@ -5509,14 +8925,14 @@
       </p:sp>
       <p:sp>
         <p:nvSpPr>
-          <p:cNvPr id="3" name="TextBox 2"/>
+          <p:cNvPr id="4" name="TextBox 3"/>
           <p:cNvSpPr txBox="1"/>
           <p:nvPr/>
         </p:nvSpPr>
         <p:spPr>
           <a:xfrm>
-            <a:off x="731520" y="731520"/>
-            <a:ext cx="9144000" cy="731520"/>
+            <a:off x="731520" y="1005840"/>
+            <a:ext cx="10058400" cy="914400"/>
           </a:xfrm>
           <a:prstGeom prst="rect">
             <a:avLst/>
@@ -5530,7 +8946,7 @@
           <a:lstStyle/>
           <a:p>
             <a:pPr algn="l">
-              <a:defRPr sz="3600" b="1">
+              <a:defRPr sz="4000" b="1">
                 <a:solidFill>
                   <a:srgbClr val="FFFFFF"/>
                 </a:solidFill>
@@ -5545,13 +8961,13 @@
       </p:sp>
       <p:sp>
         <p:nvSpPr>
-          <p:cNvPr id="4" name="TextBox 3"/>
+          <p:cNvPr id="5" name="TextBox 4"/>
           <p:cNvSpPr txBox="1"/>
           <p:nvPr/>
         </p:nvSpPr>
         <p:spPr>
           <a:xfrm>
-            <a:off x="731520" y="1828800"/>
+            <a:off x="731520" y="2011680"/>
             <a:ext cx="10058400" cy="3657600"/>
           </a:xfrm>
           <a:prstGeom prst="rect">
@@ -5567,11 +8983,11 @@
           <a:p>
             <a:pPr>
               <a:spcAft>
-                <a:spcPts val="800"/>
+                <a:spcPts val="1000"/>
               </a:spcAft>
-              <a:defRPr sz="1800">
-                <a:solidFill>
-                  <a:srgbClr val="CCCCDD"/>
+              <a:defRPr sz="1700">
+                <a:solidFill>
+                  <a:srgbClr val="B0B0C8"/>
                 </a:solidFill>
                 <a:latin typeface="Calibri"/>
               </a:defRPr>
@@ -5583,81 +8999,314 @@
           <a:p>
             <a:pPr>
               <a:spcAft>
-                <a:spcPts val="800"/>
+                <a:spcPts val="1000"/>
               </a:spcAft>
-              <a:defRPr sz="1800">
-                <a:solidFill>
-                  <a:srgbClr val="CCCCDD"/>
-                </a:solidFill>
-                <a:latin typeface="Calibri"/>
-              </a:defRPr>
-            </a:pPr>
-            <a:r>
-              <a:t>Chunked knowledge base (configurable chunk size)</a:t>
+              <a:defRPr sz="1700">
+                <a:solidFill>
+                  <a:srgbClr val="B0B0C8"/>
+                </a:solidFill>
+                <a:latin typeface="Calibri"/>
+              </a:defRPr>
+            </a:pPr>
+            <a:r>
+              <a:t>Configurable chunk size &amp; top-K retrieval</a:t>
             </a:r>
           </a:p>
           <a:p>
             <a:pPr>
               <a:spcAft>
-                <a:spcPts val="800"/>
+                <a:spcPts val="1000"/>
               </a:spcAft>
-              <a:defRPr sz="1800">
-                <a:solidFill>
-                  <a:srgbClr val="CCCCDD"/>
-                </a:solidFill>
-                <a:latin typeface="Calibri"/>
-              </a:defRPr>
-            </a:pPr>
-            <a:r>
-              <a:t>Top-K retrieval with configurable threshold</a:t>
+              <a:defRPr sz="1700">
+                <a:solidFill>
+                  <a:srgbClr val="B0B0C8"/>
+                </a:solidFill>
+                <a:latin typeface="Calibri"/>
+              </a:defRPr>
+            </a:pPr>
+            <a:r>
+              <a:t>Source-grounded citations in every response</a:t>
             </a:r>
           </a:p>
           <a:p>
             <a:pPr>
               <a:spcAft>
-                <a:spcPts val="800"/>
+                <a:spcPts val="1000"/>
               </a:spcAft>
-              <a:defRPr sz="1800">
-                <a:solidFill>
-                  <a:srgbClr val="CCCCDD"/>
-                </a:solidFill>
-                <a:latin typeface="Calibri"/>
-              </a:defRPr>
-            </a:pPr>
-            <a:r>
-              <a:t>Source citations in every AI response</a:t>
+              <a:defRPr sz="1700">
+                <a:solidFill>
+                  <a:srgbClr val="B0B0C8"/>
+                </a:solidFill>
+                <a:latin typeface="Calibri"/>
+              </a:defRPr>
+            </a:pPr>
+            <a:r>
+              <a:t>Knowledge base → vector embeddings pipeline</a:t>
             </a:r>
           </a:p>
           <a:p>
             <a:pPr>
               <a:spcAft>
-                <a:spcPts val="800"/>
+                <a:spcPts val="1000"/>
               </a:spcAft>
-              <a:defRPr sz="1800">
-                <a:solidFill>
-                  <a:srgbClr val="CCCCDD"/>
-                </a:solidFill>
-                <a:latin typeface="Calibri"/>
-              </a:defRPr>
-            </a:pPr>
-            <a:r>
-              <a:t>Markdown knowledge base → vector embeddings pipeline</a:t>
+              <a:defRPr sz="1700">
+                <a:solidFill>
+                  <a:srgbClr val="B0B0C8"/>
+                </a:solidFill>
+                <a:latin typeface="Calibri"/>
+              </a:defRPr>
+            </a:pPr>
+            <a:r>
+              <a:t>Per-agent KB config in YAML agent definitions</a:t>
             </a:r>
           </a:p>
           <a:p>
             <a:pPr>
               <a:spcAft>
-                <a:spcPts val="800"/>
+                <a:spcPts val="1000"/>
               </a:spcAft>
-              <a:defRPr sz="1800">
-                <a:solidFill>
-                  <a:srgbClr val="CCCCDD"/>
-                </a:solidFill>
-                <a:latin typeface="Calibri"/>
-              </a:defRPr>
-            </a:pPr>
-            <a:r>
-              <a:t>Per-agent knowledge base configuration in YAML</a:t>
+              <a:defRPr sz="1700">
+                <a:solidFill>
+                  <a:srgbClr val="B0B0C8"/>
+                </a:solidFill>
+                <a:latin typeface="Calibri"/>
+              </a:defRPr>
+            </a:pPr>
+            <a:r>
+              <a:t>Adjustable retrieval threshold per use case</a:t>
+            </a:r>
+          </a:p>
+        </p:txBody>
+      </p:sp>
+      <p:sp>
+        <p:nvSpPr>
+          <p:cNvPr id="6" name="Rounded Rectangle 5"/>
+          <p:cNvSpPr/>
+          <p:nvPr/>
+        </p:nvSpPr>
+        <p:spPr>
+          <a:xfrm>
+            <a:off x="8229600" y="3200400"/>
+            <a:ext cx="3200400" cy="2286000"/>
+          </a:xfrm>
+          <a:prstGeom prst="roundRect">
+            <a:avLst>
+              <a:gd name="adj" fmla="val 5000"/>
+            </a:avLst>
+          </a:prstGeom>
+          <a:solidFill>
+            <a:srgbClr val="111128"/>
+          </a:solidFill>
+          <a:ln>
+            <a:noFill/>
+          </a:ln>
+        </p:spPr>
+        <p:style>
+          <a:lnRef idx="1">
+            <a:schemeClr val="accent1"/>
+          </a:lnRef>
+          <a:fillRef idx="3">
+            <a:schemeClr val="accent1"/>
+          </a:fillRef>
+          <a:effectRef idx="2">
+            <a:schemeClr val="accent1"/>
+          </a:effectRef>
+          <a:fontRef idx="minor">
+            <a:schemeClr val="lt1"/>
+          </a:fontRef>
+        </p:style>
+        <p:txBody>
+          <a:bodyPr rtlCol="0" anchor="ctr"/>
+          <a:lstStyle/>
+          <a:p>
+            <a:pPr algn="ctr"/>
+          </a:p>
+        </p:txBody>
+      </p:sp>
+      <p:sp>
+        <p:nvSpPr>
+          <p:cNvPr id="7" name="TextBox 6"/>
+          <p:cNvSpPr txBox="1"/>
+          <p:nvPr/>
+        </p:nvSpPr>
+        <p:spPr>
+          <a:xfrm>
+            <a:off x="8503920" y="3474720"/>
+            <a:ext cx="2743200" cy="365760"/>
+          </a:xfrm>
+          <a:prstGeom prst="rect">
+            <a:avLst/>
+          </a:prstGeom>
+          <a:noFill/>
+        </p:spPr>
+        <p:txBody>
+          <a:bodyPr wrap="square">
+            <a:spAutoFit/>
+          </a:bodyPr>
+          <a:lstStyle/>
+          <a:p>
+            <a:pPr algn="l">
+              <a:defRPr sz="1400" b="1">
+                <a:solidFill>
+                  <a:srgbClr val="00D4AA"/>
+                </a:solidFill>
+                <a:latin typeface="Calibri"/>
+              </a:defRPr>
+            </a:pPr>
+            <a:r>
+              <a:t>RAG Flow</a:t>
+            </a:r>
+          </a:p>
+        </p:txBody>
+      </p:sp>
+      <p:sp>
+        <p:nvSpPr>
+          <p:cNvPr id="8" name="TextBox 7"/>
+          <p:cNvSpPr txBox="1"/>
+          <p:nvPr/>
+        </p:nvSpPr>
+        <p:spPr>
+          <a:xfrm>
+            <a:off x="8503920" y="3931920"/>
+            <a:ext cx="2743200" cy="1828800"/>
+          </a:xfrm>
+          <a:prstGeom prst="rect">
+            <a:avLst/>
+          </a:prstGeom>
+          <a:noFill/>
+        </p:spPr>
+        <p:txBody>
+          <a:bodyPr wrap="square">
+            <a:spAutoFit/>
+          </a:bodyPr>
+          <a:lstStyle/>
+          <a:p>
+            <a:pPr>
+              <a:spcAft>
+                <a:spcPts val="400"/>
+              </a:spcAft>
+              <a:defRPr sz="1100">
+                <a:solidFill>
+                  <a:srgbClr val="B0B0C8"/>
+                </a:solidFill>
+                <a:latin typeface="Calibri"/>
+              </a:defRPr>
+            </a:pPr>
+            <a:r>
+              <a:t>Query → Embed → Retrieve → Augment → Generate</a:t>
+            </a:r>
+          </a:p>
+          <a:p>
+            <a:pPr>
+              <a:spcAft>
+                <a:spcPts val="400"/>
+              </a:spcAft>
+              <a:defRPr sz="1100">
+                <a:solidFill>
+                  <a:srgbClr val="B0B0C8"/>
+                </a:solidFill>
+                <a:latin typeface="Calibri"/>
+              </a:defRPr>
+            </a:pPr>
+          </a:p>
+          <a:p>
+            <a:pPr>
+              <a:spcAft>
+                <a:spcPts val="400"/>
+              </a:spcAft>
+              <a:defRPr sz="1100">
+                <a:solidFill>
+                  <a:srgbClr val="B0B0C8"/>
+                </a:solidFill>
+                <a:latin typeface="Calibri"/>
+              </a:defRPr>
+            </a:pPr>
+            <a:r>
+              <a:t>User question chunked,</a:t>
+            </a:r>
+          </a:p>
+          <a:p>
+            <a:pPr>
+              <a:spcAft>
+                <a:spcPts val="400"/>
+              </a:spcAft>
+              <a:defRPr sz="1100">
+                <a:solidFill>
+                  <a:srgbClr val="B0B0C8"/>
+                </a:solidFill>
+                <a:latin typeface="Calibri"/>
+              </a:defRPr>
+            </a:pPr>
+            <a:r>
+              <a:t>matched against KB,</a:t>
+            </a:r>
+          </a:p>
+          <a:p>
+            <a:pPr>
+              <a:spcAft>
+                <a:spcPts val="400"/>
+              </a:spcAft>
+              <a:defRPr sz="1100">
+                <a:solidFill>
+                  <a:srgbClr val="B0B0C8"/>
+                </a:solidFill>
+                <a:latin typeface="Calibri"/>
+              </a:defRPr>
+            </a:pPr>
+            <a:r>
+              <a:t>injected into prompt</a:t>
+            </a:r>
+          </a:p>
+          <a:p>
+            <a:pPr>
+              <a:spcAft>
+                <a:spcPts val="400"/>
+              </a:spcAft>
+              <a:defRPr sz="1100">
+                <a:solidFill>
+                  <a:srgbClr val="B0B0C8"/>
+                </a:solidFill>
+                <a:latin typeface="Calibri"/>
+              </a:defRPr>
+            </a:pPr>
+            <a:r>
+              <a:t>with source citations</a:t>
+            </a:r>
+          </a:p>
+        </p:txBody>
+      </p:sp>
+      <p:sp>
+        <p:nvSpPr>
+          <p:cNvPr id="9" name="TextBox 8"/>
+          <p:cNvSpPr txBox="1"/>
+          <p:nvPr/>
+        </p:nvSpPr>
+        <p:spPr>
+          <a:xfrm>
+            <a:off x="10972800" y="6400800"/>
+            <a:ext cx="914400" cy="274320"/>
+          </a:xfrm>
+          <a:prstGeom prst="rect">
+            <a:avLst/>
+          </a:prstGeom>
+          <a:noFill/>
+        </p:spPr>
+        <p:txBody>
+          <a:bodyPr wrap="square">
+            <a:spAutoFit/>
+          </a:bodyPr>
+          <a:lstStyle/>
+          <a:p>
+            <a:pPr algn="r">
+              <a:defRPr sz="1000" b="0">
+                <a:solidFill>
+                  <a:srgbClr val="6B6B8A"/>
+                </a:solidFill>
+                <a:latin typeface="Calibri"/>
+              </a:defRPr>
+            </a:pPr>
+            <a:r>
+              <a:t>06 / 16</a:t>
             </a:r>
           </a:p>
         </p:txBody>
@@ -5676,7 +9325,7 @@
     <p:bg>
       <p:bgPr>
         <a:solidFill>
-          <a:srgbClr val="1E1E2E"/>
+          <a:srgbClr val="0B0B1A"/>
         </a:solidFill>
         <a:effectLst/>
       </p:bgPr>
@@ -5690,20 +9339,56 @@
       <p:grpSpPr/>
       <p:sp>
         <p:nvSpPr>
-          <p:cNvPr id="2" name="Rectangle 1"/>
+          <p:cNvPr id="2" name="TextBox 1"/>
+          <p:cNvSpPr txBox="1"/>
+          <p:nvPr/>
+        </p:nvSpPr>
+        <p:spPr>
+          <a:xfrm>
+            <a:off x="731520" y="274320"/>
+            <a:ext cx="5486400" cy="365760"/>
+          </a:xfrm>
+          <a:prstGeom prst="rect">
+            <a:avLst/>
+          </a:prstGeom>
+          <a:noFill/>
+        </p:spPr>
+        <p:txBody>
+          <a:bodyPr wrap="square">
+            <a:spAutoFit/>
+          </a:bodyPr>
+          <a:lstStyle/>
+          <a:p>
+            <a:pPr algn="l">
+              <a:defRPr sz="1200" b="1">
+                <a:solidFill>
+                  <a:srgbClr val="00D4AA"/>
+                </a:solidFill>
+                <a:latin typeface="Calibri"/>
+              </a:defRPr>
+            </a:pPr>
+            <a:r>
+              <a:t>TELEPHONY</a:t>
+            </a:r>
+          </a:p>
+        </p:txBody>
+      </p:sp>
+      <p:sp>
+        <p:nvSpPr>
+          <p:cNvPr id="3" name="Rectangle 2"/>
           <p:cNvSpPr/>
           <p:nvPr/>
         </p:nvSpPr>
         <p:spPr>
           <a:xfrm>
-            <a:off x="731520" y="548640"/>
-            <a:ext cx="3657600" cy="50800"/>
+            <a:off x="731520" y="640080"/>
+            <a:ext cx="1097280" cy="50800"/>
           </a:xfrm>
           <a:prstGeom prst="rect">
             <a:avLst/>
           </a:prstGeom>
           <a:solidFill>
-            <a:srgbClr val="6C63FF"/>
+            <a:srgbClr val="00D4AA"/>
           </a:solidFill>
           <a:ln>
             <a:noFill/>
@@ -5733,14 +9418,14 @@
       </p:sp>
       <p:sp>
         <p:nvSpPr>
-          <p:cNvPr id="3" name="TextBox 2"/>
+          <p:cNvPr id="4" name="TextBox 3"/>
           <p:cNvSpPr txBox="1"/>
           <p:nvPr/>
         </p:nvSpPr>
         <p:spPr>
           <a:xfrm>
-            <a:off x="731520" y="731520"/>
-            <a:ext cx="9144000" cy="731520"/>
+            <a:off x="731520" y="1005840"/>
+            <a:ext cx="10058400" cy="914400"/>
           </a:xfrm>
           <a:prstGeom prst="rect">
             <a:avLst/>
@@ -5754,7 +9439,7 @@
           <a:lstStyle/>
           <a:p>
             <a:pPr algn="l">
-              <a:defRPr sz="3600" b="1">
+              <a:defRPr sz="4000" b="1">
                 <a:solidFill>
                   <a:srgbClr val="FFFFFF"/>
                 </a:solidFill>
@@ -5762,20 +9447,63 @@
               </a:defRPr>
             </a:pPr>
             <a:r>
-              <a:t>Voice Telephony</a:t>
-            </a:r>
-          </a:p>
-        </p:txBody>
-      </p:sp>
-      <p:sp>
-        <p:nvSpPr>
-          <p:cNvPr id="4" name="TextBox 3"/>
+              <a:t>Voice &amp; PSTN</a:t>
+            </a:r>
+          </a:p>
+        </p:txBody>
+      </p:sp>
+      <p:sp>
+        <p:nvSpPr>
+          <p:cNvPr id="5" name="Oval 4"/>
+          <p:cNvSpPr/>
+          <p:nvPr/>
+        </p:nvSpPr>
+        <p:spPr>
+          <a:xfrm>
+            <a:off x="-457200" y="3657600"/>
+            <a:ext cx="1828800" cy="1828800"/>
+          </a:xfrm>
+          <a:prstGeom prst="ellipse">
+            <a:avLst/>
+          </a:prstGeom>
+          <a:solidFill>
+            <a:srgbClr val="FF6B6B"/>
+          </a:solidFill>
+          <a:ln>
+            <a:noFill/>
+          </a:ln>
+        </p:spPr>
+        <p:style>
+          <a:lnRef idx="1">
+            <a:schemeClr val="accent1"/>
+          </a:lnRef>
+          <a:fillRef idx="3">
+            <a:schemeClr val="accent1"/>
+          </a:fillRef>
+          <a:effectRef idx="2">
+            <a:schemeClr val="accent1"/>
+          </a:effectRef>
+          <a:fontRef idx="minor">
+            <a:schemeClr val="lt1"/>
+          </a:fontRef>
+        </p:style>
+        <p:txBody>
+          <a:bodyPr rtlCol="0" anchor="ctr"/>
+          <a:lstStyle/>
+          <a:p>
+            <a:pPr algn="ctr"/>
+          </a:p>
+        </p:txBody>
+      </p:sp>
+      <p:sp>
+        <p:nvSpPr>
+          <p:cNvPr id="6" name="TextBox 5"/>
           <p:cNvSpPr txBox="1"/>
           <p:nvPr/>
         </p:nvSpPr>
         <p:spPr>
           <a:xfrm>
-            <a:off x="731520" y="1828800"/>
+            <a:off x="731520" y="2011680"/>
             <a:ext cx="10058400" cy="4114800"/>
           </a:xfrm>
           <a:prstGeom prst="rect">
@@ -5791,27 +9519,27 @@
           <a:p>
             <a:pPr>
               <a:spcAft>
-                <a:spcPts val="800"/>
+                <a:spcPts val="600"/>
               </a:spcAft>
-              <a:defRPr sz="1800">
-                <a:solidFill>
-                  <a:srgbClr val="CCCCDD"/>
-                </a:solidFill>
-                <a:latin typeface="Calibri"/>
-              </a:defRPr>
-            </a:pPr>
-            <a:r>
-              <a:t>Twilio Programmable Voice — production-ready PSTN integration</a:t>
+              <a:defRPr sz="1600">
+                <a:solidFill>
+                  <a:srgbClr val="B0B0C8"/>
+                </a:solidFill>
+                <a:latin typeface="Calibri"/>
+              </a:defRPr>
+            </a:pPr>
+            <a:r>
+              <a:t>Twilio Programmable Voice — production PSTN</a:t>
             </a:r>
           </a:p>
           <a:p>
             <a:pPr>
               <a:spcAft>
-                <a:spcPts val="800"/>
+                <a:spcPts val="600"/>
               </a:spcAft>
-              <a:defRPr sz="1800">
-                <a:solidFill>
-                  <a:srgbClr val="CCCCDD"/>
+              <a:defRPr sz="1600">
+                <a:solidFill>
+                  <a:srgbClr val="B0B0C8"/>
                 </a:solidFill>
                 <a:latin typeface="Calibri"/>
               </a:defRPr>
@@ -5823,97 +9551,149 @@
           <a:p>
             <a:pPr>
               <a:spcAft>
-                <a:spcPts val="800"/>
+                <a:spcPts val="600"/>
               </a:spcAft>
-              <a:defRPr sz="1800">
-                <a:solidFill>
-                  <a:srgbClr val="CCCCDD"/>
-                </a:solidFill>
-                <a:latin typeface="Calibri"/>
-              </a:defRPr>
-            </a:pPr>
-            <a:r>
-              <a:t>Generic SIP / CCaaS — any SIP trunk</a:t>
+              <a:defRPr sz="1600">
+                <a:solidFill>
+                  <a:srgbClr val="B0B0C8"/>
+                </a:solidFill>
+                <a:latin typeface="Calibri"/>
+              </a:defRPr>
+            </a:pPr>
+            <a:r>
+              <a:t>Generic SIP / CCaaS — any SIP trunk supported</a:t>
             </a:r>
           </a:p>
           <a:p>
             <a:pPr>
               <a:spcAft>
-                <a:spcPts val="800"/>
+                <a:spcPts val="600"/>
               </a:spcAft>
-              <a:defRPr sz="1800">
-                <a:solidFill>
-                  <a:srgbClr val="CCCCDD"/>
-                </a:solidFill>
-                <a:latin typeface="Calibri"/>
-              </a:defRPr>
-            </a:pPr>
-            <a:r>
-              <a:t>VAPI.ai &amp; Retell AI — AI voice agent overlay support</a:t>
+              <a:defRPr sz="1600">
+                <a:solidFill>
+                  <a:srgbClr val="B0B0C8"/>
+                </a:solidFill>
+                <a:latin typeface="Calibri"/>
+              </a:defRPr>
+            </a:pPr>
+            <a:r>
+              <a:t>VAPI.ai &amp; Retell AI — AI voice agent overlays</a:t>
             </a:r>
           </a:p>
           <a:p>
             <a:pPr>
               <a:spcAft>
-                <a:spcPts val="800"/>
+                <a:spcPts val="600"/>
               </a:spcAft>
-              <a:defRPr sz="1800">
-                <a:solidFill>
-                  <a:srgbClr val="CCCCDD"/>
-                </a:solidFill>
-                <a:latin typeface="Calibri"/>
-              </a:defRPr>
-            </a:pPr>
-            <a:r>
-              <a:t>Built-in simulator for local dev (no hardware required)</a:t>
+              <a:defRPr sz="1600">
+                <a:solidFill>
+                  <a:srgbClr val="B0B0C8"/>
+                </a:solidFill>
+                <a:latin typeface="Calibri"/>
+              </a:defRPr>
+            </a:pPr>
+            <a:r>
+              <a:t>Built-in simulator — full voice testing without hardware</a:t>
             </a:r>
           </a:p>
           <a:p>
             <a:pPr>
               <a:spcAft>
-                <a:spcPts val="800"/>
+                <a:spcPts val="600"/>
               </a:spcAft>
-              <a:defRPr sz="1800">
-                <a:solidFill>
-                  <a:srgbClr val="CCCCDD"/>
-                </a:solidFill>
-                <a:latin typeface="Calibri"/>
-              </a:defRPr>
-            </a:pPr>
-            <a:r>
-              <a:t>STT: Deepgram, AssemblyAI  |  TTS: ElevenLabs, PlayHT</a:t>
+              <a:defRPr sz="1600">
+                <a:solidFill>
+                  <a:srgbClr val="B0B0C8"/>
+                </a:solidFill>
+                <a:latin typeface="Calibri"/>
+              </a:defRPr>
+            </a:pPr>
+            <a:r>
+              <a:t>Deepgram &amp; AssemblyAI for STT</a:t>
             </a:r>
           </a:p>
           <a:p>
             <a:pPr>
               <a:spcAft>
-                <a:spcPts val="800"/>
+                <a:spcPts val="600"/>
               </a:spcAft>
-              <a:defRPr sz="1800">
-                <a:solidFill>
-                  <a:srgbClr val="CCCCDD"/>
-                </a:solidFill>
-                <a:latin typeface="Calibri"/>
-              </a:defRPr>
-            </a:pPr>
-            <a:r>
-              <a:t>Twilio webhook handler + status callbacks</a:t>
+              <a:defRPr sz="1600">
+                <a:solidFill>
+                  <a:srgbClr val="B0B0C8"/>
+                </a:solidFill>
+                <a:latin typeface="Calibri"/>
+              </a:defRPr>
+            </a:pPr>
+            <a:r>
+              <a:t>ElevenLabs &amp; PlayHT for TTS</a:t>
             </a:r>
           </a:p>
           <a:p>
             <a:pPr>
               <a:spcAft>
-                <a:spcPts val="800"/>
+                <a:spcPts val="600"/>
               </a:spcAft>
-              <a:defRPr sz="1800">
-                <a:solidFill>
-                  <a:srgbClr val="CCCCDD"/>
-                </a:solidFill>
-                <a:latin typeface="Calibri"/>
-              </a:defRPr>
-            </a:pPr>
-            <a:r>
-              <a:t>Call logs and status endpoints</a:t>
+              <a:defRPr sz="1600">
+                <a:solidFill>
+                  <a:srgbClr val="B0B0C8"/>
+                </a:solidFill>
+                <a:latin typeface="Calibri"/>
+              </a:defRPr>
+            </a:pPr>
+            <a:r>
+              <a:t>Call status tracking &amp; logs via REST API</a:t>
+            </a:r>
+          </a:p>
+          <a:p>
+            <a:pPr>
+              <a:spcAft>
+                <a:spcPts val="600"/>
+              </a:spcAft>
+              <a:defRPr sz="1600">
+                <a:solidFill>
+                  <a:srgbClr val="B0B0C8"/>
+                </a:solidFill>
+                <a:latin typeface="Calibri"/>
+              </a:defRPr>
+            </a:pPr>
+            <a:r>
+              <a:t>Twilio webhooks + status callbacks</a:t>
+            </a:r>
+          </a:p>
+        </p:txBody>
+      </p:sp>
+      <p:sp>
+        <p:nvSpPr>
+          <p:cNvPr id="7" name="TextBox 6"/>
+          <p:cNvSpPr txBox="1"/>
+          <p:nvPr/>
+        </p:nvSpPr>
+        <p:spPr>
+          <a:xfrm>
+            <a:off x="10972800" y="6400800"/>
+            <a:ext cx="914400" cy="274320"/>
+          </a:xfrm>
+          <a:prstGeom prst="rect">
+            <a:avLst/>
+          </a:prstGeom>
+          <a:noFill/>
+        </p:spPr>
+        <p:txBody>
+          <a:bodyPr wrap="square">
+            <a:spAutoFit/>
+          </a:bodyPr>
+          <a:lstStyle/>
+          <a:p>
+            <a:pPr algn="r">
+              <a:defRPr sz="1000" b="0">
+                <a:solidFill>
+                  <a:srgbClr val="6B6B8A"/>
+                </a:solidFill>
+                <a:latin typeface="Calibri"/>
+              </a:defRPr>
+            </a:pPr>
+            <a:r>
+              <a:t>07 / 16</a:t>
             </a:r>
           </a:p>
         </p:txBody>
@@ -5932,7 +9712,7 @@
     <p:bg>
       <p:bgPr>
         <a:solidFill>
-          <a:srgbClr val="1E1E2E"/>
+          <a:srgbClr val="0B0B1A"/>
         </a:solidFill>
         <a:effectLst/>
       </p:bgPr>
@@ -5946,20 +9726,56 @@
       <p:grpSpPr/>
       <p:sp>
         <p:nvSpPr>
-          <p:cNvPr id="2" name="Rectangle 1"/>
+          <p:cNvPr id="2" name="TextBox 1"/>
+          <p:cNvSpPr txBox="1"/>
+          <p:nvPr/>
+        </p:nvSpPr>
+        <p:spPr>
+          <a:xfrm>
+            <a:off x="731520" y="274320"/>
+            <a:ext cx="5486400" cy="365760"/>
+          </a:xfrm>
+          <a:prstGeom prst="rect">
+            <a:avLst/>
+          </a:prstGeom>
+          <a:noFill/>
+        </p:spPr>
+        <p:txBody>
+          <a:bodyPr wrap="square">
+            <a:spAutoFit/>
+          </a:bodyPr>
+          <a:lstStyle/>
+          <a:p>
+            <a:pPr algn="l">
+              <a:defRPr sz="1200" b="1">
+                <a:solidFill>
+                  <a:srgbClr val="00D4AA"/>
+                </a:solidFill>
+                <a:latin typeface="Calibri"/>
+              </a:defRPr>
+            </a:pPr>
+            <a:r>
+              <a:t>OPTIMIZATION</a:t>
+            </a:r>
+          </a:p>
+        </p:txBody>
+      </p:sp>
+      <p:sp>
+        <p:nvSpPr>
+          <p:cNvPr id="3" name="Rectangle 2"/>
           <p:cNvSpPr/>
           <p:nvPr/>
         </p:nvSpPr>
         <p:spPr>
           <a:xfrm>
-            <a:off x="731520" y="548640"/>
-            <a:ext cx="3657600" cy="50800"/>
+            <a:off x="731520" y="640080"/>
+            <a:ext cx="1097280" cy="50800"/>
           </a:xfrm>
           <a:prstGeom prst="rect">
             <a:avLst/>
           </a:prstGeom>
           <a:solidFill>
-            <a:srgbClr val="6C63FF"/>
+            <a:srgbClr val="00D4AA"/>
           </a:solidFill>
           <a:ln>
             <a:noFill/>
@@ -5989,14 +9805,14 @@
       </p:sp>
       <p:sp>
         <p:nvSpPr>
-          <p:cNvPr id="3" name="TextBox 2"/>
+          <p:cNvPr id="4" name="TextBox 3"/>
           <p:cNvSpPr txBox="1"/>
           <p:nvPr/>
         </p:nvSpPr>
         <p:spPr>
           <a:xfrm>
-            <a:off x="731520" y="731520"/>
-            <a:ext cx="9144000" cy="731520"/>
+            <a:off x="731520" y="1005840"/>
+            <a:ext cx="10058400" cy="914400"/>
           </a:xfrm>
           <a:prstGeom prst="rect">
             <a:avLst/>
@@ -6010,7 +9826,7 @@
           <a:lstStyle/>
           <a:p>
             <a:pPr algn="l">
-              <a:defRPr sz="3600" b="1">
+              <a:defRPr sz="4000" b="1">
                 <a:solidFill>
                   <a:srgbClr val="FFFFFF"/>
                 </a:solidFill>
@@ -6025,14 +9841,57 @@
       </p:sp>
       <p:sp>
         <p:nvSpPr>
-          <p:cNvPr id="4" name="TextBox 3"/>
+          <p:cNvPr id="5" name="Oval 4"/>
+          <p:cNvSpPr/>
+          <p:nvPr/>
+        </p:nvSpPr>
+        <p:spPr>
+          <a:xfrm>
+            <a:off x="10058400" y="457200"/>
+            <a:ext cx="1371600" cy="1371600"/>
+          </a:xfrm>
+          <a:prstGeom prst="ellipse">
+            <a:avLst/>
+          </a:prstGeom>
+          <a:solidFill>
+            <a:srgbClr val="00D4AA"/>
+          </a:solidFill>
+          <a:ln>
+            <a:noFill/>
+          </a:ln>
+        </p:spPr>
+        <p:style>
+          <a:lnRef idx="1">
+            <a:schemeClr val="accent1"/>
+          </a:lnRef>
+          <a:fillRef idx="3">
+            <a:schemeClr val="accent1"/>
+          </a:fillRef>
+          <a:effectRef idx="2">
+            <a:schemeClr val="accent1"/>
+          </a:effectRef>
+          <a:fontRef idx="minor">
+            <a:schemeClr val="lt1"/>
+          </a:fontRef>
+        </p:style>
+        <p:txBody>
+          <a:bodyPr rtlCol="0" anchor="ctr"/>
+          <a:lstStyle/>
+          <a:p>
+            <a:pPr algn="ctr"/>
+          </a:p>
+        </p:txBody>
+      </p:sp>
+      <p:sp>
+        <p:nvSpPr>
+          <p:cNvPr id="6" name="TextBox 5"/>
           <p:cNvSpPr txBox="1"/>
           <p:nvPr/>
         </p:nvSpPr>
         <p:spPr>
           <a:xfrm>
-            <a:off x="731520" y="1828800"/>
-            <a:ext cx="10058400" cy="3657600"/>
+            <a:off x="731520" y="2011680"/>
+            <a:ext cx="10058400" cy="3200400"/>
           </a:xfrm>
           <a:prstGeom prst="rect">
             <a:avLst/>
@@ -6049,15 +9908,15 @@
               <a:spcAft>
                 <a:spcPts val="800"/>
               </a:spcAft>
-              <a:defRPr sz="1800">
-                <a:solidFill>
-                  <a:srgbClr val="CCCCDD"/>
-                </a:solidFill>
-                <a:latin typeface="Calibri"/>
-              </a:defRPr>
-            </a:pPr>
-            <a:r>
-              <a:t>Users rate responses — 👍 / 👎 / CSAT score</a:t>
+              <a:defRPr sz="1700">
+                <a:solidFill>
+                  <a:srgbClr val="B0B0C8"/>
+                </a:solidFill>
+                <a:latin typeface="Calibri"/>
+              </a:defRPr>
+            </a:pPr>
+            <a:r>
+              <a:t>User rates responses — 👍 / 👎 / CSAT score</a:t>
             </a:r>
           </a:p>
           <a:p>
@@ -6065,15 +9924,15 @@
               <a:spcAft>
                 <a:spcPts val="800"/>
               </a:spcAft>
-              <a:defRPr sz="1800">
-                <a:solidFill>
-                  <a:srgbClr val="CCCCDD"/>
-                </a:solidFill>
-                <a:latin typeface="Calibri"/>
-              </a:defRPr>
-            </a:pPr>
-            <a:r>
-              <a:t>CSAT ratings dynamically tune agent temperature</a:t>
+              <a:defRPr sz="1700">
+                <a:solidFill>
+                  <a:srgbClr val="B0B0C8"/>
+                </a:solidFill>
+                <a:latin typeface="Calibri"/>
+              </a:defRPr>
+            </a:pPr>
+            <a:r>
+              <a:t>CSAT dynamically tunes agent temperature</a:t>
             </a:r>
           </a:p>
           <a:p>
@@ -6081,15 +9940,15 @@
               <a:spcAft>
                 <a:spcPts val="800"/>
               </a:spcAft>
-              <a:defRPr sz="1800">
-                <a:solidFill>
-                  <a:srgbClr val="CCCCDD"/>
-                </a:solidFill>
-                <a:latin typeface="Calibri"/>
-              </a:defRPr>
-            </a:pPr>
-            <a:r>
-              <a:t>Adjusts RAG retrieval threshold based on feedback</a:t>
+              <a:defRPr sz="1700">
+                <a:solidFill>
+                  <a:srgbClr val="B0B0C8"/>
+                </a:solidFill>
+                <a:latin typeface="Calibri"/>
+              </a:defRPr>
+            </a:pPr>
+            <a:r>
+              <a:t>Adjusts RAG retrieval threshold based on feedback data</a:t>
             </a:r>
           </a:p>
           <a:p>
@@ -6097,15 +9956,15 @@
               <a:spcAft>
                 <a:spcPts val="800"/>
               </a:spcAft>
-              <a:defRPr sz="1800">
-                <a:solidFill>
-                  <a:srgbClr val="CCCCDD"/>
-                </a:solidFill>
-                <a:latin typeface="Calibri"/>
-              </a:defRPr>
-            </a:pPr>
-            <a:r>
-              <a:t>Sentiment tracking across sessions</a:t>
+              <a:defRPr sz="1700">
+                <a:solidFill>
+                  <a:srgbClr val="B0B0C8"/>
+                </a:solidFill>
+                <a:latin typeface="Calibri"/>
+              </a:defRPr>
+            </a:pPr>
+            <a:r>
+              <a:t>Sentiment tracking across sessions &amp; channels</a:t>
             </a:r>
           </a:p>
           <a:p>
@@ -6113,15 +9972,15 @@
               <a:spcAft>
                 <a:spcPts val="800"/>
               </a:spcAft>
-              <a:defRPr sz="1800">
-                <a:solidFill>
-                  <a:srgbClr val="CCCCDD"/>
-                </a:solidFill>
-                <a:latin typeface="Calibri"/>
-              </a:defRPr>
-            </a:pPr>
-            <a:r>
-              <a:t>All feedback logged for analysis</a:t>
+              <a:defRPr sz="1700">
+                <a:solidFill>
+                  <a:srgbClr val="B0B0C8"/>
+                </a:solidFill>
+                <a:latin typeface="Calibri"/>
+              </a:defRPr>
+            </a:pPr>
+            <a:r>
+              <a:t>All feedback logged for dashboard &amp; analysis</a:t>
             </a:r>
           </a:p>
           <a:p>
@@ -6129,15 +9988,168 @@
               <a:spcAft>
                 <a:spcPts val="800"/>
               </a:spcAft>
-              <a:defRPr sz="1800">
-                <a:solidFill>
-                  <a:srgbClr val="CCCCDD"/>
+              <a:defRPr sz="1700">
+                <a:solidFill>
+                  <a:srgbClr val="B0B0C8"/>
                 </a:solidFill>
                 <a:latin typeface="Calibri"/>
               </a:defRPr>
             </a:pPr>
             <a:r>
               <a:t>Enables continuous improvement without manual tuning</a:t>
+            </a:r>
+          </a:p>
+        </p:txBody>
+      </p:sp>
+      <p:sp>
+        <p:nvSpPr>
+          <p:cNvPr id="7" name="Rounded Rectangle 6"/>
+          <p:cNvSpPr/>
+          <p:nvPr/>
+        </p:nvSpPr>
+        <p:spPr>
+          <a:xfrm>
+            <a:off x="731520" y="4754880"/>
+            <a:ext cx="10515600" cy="1371600"/>
+          </a:xfrm>
+          <a:prstGeom prst="roundRect">
+            <a:avLst>
+              <a:gd name="adj" fmla="val 5000"/>
+            </a:avLst>
+          </a:prstGeom>
+          <a:solidFill>
+            <a:srgbClr val="111128"/>
+          </a:solidFill>
+          <a:ln>
+            <a:noFill/>
+          </a:ln>
+        </p:spPr>
+        <p:style>
+          <a:lnRef idx="1">
+            <a:schemeClr val="accent1"/>
+          </a:lnRef>
+          <a:fillRef idx="3">
+            <a:schemeClr val="accent1"/>
+          </a:fillRef>
+          <a:effectRef idx="2">
+            <a:schemeClr val="accent1"/>
+          </a:effectRef>
+          <a:fontRef idx="minor">
+            <a:schemeClr val="lt1"/>
+          </a:fontRef>
+        </p:style>
+        <p:txBody>
+          <a:bodyPr rtlCol="0" anchor="ctr"/>
+          <a:lstStyle/>
+          <a:p>
+            <a:pPr algn="ctr"/>
+          </a:p>
+        </p:txBody>
+      </p:sp>
+      <p:sp>
+        <p:nvSpPr>
+          <p:cNvPr id="8" name="TextBox 7"/>
+          <p:cNvSpPr txBox="1"/>
+          <p:nvPr/>
+        </p:nvSpPr>
+        <p:spPr>
+          <a:xfrm>
+            <a:off x="1005840" y="4937760"/>
+            <a:ext cx="10058400" cy="365760"/>
+          </a:xfrm>
+          <a:prstGeom prst="rect">
+            <a:avLst/>
+          </a:prstGeom>
+          <a:noFill/>
+        </p:spPr>
+        <p:txBody>
+          <a:bodyPr wrap="square">
+            <a:spAutoFit/>
+          </a:bodyPr>
+          <a:lstStyle/>
+          <a:p>
+            <a:pPr algn="l">
+              <a:defRPr sz="1400" b="1">
+                <a:solidFill>
+                  <a:srgbClr val="00D4AA"/>
+                </a:solidFill>
+                <a:latin typeface="Calibri"/>
+              </a:defRPr>
+            </a:pPr>
+            <a:r>
+              <a:t>Feedback Loop</a:t>
+            </a:r>
+          </a:p>
+        </p:txBody>
+      </p:sp>
+      <p:sp>
+        <p:nvSpPr>
+          <p:cNvPr id="9" name="TextBox 8"/>
+          <p:cNvSpPr txBox="1"/>
+          <p:nvPr/>
+        </p:nvSpPr>
+        <p:spPr>
+          <a:xfrm>
+            <a:off x="1005840" y="5303520"/>
+            <a:ext cx="10058400" cy="640080"/>
+          </a:xfrm>
+          <a:prstGeom prst="rect">
+            <a:avLst/>
+          </a:prstGeom>
+          <a:noFill/>
+        </p:spPr>
+        <p:txBody>
+          <a:bodyPr wrap="square">
+            <a:spAutoFit/>
+          </a:bodyPr>
+          <a:lstStyle/>
+          <a:p>
+            <a:pPr algn="l">
+              <a:defRPr sz="1400" b="0">
+                <a:solidFill>
+                  <a:srgbClr val="B0B0C8"/>
+                </a:solidFill>
+                <a:latin typeface="Calibri"/>
+              </a:defRPr>
+            </a:pPr>
+            <a:r>
+              <a:t>Rating Submitted  →  Temperature Adjusted  →  RAG Threshold Tuned  →  Next Response Improves</a:t>
+            </a:r>
+          </a:p>
+        </p:txBody>
+      </p:sp>
+      <p:sp>
+        <p:nvSpPr>
+          <p:cNvPr id="10" name="TextBox 9"/>
+          <p:cNvSpPr txBox="1"/>
+          <p:nvPr/>
+        </p:nvSpPr>
+        <p:spPr>
+          <a:xfrm>
+            <a:off x="10972800" y="6400800"/>
+            <a:ext cx="914400" cy="274320"/>
+          </a:xfrm>
+          <a:prstGeom prst="rect">
+            <a:avLst/>
+          </a:prstGeom>
+          <a:noFill/>
+        </p:spPr>
+        <p:txBody>
+          <a:bodyPr wrap="square">
+            <a:spAutoFit/>
+          </a:bodyPr>
+          <a:lstStyle/>
+          <a:p>
+            <a:pPr algn="r">
+              <a:defRPr sz="1000" b="0">
+                <a:solidFill>
+                  <a:srgbClr val="6B6B8A"/>
+                </a:solidFill>
+                <a:latin typeface="Calibri"/>
+              </a:defRPr>
+            </a:pPr>
+            <a:r>
+              <a:t>08 / 16</a:t>
             </a:r>
           </a:p>
         </p:txBody>
@@ -6156,7 +10168,7 @@
     <p:bg>
       <p:bgPr>
         <a:solidFill>
-          <a:srgbClr val="1E1E2E"/>
+          <a:srgbClr val="0B0B1A"/>
         </a:solidFill>
         <a:effectLst/>
       </p:bgPr>
@@ -6170,20 +10182,56 @@
       <p:grpSpPr/>
       <p:sp>
         <p:nvSpPr>
-          <p:cNvPr id="2" name="Rectangle 1"/>
+          <p:cNvPr id="2" name="TextBox 1"/>
+          <p:cNvSpPr txBox="1"/>
+          <p:nvPr/>
+        </p:nvSpPr>
+        <p:spPr>
+          <a:xfrm>
+            <a:off x="731520" y="274320"/>
+            <a:ext cx="5486400" cy="365760"/>
+          </a:xfrm>
+          <a:prstGeom prst="rect">
+            <a:avLst/>
+          </a:prstGeom>
+          <a:noFill/>
+        </p:spPr>
+        <p:txBody>
+          <a:bodyPr wrap="square">
+            <a:spAutoFit/>
+          </a:bodyPr>
+          <a:lstStyle/>
+          <a:p>
+            <a:pPr algn="l">
+              <a:defRPr sz="1200" b="1">
+                <a:solidFill>
+                  <a:srgbClr val="00D4AA"/>
+                </a:solidFill>
+                <a:latin typeface="Calibri"/>
+              </a:defRPr>
+            </a:pPr>
+            <a:r>
+              <a:t>SECURITY</a:t>
+            </a:r>
+          </a:p>
+        </p:txBody>
+      </p:sp>
+      <p:sp>
+        <p:nvSpPr>
+          <p:cNvPr id="3" name="Rectangle 2"/>
           <p:cNvSpPr/>
           <p:nvPr/>
         </p:nvSpPr>
         <p:spPr>
           <a:xfrm>
-            <a:off x="731520" y="548640"/>
-            <a:ext cx="3657600" cy="50800"/>
+            <a:off x="731520" y="640080"/>
+            <a:ext cx="1097280" cy="50800"/>
           </a:xfrm>
           <a:prstGeom prst="rect">
             <a:avLst/>
           </a:prstGeom>
           <a:solidFill>
-            <a:srgbClr val="6C63FF"/>
+            <a:srgbClr val="00D4AA"/>
           </a:solidFill>
           <a:ln>
             <a:noFill/>
@@ -6213,14 +10261,14 @@
       </p:sp>
       <p:sp>
         <p:nvSpPr>
-          <p:cNvPr id="3" name="TextBox 2"/>
+          <p:cNvPr id="4" name="TextBox 3"/>
           <p:cNvSpPr txBox="1"/>
           <p:nvPr/>
         </p:nvSpPr>
         <p:spPr>
           <a:xfrm>
-            <a:off x="731520" y="731520"/>
-            <a:ext cx="9144000" cy="731520"/>
+            <a:off x="731520" y="1005840"/>
+            <a:ext cx="10058400" cy="914400"/>
           </a:xfrm>
           <a:prstGeom prst="rect">
             <a:avLst/>
@@ -6234,7 +10282,7 @@
           <a:lstStyle/>
           <a:p>
             <a:pPr algn="l">
-              <a:defRPr sz="3600" b="1">
+              <a:defRPr sz="4000" b="1">
                 <a:solidFill>
                   <a:srgbClr val="FFFFFF"/>
                 </a:solidFill>
@@ -6242,20 +10290,20 @@
               </a:defRPr>
             </a:pPr>
             <a:r>
-              <a:t>Security &amp; Integrations Vault</a:t>
-            </a:r>
-          </a:p>
-        </p:txBody>
-      </p:sp>
-      <p:sp>
-        <p:nvSpPr>
-          <p:cNvPr id="4" name="TextBox 3"/>
+              <a:t>Vault &amp; Credential Management</a:t>
+            </a:r>
+          </a:p>
+        </p:txBody>
+      </p:sp>
+      <p:sp>
+        <p:nvSpPr>
+          <p:cNvPr id="5" name="TextBox 4"/>
           <p:cNvSpPr txBox="1"/>
           <p:nvPr/>
         </p:nvSpPr>
         <p:spPr>
           <a:xfrm>
-            <a:off x="731520" y="1828800"/>
+            <a:off x="731520" y="2011680"/>
             <a:ext cx="10058400" cy="3657600"/>
           </a:xfrm>
           <a:prstGeom prst="rect">
@@ -6273,15 +10321,15 @@
               <a:spcAft>
                 <a:spcPts val="800"/>
               </a:spcAft>
-              <a:defRPr sz="1800">
-                <a:solidFill>
-                  <a:srgbClr val="CCCCDD"/>
-                </a:solidFill>
-                <a:latin typeface="Calibri"/>
-              </a:defRPr>
-            </a:pPr>
-            <a:r>
-              <a:t>AES-256-GCM encrypted vault for API keys &amp; credentials</a:t>
+              <a:defRPr sz="1600">
+                <a:solidFill>
+                  <a:srgbClr val="B0B0C8"/>
+                </a:solidFill>
+                <a:latin typeface="Calibri"/>
+              </a:defRPr>
+            </a:pPr>
+            <a:r>
+              <a:t>AES-256-GCM encrypted vault — all credentials at rest</a:t>
             </a:r>
           </a:p>
           <a:p>
@@ -6289,15 +10337,15 @@
               <a:spcAft>
                 <a:spcPts val="800"/>
               </a:spcAft>
-              <a:defRPr sz="1800">
-                <a:solidFill>
-                  <a:srgbClr val="CCCCDD"/>
-                </a:solidFill>
-                <a:latin typeface="Calibri"/>
-              </a:defRPr>
-            </a:pPr>
-            <a:r>
-              <a:t>REST API for credential CRUD (keys stored encrypted at rest)</a:t>
+              <a:defRPr sz="1600">
+                <a:solidFill>
+                  <a:srgbClr val="B0B0C8"/>
+                </a:solidFill>
+                <a:latin typeface="Calibri"/>
+              </a:defRPr>
+            </a:pPr>
+            <a:r>
+              <a:t>REST API for CRUD on integration credentials</a:t>
             </a:r>
           </a:p>
           <a:p>
@@ -6305,9 +10353,9 @@
               <a:spcAft>
                 <a:spcPts val="800"/>
               </a:spcAft>
-              <a:defRPr sz="1800">
-                <a:solidFill>
-                  <a:srgbClr val="CCCCDD"/>
+              <a:defRPr sz="1600">
+                <a:solidFill>
+                  <a:srgbClr val="B0B0C8"/>
                 </a:solidFill>
                 <a:latin typeface="Calibri"/>
               </a:defRPr>
@@ -6321,15 +10369,15 @@
               <a:spcAft>
                 <a:spcPts val="800"/>
               </a:spcAft>
-              <a:defRPr sz="1800">
-                <a:solidFill>
-                  <a:srgbClr val="CCCCDD"/>
-                </a:solidFill>
-                <a:latin typeface="Calibri"/>
-              </a:defRPr>
-            </a:pPr>
-            <a:r>
-              <a:t>Pydantic input validation on all endpoints</a:t>
+              <a:defRPr sz="1600">
+                <a:solidFill>
+                  <a:srgbClr val="B0B0C8"/>
+                </a:solidFill>
+                <a:latin typeface="Calibri"/>
+              </a:defRPr>
+            </a:pPr>
+            <a:r>
+              <a:t>Pydantic input validation on every endpoint</a:t>
             </a:r>
           </a:p>
           <a:p>
@@ -6337,9 +10385,9 @@
               <a:spcAft>
                 <a:spcPts val="800"/>
               </a:spcAft>
-              <a:defRPr sz="1800">
-                <a:solidFill>
-                  <a:srgbClr val="CCCCDD"/>
+              <a:defRPr sz="1600">
+                <a:solidFill>
+                  <a:srgbClr val="B0B0C8"/>
                 </a:solidFill>
                 <a:latin typeface="Calibri"/>
               </a:defRPr>
@@ -6353,15 +10401,283 @@
               <a:spcAft>
                 <a:spcPts val="800"/>
               </a:spcAft>
-              <a:defRPr sz="1800">
-                <a:solidFill>
-                  <a:srgbClr val="CCCCDD"/>
-                </a:solidFill>
-                <a:latin typeface="Calibri"/>
-              </a:defRPr>
-            </a:pPr>
-            <a:r>
-              <a:t>No secrets in .env committed to version control</a:t>
+              <a:defRPr sz="1600">
+                <a:solidFill>
+                  <a:srgbClr val="B0B0C8"/>
+                </a:solidFill>
+                <a:latin typeface="Calibri"/>
+              </a:defRPr>
+            </a:pPr>
+            <a:r>
+              <a:t>.env never committed — all secrets externalized</a:t>
+            </a:r>
+          </a:p>
+          <a:p>
+            <a:pPr>
+              <a:spcAft>
+                <a:spcPts val="800"/>
+              </a:spcAft>
+              <a:defRPr sz="1600">
+                <a:solidFill>
+                  <a:srgbClr val="B0B0C8"/>
+                </a:solidFill>
+                <a:latin typeface="Calibri"/>
+              </a:defRPr>
+            </a:pPr>
+            <a:r>
+              <a:t>No plaintext keys stored in memory beyond request scope</a:t>
+            </a:r>
+          </a:p>
+        </p:txBody>
+      </p:sp>
+      <p:sp>
+        <p:nvSpPr>
+          <p:cNvPr id="6" name="Rounded Rectangle 5"/>
+          <p:cNvSpPr/>
+          <p:nvPr/>
+        </p:nvSpPr>
+        <p:spPr>
+          <a:xfrm>
+            <a:off x="8686800" y="3200400"/>
+            <a:ext cx="2743200" cy="2560320"/>
+          </a:xfrm>
+          <a:prstGeom prst="roundRect">
+            <a:avLst>
+              <a:gd name="adj" fmla="val 5000"/>
+            </a:avLst>
+          </a:prstGeom>
+          <a:solidFill>
+            <a:srgbClr val="111128"/>
+          </a:solidFill>
+          <a:ln>
+            <a:noFill/>
+          </a:ln>
+        </p:spPr>
+        <p:style>
+          <a:lnRef idx="1">
+            <a:schemeClr val="accent1"/>
+          </a:lnRef>
+          <a:fillRef idx="3">
+            <a:schemeClr val="accent1"/>
+          </a:fillRef>
+          <a:effectRef idx="2">
+            <a:schemeClr val="accent1"/>
+          </a:effectRef>
+          <a:fontRef idx="minor">
+            <a:schemeClr val="lt1"/>
+          </a:fontRef>
+        </p:style>
+        <p:txBody>
+          <a:bodyPr rtlCol="0" anchor="ctr"/>
+          <a:lstStyle/>
+          <a:p>
+            <a:pPr algn="ctr"/>
+          </a:p>
+        </p:txBody>
+      </p:sp>
+      <p:sp>
+        <p:nvSpPr>
+          <p:cNvPr id="7" name="TextBox 6"/>
+          <p:cNvSpPr txBox="1"/>
+          <p:nvPr/>
+        </p:nvSpPr>
+        <p:spPr>
+          <a:xfrm>
+            <a:off x="8961120" y="3383280"/>
+            <a:ext cx="2286000" cy="365760"/>
+          </a:xfrm>
+          <a:prstGeom prst="rect">
+            <a:avLst/>
+          </a:prstGeom>
+          <a:noFill/>
+        </p:spPr>
+        <p:txBody>
+          <a:bodyPr wrap="square">
+            <a:spAutoFit/>
+          </a:bodyPr>
+          <a:lstStyle/>
+          <a:p>
+            <a:pPr algn="l">
+              <a:defRPr sz="1300" b="1">
+                <a:solidFill>
+                  <a:srgbClr val="00D4AA"/>
+                </a:solidFill>
+                <a:latin typeface="Calibri"/>
+              </a:defRPr>
+            </a:pPr>
+            <a:r>
+              <a:t>Encryption Flow</a:t>
+            </a:r>
+          </a:p>
+        </p:txBody>
+      </p:sp>
+      <p:sp>
+        <p:nvSpPr>
+          <p:cNvPr id="8" name="TextBox 7"/>
+          <p:cNvSpPr txBox="1"/>
+          <p:nvPr/>
+        </p:nvSpPr>
+        <p:spPr>
+          <a:xfrm>
+            <a:off x="8961120" y="3840480"/>
+            <a:ext cx="2286000" cy="1828800"/>
+          </a:xfrm>
+          <a:prstGeom prst="rect">
+            <a:avLst/>
+          </a:prstGeom>
+          <a:noFill/>
+        </p:spPr>
+        <p:txBody>
+          <a:bodyPr wrap="square">
+            <a:spAutoFit/>
+          </a:bodyPr>
+          <a:lstStyle/>
+          <a:p>
+            <a:pPr>
+              <a:spcAft>
+                <a:spcPts val="200"/>
+              </a:spcAft>
+              <a:defRPr sz="1100">
+                <a:solidFill>
+                  <a:srgbClr val="B0B0C8"/>
+                </a:solidFill>
+                <a:latin typeface="Calibri"/>
+              </a:defRPr>
+            </a:pPr>
+            <a:r>
+              <a:t>Key in .env</a:t>
+            </a:r>
+          </a:p>
+          <a:p>
+            <a:pPr>
+              <a:spcAft>
+                <a:spcPts val="200"/>
+              </a:spcAft>
+              <a:defRPr sz="1100">
+                <a:solidFill>
+                  <a:srgbClr val="B0B0C8"/>
+                </a:solidFill>
+                <a:latin typeface="Calibri"/>
+              </a:defRPr>
+            </a:pPr>
+            <a:r>
+              <a:t>  ↓</a:t>
+            </a:r>
+          </a:p>
+          <a:p>
+            <a:pPr>
+              <a:spcAft>
+                <a:spcPts val="200"/>
+              </a:spcAft>
+              <a:defRPr sz="1100">
+                <a:solidFill>
+                  <a:srgbClr val="B0B0C8"/>
+                </a:solidFill>
+                <a:latin typeface="Calibri"/>
+              </a:defRPr>
+            </a:pPr>
+            <a:r>
+              <a:t>AES-256-GCM</a:t>
+            </a:r>
+          </a:p>
+          <a:p>
+            <a:pPr>
+              <a:spcAft>
+                <a:spcPts val="200"/>
+              </a:spcAft>
+              <a:defRPr sz="1100">
+                <a:solidFill>
+                  <a:srgbClr val="B0B0C8"/>
+                </a:solidFill>
+                <a:latin typeface="Calibri"/>
+              </a:defRPr>
+            </a:pPr>
+            <a:r>
+              <a:t>  ↓</a:t>
+            </a:r>
+          </a:p>
+          <a:p>
+            <a:pPr>
+              <a:spcAft>
+                <a:spcPts val="200"/>
+              </a:spcAft>
+              <a:defRPr sz="1100">
+                <a:solidFill>
+                  <a:srgbClr val="B0B0C8"/>
+                </a:solidFill>
+                <a:latin typeface="Calibri"/>
+              </a:defRPr>
+            </a:pPr>
+            <a:r>
+              <a:t>Ciphertext → DB</a:t>
+            </a:r>
+          </a:p>
+          <a:p>
+            <a:pPr>
+              <a:spcAft>
+                <a:spcPts val="200"/>
+              </a:spcAft>
+              <a:defRPr sz="1100">
+                <a:solidFill>
+                  <a:srgbClr val="B0B0C8"/>
+                </a:solidFill>
+                <a:latin typeface="Calibri"/>
+              </a:defRPr>
+            </a:pPr>
+            <a:r>
+              <a:t>  ↓</a:t>
+            </a:r>
+          </a:p>
+          <a:p>
+            <a:pPr>
+              <a:spcAft>
+                <a:spcPts val="200"/>
+              </a:spcAft>
+              <a:defRPr sz="1100">
+                <a:solidFill>
+                  <a:srgbClr val="B0B0C8"/>
+                </a:solidFill>
+                <a:latin typeface="Calibri"/>
+              </a:defRPr>
+            </a:pPr>
+            <a:r>
+              <a:t>Decrypt on read</a:t>
+            </a:r>
+          </a:p>
+        </p:txBody>
+      </p:sp>
+      <p:sp>
+        <p:nvSpPr>
+          <p:cNvPr id="9" name="TextBox 8"/>
+          <p:cNvSpPr txBox="1"/>
+          <p:nvPr/>
+        </p:nvSpPr>
+        <p:spPr>
+          <a:xfrm>
+            <a:off x="10972800" y="6400800"/>
+            <a:ext cx="914400" cy="274320"/>
+          </a:xfrm>
+          <a:prstGeom prst="rect">
+            <a:avLst/>
+          </a:prstGeom>
+          <a:noFill/>
+        </p:spPr>
+        <p:txBody>
+          <a:bodyPr wrap="square">
+            <a:spAutoFit/>
+          </a:bodyPr>
+          <a:lstStyle/>
+          <a:p>
+            <a:pPr algn="r">
+              <a:defRPr sz="1000" b="0">
+                <a:solidFill>
+                  <a:srgbClr val="6B6B8A"/>
+                </a:solidFill>
+                <a:latin typeface="Calibri"/>
+              </a:defRPr>
+            </a:pPr>
+            <a:r>
+              <a:t>09 / 16</a:t>
             </a:r>
           </a:p>
         </p:txBody>
